--- a/examples/pptx/immersion-2-2-happy-path.pptx
+++ b/examples/pptx/immersion-2-2-happy-path.pptx
@@ -554,7 +554,7 @@
           <a:lstStyle/>
           <a:p>
             <a:r>
-              <a:t>The first session of the week where they write code. Everything before this was deciding what to build; this is the hour it starts existing. Keep the energy high and the scope brutally small.</a:t>
+              <a:t>This is session 2.2, the Happy Path. It is the first session of the week where we write code.</a:t>
             </a:r>
           </a:p>
         </p:txBody>
@@ -624,7 +624,7 @@
           <a:lstStyle/>
           <a:p>
             <a:r>
-              <a:t>Define it before they water it down. The happy path is not the common case or the typical case; it is one specific route, with one specific input, chosen because it works.</a:t>
+              <a:t>The happy path is the one route through your system where nothing goes wrong.</a:t>
             </a:r>
           </a:p>
         </p:txBody>
@@ -694,7 +694,7 @@
           <a:lstStyle/>
           <a:p>
             <a:r>
-              <a:t>Four disclaimers, because teams keep widening the definition until it means "the product". The happy path is a scaffold you build the real thing against, and it is allowed to be embarrassingly narrow.</a:t>
+              <a:t>It is not the average case, not most of your inputs, not robust to anything, and not what you ship later. It is allowed to be embarrassingly narrow.</a:t>
             </a:r>
           </a:p>
         </p:txBody>
@@ -764,7 +764,7 @@
           <a:lstStyle/>
           <a:p>
             <a:r>
-              <a:t>Step three is the one teams skip and regret. If two people are testing against slightly different inputs, every disagreement about whether it works becomes unresolvable.</a:t>
+              <a:t>Three steps to choose it. Take a real one, from the actual problem rather than invented. Check it is boring — nothing weird, nothing missing. Then freeze it in the repo, so it is the same bytes for everyone all day.</a:t>
             </a:r>
           </a:p>
         </p:txBody>
@@ -834,7 +834,7 @@
           <a:lstStyle/>
           <a:p>
             <a:r>
-              <a:t>Four properties. The tension is between the first two — small and real pull in opposite directions. Resolve it toward small; a convincing demo needs one good example, not a large one.</a:t>
+              <a:t>A good input is small enough to read fully, real enough to be convincing, boring enough to always work, and fixed so results can be compared.</a:t>
             </a:r>
           </a:p>
         </p:txBody>
@@ -904,7 +904,7 @@
           <a:lstStyle/>
           <a:p>
             <a:r>
-              <a:t>Four commands, thirty seconds, and the team stops arguing about inputs for the rest of the week. Do this before writing a line of the pipeline.</a:t>
+              <a:t>Four commands and thirty seconds: make a fixtures folder, copy the file in, add it, and commit it. After that nobody argues about inputs for the rest of the week.</a:t>
             </a:r>
           </a:p>
         </p:txBody>
@@ -974,7 +974,7 @@
           <a:lstStyle/>
           <a:p>
             <a:r>
-              <a:t>Read the right column aloud twice. Every item there is genuinely good engineering, and every one of them will cost you the demo if you do it this morning. They are Day 3 work.</a:t>
+              <a:t>Today is one input all the way, the steps from your map, and whatever is ugliest. Not today: edge cases, error handling, and a second input.</a:t>
             </a:r>
           </a:p>
         </p:txBody>
@@ -1044,7 +1044,7 @@
           <a:lstStyle/>
           <a:p>
             <a:r>
-              <a:t>A hard ban, not a suggestion. Each of these feels responsible and each is a way of avoiding the frightening part, which is finding out whether the path actually connects.</a:t>
+              <a:t>The ban list for this hour. No try or catch anywhere. No configuration files. No second input to test. And no renaming or refactoring.</a:t>
             </a:r>
           </a:p>
         </p:txBody>
@@ -1114,7 +1114,7 @@
           <a:lstStyle/>
           <a:p>
             <a:r>
-              <a:t>Introduce it precisely. It is not autocomplete — it reads files, writes them, and runs commands in your project. That changes how you should ask for things, which is the next few slides.</a:t>
+              <a:t>Claude Code is an agent that edits and runs your repo. It is not autocomplete — it reads files, writes them, and runs commands.</a:t>
             </a:r>
           </a:p>
         </p:txBody>
@@ -1184,7 +1184,7 @@
           <a:lstStyle/>
           <a:p>
             <a:r>
-              <a:t>Three things in every request. The second is the one from 1.2 — the arrow labels they wrote yesterday are exactly the contracts to hand over now. That is why yesterday mattered.</a:t>
+              <a:t>Three things in every request. Name the one step, by its box on your map. Give it the contract — what comes in and what goes out. And point at the input, the frozen file, by path.</a:t>
             </a:r>
           </a:p>
         </p:txBody>
@@ -1254,7 +1254,7 @@
           <a:lstStyle/>
           <a:p>
             <a:r>
-              <a:t>An agent working in your repo can read anything you put there. Committing yesterday's map and contracts as plain text costs a minute and stops you re-explaining the same design in every request.</a:t>
+              <a:t>It can read anything you put in the repo, so give it four things: the map as a file, the contracts between steps, the frozen input by path, and the command that proves it ran.</a:t>
             </a:r>
           </a:p>
         </p:txBody>
@@ -1324,7 +1324,7 @@
           <a:lstStyle/>
           <a:p>
             <a:r>
-              <a:t>Name the deliverable in one line: a single known-good input travels the whole map and comes out the far end without anyone touching it. Not a good product — a working path.</a:t>
+              <a:t>Fifty-five minutes, and by the end one known-good input travels your whole map and comes out the far end without anyone touching it.</a:t>
             </a:r>
           </a:p>
         </p:txBody>
@@ -1394,7 +1394,7 @@
           <a:lstStyle/>
           <a:p>
             <a:r>
-              <a:t>The single highest-leverage slide for the hour. Left-hand asks produce plausible code you cannot check. Right-hand asks produce code with an obvious pass or fail, which is what lets you move fast.</a:t>
+              <a:t>Two ways to ask. Vague: “parse the document”, “make it handle PDFs”. Specific: “read fixtures slash report dot pdf”, “return title and date”, “write it to out dot json”.</a:t>
             </a:r>
           </a:p>
         </p:txBody>
@@ -1464,7 +1464,7 @@
           <a:lstStyle/>
           <a:p>
             <a:r>
-              <a:t>Four lines that name the input, the output, the location, and the proof. The last line matters most — asking it to run the thing turns a claim into an artifact you can look at.</a:t>
+              <a:t>Here is a request worth making. Read the file, pull out title, author and date, write them to a named output — and run it and show me the file.</a:t>
             </a:r>
           </a:p>
         </p:txBody>
@@ -1534,7 +1534,7 @@
           <a:lstStyle/>
           <a:p>
             <a:r>
-              <a:t>The third is counter-intuitive and worth dwelling on. Nudging a wrong answer usually produces a differently wrong answer; restating the request cleanly is almost always faster than three corrections.</a:t>
+              <a:t>Three rules for driving it. One step per ask, never two boxes at once. Make it run, and ask for the output rather than a description. And reset rather than nudge — if two tries fail, restate the whole ask.</a:t>
             </a:r>
           </a:p>
         </p:txBody>
@@ -1604,7 +1604,7 @@
           <a:lstStyle/>
           <a:p>
             <a:r>
-              <a:t>Four common failures and their one-line fixes. Notice each fix is information you had and did not give. That is usually the shape of the problem.</a:t>
+              <a:t>Four common failures and their fixes. It invented a file, so name paths. It over-built, so say what to skip. It cannot run, so give it the command. It is looping, so restate from scratch.</a:t>
             </a:r>
           </a:p>
         </p:txBody>
@@ -1674,7 +1674,7 @@
           <a:lstStyle/>
           <a:p>
             <a:r>
-              <a:t>A gate between boxes. Moving on from an unverified step is how teams end up at noon with five steps and no idea which one is broken. Thirty seconds here saves an hour later.</a:t>
+              <a:t>Before you move to the next box: you ran it yourself just now, the output file exists, you read the output, and it matches the contract.</a:t>
             </a:r>
           </a:p>
         </p:txBody>
@@ -1744,7 +1744,7 @@
           <a:lstStyle/>
           <a:p>
             <a:r>
-              <a:t>Second objective, and the half of the session teams underestimate. Working steps are not a working path; the seams between them are new work and need their own time.</a:t>
+              <a:t>Second objective: connecting the steps so one input reaches the output with nobody in the middle.</a:t>
             </a:r>
           </a:p>
         </p:txBody>
@@ -1814,7 +1814,7 @@
           <a:lstStyle/>
           <a:p>
             <a:r>
-              <a:t>Ask this while they are feeling good about their individual steps. Every copy-paste, every "then I open the file and", every manual rename is a place the demo will break in front of people.</a:t>
+              <a:t>Your steps work individually. So where do hands still touch it?</a:t>
             </a:r>
           </a:p>
         </p:txBody>
@@ -1884,7 +1884,7 @@
           <a:lstStyle/>
           <a:p>
             <a:r>
-              <a:t>Broaden the definition on purpose. Renaming a file counts. Opening a tab counts. If it lives in someone's head rather than the repo, it will be forgotten exactly once, on stage.</a:t>
+              <a:t>A manual step is anything a person does between two steps. Renaming a file counts. Opening a tab counts.</a:t>
             </a:r>
           </a:p>
         </p:txBody>
@@ -1954,7 +1954,7 @@
           <a:lstStyle/>
           <a:p>
             <a:r>
-              <a:t>Four that teams genuinely do not notice, because the person doing them is the person who built it. Have someone else try to run the pipeline — the hidden steps surface in seconds.</a:t>
+              <a:t>Four that hide in plain sight: copying output into the next box, renaming a file by hand, pasting into a chat window, and simply knowing to run them in the right order.</a:t>
             </a:r>
           </a:p>
         </p:txBody>
@@ -2024,7 +2024,7 @@
           <a:lstStyle/>
           <a:p>
             <a:r>
-              <a:t>The difference an audience feels immediately. A narrated demo asks people to believe the connections exist. A single command shows them. Day 3's red team will attack the narration.</a:t>
+              <a:t>Two kinds of demo. The narrated one, where you say “and now I open this”. And the one that runs once — one command, done.</a:t>
             </a:r>
           </a:p>
         </p:txBody>
@@ -2094,7 +2094,7 @@
           <a:lstStyle/>
           <a:p>
             <a:r>
-              <a:t>Three syllabus objectives across four moves. The order is not negotiable: teams that connect before building have nothing to connect, and teams that polish before committing lose the working version.</a:t>
+              <a:t>Four things this session. We pick one known-good input, build each step against it, connect the steps end to end, and commit the moment it works.</a:t>
             </a:r>
           </a:p>
         </p:txBody>
@@ -2164,7 +2164,7 @@
           <a:lstStyle/>
           <a:p>
             <a:r>
-              <a:t>Step three is the real test. A pipeline that only works when yesterday's files happen to be lying around is not connected — it is a coincidence you have not noticed yet.</a:t>
+              <a:t>Connect in order. Write the contracts down, meaning what each step leaves behind. Chain two, then three, adding one box at a time. Then run it from cold, deleting the outputs and starting over.</a:t>
             </a:r>
           </a:p>
         </p:txBody>
@@ -2234,7 +2234,7 @@
           <a:lstStyle/>
           <a:p>
             <a:r>
-              <a:t>Concrete filenames, not abstractions. Once each step names the file it leaves behind, connecting them is mechanical — and any mismatch becomes visible on this table instead of at runtime.</a:t>
+              <a:t>Write the seams down with real filenames. Ingest leaves raw JSON, extract leaves fields, reason leaves an answer, render leaves the page.</a:t>
             </a:r>
           </a:p>
         </p:txBody>
@@ -2304,7 +2304,7 @@
           <a:lstStyle/>
           <a:p>
             <a:r>
-              <a:t>This is the deliverable of the session in four lines. The first line is the important one — clearing the outputs is what proves the path runs from cold rather than from leftovers.</a:t>
+              <a:t>The whole path in one command. Clear the output directory, run it against the frozen input, four steps report ok, and open the result. That first line is what proves it runs from cold rather than from leftovers.</a:t>
             </a:r>
           </a:p>
         </p:txBody>
@@ -2374,7 +2374,7 @@
           <a:lstStyle/>
           <a:p>
             <a:r>
-              <a:t>Four seam failures, all of them mismatches rather than bugs inside a step. This is why the contracts from 1.2 pay off: a written contract makes a mismatch a five-second fix.</a:t>
+              <a:t>Seams are where it breaks, and they are mismatches rather than bugs. One step writes something the next cannot read, a field is named two ways, a step assumes a list, or a path is only right on one machine.</a:t>
             </a:r>
           </a:p>
         </p:txBody>
@@ -2444,7 +2444,7 @@
           <a:lstStyle/>
           <a:p>
             <a:r>
-              <a:t>Step two is a rule of thumb worth adopting for the week: change the consumer rather than the producer, because upstream changes invalidate every step after them.</a:t>
+              <a:t>Debugging a seam is three steps. Open both files — what was written and what was expected. Fix the later step, adapting downstream rather than upstream. Then rerun from cold, because a partial run proves nothing.</a:t>
             </a:r>
           </a:p>
         </p:txBody>
@@ -2514,7 +2514,7 @@
           <a:lstStyle/>
           <a:p>
             <a:r>
-              <a:t>The case for connecting before polishing. Every surprise you find at 10:40 is small; the same surprise at 4:30 tomorrow is the demo. Connect ugly, early, and often.</a:t>
+              <a:t>Connecting early means surprises now and small, cheap rework, and low demo risk. Connecting late means surprises late and large, expensive rework, and high demo risk.</a:t>
             </a:r>
           </a:p>
         </p:txBody>
@@ -2584,7 +2584,7 @@
           <a:lstStyle/>
           <a:p>
             <a:r>
-              <a:t>Four ways a path looks connected and is not. Read each and have teams self-diagnose out loud. Most rooms will have at least two of these right now.</a:t>
+              <a:t>Four smells that look connected and are not. Only one person can run it. It fails from a clean start. You have to know the sequence. Or one box is still done by hand.</a:t>
             </a:r>
           </a:p>
         </p:txBody>
@@ -2654,7 +2654,7 @@
           <a:lstStyle/>
           <a:p>
             <a:r>
-              <a:t>Read this at 10:35 whether or not anyone asks. Teams under time pressure instinctively half-finish every step; the right move is to fully remove one so the path still runs end to end.</a:t>
+              <a:t>If you are behind: cut a box rather than a corner, stubbing a whole step so the path stays whole. Shrink the input, one page instead of the whole report. And never drop the commit — a short path committed beats a long one lost.</a:t>
             </a:r>
           </a:p>
         </p:txBody>
@@ -2724,7 +2724,7 @@
           <a:lstStyle/>
           <a:p>
             <a:r>
-              <a:t>The definition of done for this hour. Note the third: a teammate running it on their own machine catches more problems in a minute than an hour of reading code.</a:t>
+              <a:t>Done means all four: one command start to finish, it runs from an empty output directory, someone else has run it, and the output is the real thing.</a:t>
             </a:r>
           </a:p>
         </p:txBody>
@@ -2794,7 +2794,7 @@
           <a:lstStyle/>
           <a:p>
             <a:r>
-              <a:t>The syllabus says no manual intervention, and it means none. This is the line to repeat when a team argues that their one small copy-paste does not really count.</a:t>
+              <a:t>If hands touch it, it is not connected. That one small copy-paste does count.</a:t>
             </a:r>
           </a:p>
         </p:txBody>
@@ -2864,7 +2864,7 @@
           <a:lstStyle/>
           <a:p>
             <a:r>
-              <a:t>Ask it and wait. Teams that cannot answer in ten seconds have not chosen an input, they have a category of inputs — and a category cannot be built against. Make them name a specific file, message, or URL.</a:t>
+              <a:t>So: what is your one input? Not a category of inputs — one specific file, message or URL.</a:t>
             </a:r>
           </a:p>
         </p:txBody>
@@ -2934,7 +2934,7 @@
           <a:lstStyle/>
           <a:p>
             <a:r>
-              <a:t>Third objective. Short section, absolute rule. The gap between "it works" and "it is committed" is where more prototypes die than in any technical failure all week.</a:t>
+              <a:t>Third objective, and it is a short one with an absolute rule: commit the moment it works.</a:t>
             </a:r>
           </a:p>
         </p:txBody>
@@ -3004,7 +3004,7 @@
           <a:lstStyle/>
           <a:p>
             <a:r>
-              <a:t>Define working so it cannot be argued with. Not "should work", not "worked earlier" — it ran, from cold, and you watched it. That is the moment the commit rule triggers.</a:t>
+              <a:t>Works means it ran end to end, from cold, in front of you. Not “should work”, not “worked earlier”.</a:t>
             </a:r>
           </a:p>
         </p:txBody>
@@ -3074,7 +3074,7 @@
           <a:lstStyle/>
           <a:p>
             <a:r>
-              <a:t>Four reasons, but the second carries it. The moment after something works is the moment of maximum temptation to improve it, and the improvement is not yet reversible.</a:t>
+              <a:t>Why right now: this is the version that works, the next change may break it, you will not remember what you changed, and a demo needs a known-good commit.</a:t>
             </a:r>
           </a:p>
         </p:txBody>
@@ -3144,7 +3144,7 @@
           <a:lstStyle/>
           <a:p>
             <a:r>
-              <a:t>Deliberately ceremonial, because the discipline is behavioural rather than technical. Everyone knows they should commit; almost nobody does it at exactly the right second.</a:t>
+              <a:t>Three steps, deliberately ceremonial. Stop typing — hands off the keyboard, it works. Commit and push, with a message saying what now works. Then keep going, and anything new lands on top of it.</a:t>
             </a:r>
           </a:p>
         </p:txBody>
@@ -3214,7 +3214,7 @@
           <a:lstStyle/>
           <a:p>
             <a:r>
-              <a:t>Note the explicit paths on the first line rather than a bulk add — you want the pipeline, not the output directory or a stray virtual environment. The tag gives the demo a name to fall back to.</a:t>
+              <a:t>Sixty seconds of insurance. Add the pipeline by explicit path, commit, push, and tag it — because the tag gives your demo a name to fall back to.</a:t>
             </a:r>
           </a:p>
         </p:txBody>
@@ -3284,7 +3284,7 @@
           <a:lstStyle/>
           <a:p>
             <a:r>
-              <a:t>The whole prototype, seven entries. Show it to make the point that a working path is small — if a team's repo is much bigger than this by 10:50, they built something other than the happy path.</a:t>
+              <a:t>The whole prototype, seven entries. If your repo is much bigger than this by 10:50, you built something other than the happy path.</a:t>
             </a:r>
           </a:p>
         </p:txBody>
@@ -3354,7 +3354,7 @@
           <a:lstStyle/>
           <a:p>
             <a:r>
-              <a:t>A commit message that answers the first three is a handover note. Tomorrow's red team and tonight's tired teammate both read it, and neither cares about the fourth.</a:t>
+              <a:t>The message should say what input it accepts, what output it produces, and what is still stubbed. Not how clever it is.</a:t>
             </a:r>
           </a:p>
         </p:txBody>
@@ -3424,7 +3424,7 @@
           <a:lstStyle/>
           <a:p>
             <a:r>
-              <a:t>The whole rule in two columns. The left column is a discipline of about sixty seconds; the right column is the freedom it buys for the rest of the day.</a:t>
+              <a:t>Before committing: nothing else at all, no tidying, no renaming, not one more small fix. After committing: everything you want, break it freely, you can always get back.</a:t>
             </a:r>
           </a:p>
         </p:txBody>
@@ -3494,7 +3494,7 @@
           <a:lstStyle/>
           <a:p>
             <a:r>
-              <a:t>Three payoffs, and the third is the one they will actually use. Every week at least one team demos from the tag rather than from main, and is very glad it exists.</a:t>
+              <a:t>The commit buys you three things. A place to stand, since every later change can be undone to here. A shared build, so teammates start from what already works. And a safe demo — a known-good tag if tomorrow goes wrong.</a:t>
             </a:r>
           </a:p>
         </p:txBody>
@@ -3564,7 +3564,7 @@
           <a:lstStyle/>
           <a:p>
             <a:r>
-              <a:t>The queue that opens once the commit is in. Notice the last item is 2.3's work — teams who finish early should start there rather than gold-plating the pipeline.</a:t>
+              <a:t>Then, and only then: add a second input, handle the obvious failure, make the output look right, and start on the demo wrapper.</a:t>
             </a:r>
           </a:p>
         </p:txBody>
@@ -3634,7 +3634,7 @@
           <a:lstStyle/>
           <a:p>
             <a:r>
-              <a:t>The bridge. Last session gave every box a tool. Tools sitting side by side are not a prototype; the prototype appears the moment one input crosses all of them without help.</a:t>
+              <a:t>Last session gave every step a tool. Tools sitting side by side are not a prototype; the prototype appears when one input crosses all of them without help.</a:t>
             </a:r>
           </a:p>
         </p:txBody>
@@ -3704,7 +3704,7 @@
           <a:lstStyle/>
           <a:p>
             <a:r>
-              <a:t>Four answers into the repo before the break. The fourth is the honest one, and it becomes part of the caveat list that 2.3 asks them to write and Day 3 attacks.</a:t>
+              <a:t>Four answers into the repo now: the frozen input, the one command, the known-good tag, and what is still done by hand.</a:t>
             </a:r>
           </a:p>
         </p:txBody>
@@ -3774,7 +3774,7 @@
           <a:lstStyle/>
           <a:p>
             <a:r>
-              <a:t>The exit checklist. A team missing the last line is not finished, however good their code is — read it slowly and let the pause do the work.</a:t>
+              <a:t>You are leaving with one input frozen in the repo, one command that runs it all, a cold start that works, and all of it committed and pushed.</a:t>
             </a:r>
           </a:p>
         </p:txBody>
@@ -3844,7 +3844,7 @@
           <a:lstStyle/>
           <a:p>
             <a:r>
-              <a:t>The gate into 2.3. Right now the honest answer is usually no, and that gap — between a path that runs and a thing a stranger can drive — is exactly what the next session is for.</a:t>
+              <a:t>One question to carry into the break: could a stranger run it? Right now the honest answer is usually no.</a:t>
             </a:r>
           </a:p>
         </p:txBody>
@@ -3914,7 +3914,7 @@
           <a:lstStyle/>
           <a:p>
             <a:r>
-              <a:t>Set up 2.3. The pipeline they just built is the engine; the next hour puts a handle on it and gets it off their machine. The last line is the one Day 3 will read most carefully.</a:t>
+              <a:t>Next session we put a front end on it that a stranger can drive, ship it to a public URL rather than your laptop, write a three-minute demo script, and list honestly what is faked.</a:t>
             </a:r>
           </a:p>
         </p:txBody>
@@ -3984,7 +3984,7 @@
           <a:lstStyle/>
           <a:p>
             <a:r>
-              <a:t>The shape of the hour. Point out that "chain" is a separate move from "build" — the seams between steps are where the time actually goes, and teams who assume otherwise run out of clock.</a:t>
+              <a:t>Four moves: choose one input and freeze it, build one step at a time, chain them so no hands are left in the middle, and commit the second it works.</a:t>
             </a:r>
           </a:p>
         </p:txBody>
@@ -4054,7 +4054,7 @@
           <a:lstStyle/>
           <a:p>
             <a:r>
-              <a:t>Put the clock on the wall. The two times that matter are 10:35 and 10:50 — a team still building steps at 10:35 must cut a box, and a team not committed by 10:50 has lost the session regardless of what runs.</a:t>
+              <a:t>The hour runs in four blocks. Freeze the input by ten past, build steps until 10:35, connect from a cold start, and commit and tag by 10:50. If you are still building steps at 10:35, cut a box.</a:t>
             </a:r>
           </a:p>
         </p:txBody>
@@ -4124,7 +4124,7 @@
           <a:lstStyle/>
           <a:p>
             <a:r>
-              <a:t>A deliberately old idea. Working comes before right, and right comes before fast. Today ends at the first word. Anyone reaching for the second before lunch is off the path.</a:t>
+              <a:t>Make it work. Only then, anything else. Working comes before right, and right comes before fast — today ends at the first word.</a:t>
             </a:r>
           </a:p>
         </p:txBody>
@@ -4194,7 +4194,7 @@
           <a:lstStyle/>
           <a:p>
             <a:r>
-              <a:t>First objective. A single frozen input is the most useful constraint available today — it turns an open-ended build into a finite one and gives the team an unambiguous test.</a:t>
+              <a:t>First objective: one known-good input, chosen and frozen.</a:t>
             </a:r>
           </a:p>
         </p:txBody>

--- a/examples/pptx/immersion-2-2-happy-path.pptx
+++ b/examples/pptx/immersion-2-2-happy-path.pptx
@@ -5682,7 +5682,7 @@
             <a:r>
               <a:rPr sz="3400" b="1" i="0">
                 <a:solidFill>
-                  <a:srgbClr val="123A6B"/>
+                  <a:srgbClr val="0072CE"/>
                 </a:solidFill>
                 <a:latin typeface="Arial"/>
               </a:rPr>
@@ -5719,7 +5719,7 @@
             <a:r>
               <a:rPr sz="3400" b="1" i="0">
                 <a:solidFill>
-                  <a:srgbClr val="123A6B"/>
+                  <a:srgbClr val="0072CE"/>
                 </a:solidFill>
                 <a:latin typeface="Arial"/>
               </a:rPr>
@@ -6611,6 +6611,43 @@
         <p:spPr>
           <a:xfrm>
             <a:off x="6233160" y="1499616"/>
+            <a:ext cx="5958840" cy="609600"/>
+          </a:xfrm>
+          <a:prstGeom prst="rect">
+            <a:avLst/>
+          </a:prstGeom>
+          <a:noFill/>
+        </p:spPr>
+        <p:txBody>
+          <a:bodyPr wrap="none" lIns="0" rIns="0">
+            <a:noAutofit/>
+          </a:bodyPr>
+          <a:lstStyle/>
+          <a:p>
+            <a:pPr algn="l"/>
+            <a:r>
+              <a:rPr sz="3400" b="0" i="0">
+                <a:solidFill>
+                  <a:srgbClr val="0A2240"/>
+                </a:solidFill>
+                <a:latin typeface="Arial"/>
+              </a:rPr>
+              <a:t>Built with customers.</a:t>
+            </a:r>
+          </a:p>
+        </p:txBody>
+      </p:sp>
+      <p:sp>
+        <p:nvSpPr>
+          <p:cNvPr id="7" name="TextBox 6"/>
+          <p:cNvSpPr/>
+          <p:nvPr>
+            <p:ph type="body" idx="2"/>
+          </p:nvPr>
+        </p:nvSpPr>
+        <p:spPr>
+          <a:xfrm>
+            <a:off x="6233160" y="2383536"/>
             <a:ext cx="5501640" cy="1127760"/>
           </a:xfrm>
           <a:prstGeom prst="rect">
@@ -6632,44 +6669,7 @@
                 </a:solidFill>
                 <a:latin typeface="Arial"/>
               </a:rPr>
-              <a:t>Built with customers, not just for them.</a:t>
-            </a:r>
-          </a:p>
-        </p:txBody>
-      </p:sp>
-      <p:sp>
-        <p:nvSpPr>
-          <p:cNvPr id="7" name="TextBox 6"/>
-          <p:cNvSpPr/>
-          <p:nvPr>
-            <p:ph type="body" idx="2"/>
-          </p:nvPr>
-        </p:nvSpPr>
-        <p:spPr>
-          <a:xfrm>
-            <a:off x="6233160" y="2901696"/>
-            <a:ext cx="5501640" cy="1127760"/>
-          </a:xfrm>
-          <a:prstGeom prst="rect">
-            <a:avLst/>
-          </a:prstGeom>
-          <a:noFill/>
-        </p:spPr>
-        <p:txBody>
-          <a:bodyPr wrap="square" lIns="0" rIns="0">
-            <a:noAutofit/>
-          </a:bodyPr>
-          <a:lstStyle/>
-          <a:p>
-            <a:pPr algn="l"/>
-            <a:r>
-              <a:rPr sz="3400" b="0" i="0">
-                <a:solidFill>
-                  <a:srgbClr val="0A2240"/>
-                </a:solidFill>
-                <a:latin typeface="Arial"/>
-              </a:rPr>
-              <a:t>60% faster rollout; 50% fewer tickets.</a:t>
+              <a:t>60% faster; 50% fewer tickets</a:t>
             </a:r>
           </a:p>
         </p:txBody>
@@ -6688,405 +6688,6 @@
 </file>
 
 <file path=ppt/slideLayouts/slideLayout18.xml><?xml version="1.0" encoding="utf-8"?>
-<p:sldLayout xmlns:a="http://schemas.openxmlformats.org/drawingml/2006/main" xmlns:r="http://schemas.openxmlformats.org/officeDocument/2006/relationships" xmlns:p="http://schemas.openxmlformats.org/presentationml/2006/main" type="blank" preserve="1">
-  <p:cSld name="slidekit · Card Grid">
-    <p:bg>
-      <p:bgPr>
-        <a:solidFill>
-          <a:srgbClr val="FFFFFF"/>
-        </a:solidFill>
-        <a:effectLst/>
-      </p:bgPr>
-    </p:bg>
-    <p:spTree>
-      <p:nvGrpSpPr>
-        <p:cNvPr id="1" name=""/>
-        <p:cNvGrpSpPr/>
-        <p:nvPr/>
-      </p:nvGrpSpPr>
-      <p:grpSpPr>
-        <a:xfrm>
-          <a:off x="0" y="0"/>
-          <a:ext cx="0" cy="0"/>
-          <a:chOff x="0" y="0"/>
-          <a:chExt cx="0" cy="0"/>
-        </a:xfrm>
-      </p:grpSpPr>
-      <p:sp>
-        <p:nvSpPr>
-          <p:cNvPr id="4" name="Slide Number Placeholder 3"/>
-          <p:cNvSpPr>
-            <a:spLocks noGrp="1"/>
-          </p:cNvSpPr>
-          <p:nvPr>
-            <p:ph type="sldNum" sz="quarter" idx="12"/>
-          </p:nvPr>
-        </p:nvSpPr>
-        <p:spPr>
-          <a:xfrm>
-            <a:off x="11186160" y="6035040"/>
-            <a:ext cx="548640" cy="365760"/>
-          </a:xfrm>
-        </p:spPr>
-        <p:txBody>
-          <a:bodyPr/>
-          <a:lstStyle/>
-          <a:p>
-            <a:fld id="{C1FF6DA9-008F-8B48-92A6-B652298478BF}" type="slidenum">
-              <a:rPr lang="en-US" smtClean="0"/>
-              <a:t>‹#›</a:t>
-            </a:fld>
-            <a:endParaRPr lang="en-US"/>
-          </a:p>
-        </p:txBody>
-      </p:sp>
-      <p:sp>
-        <p:nvSpPr>
-          <p:cNvPr id="5" name="TextBox 4"/>
-          <p:cNvSpPr/>
-          <p:nvPr>
-            <p:ph type="title"/>
-          </p:nvPr>
-        </p:nvSpPr>
-        <p:spPr>
-          <a:xfrm>
-            <a:off x="457200" y="457200"/>
-            <a:ext cx="11277600" cy="768096"/>
-          </a:xfrm>
-          <a:prstGeom prst="rect">
-            <a:avLst/>
-          </a:prstGeom>
-          <a:noFill/>
-        </p:spPr>
-        <p:txBody>
-          <a:bodyPr wrap="none" lIns="0" rIns="0">
-            <a:noAutofit/>
-          </a:bodyPr>
-          <a:lstStyle/>
-          <a:p>
-            <a:pPr algn="l"/>
-            <a:r>
-              <a:rPr sz="4200" b="1" i="0">
-                <a:solidFill>
-                  <a:srgbClr val="0072CE"/>
-                </a:solidFill>
-                <a:latin typeface="Arial"/>
-              </a:rPr>
-              <a:t>What We Offer</a:t>
-            </a:r>
-          </a:p>
-        </p:txBody>
-      </p:sp>
-      <p:sp>
-        <p:nvSpPr>
-          <p:cNvPr id="6" name="TextBox 5"/>
-          <p:cNvSpPr/>
-          <p:nvPr>
-            <p:ph type="body" idx="1"/>
-          </p:nvPr>
-        </p:nvSpPr>
-        <p:spPr>
-          <a:xfrm>
-            <a:off x="457200" y="1499616"/>
-            <a:ext cx="2831366" cy="518159"/>
-          </a:xfrm>
-          <a:prstGeom prst="rect">
-            <a:avLst/>
-          </a:prstGeom>
-          <a:noFill/>
-        </p:spPr>
-        <p:txBody>
-          <a:bodyPr wrap="none" lIns="0" rIns="0">
-            <a:noAutofit/>
-          </a:bodyPr>
-          <a:lstStyle/>
-          <a:p>
-            <a:pPr algn="l"/>
-            <a:r>
-              <a:rPr sz="3400" b="1" i="0">
-                <a:solidFill>
-                  <a:srgbClr val="0A2240"/>
-                </a:solidFill>
-                <a:latin typeface="Arial"/>
-              </a:rPr>
-              <a:t>Insights</a:t>
-            </a:r>
-          </a:p>
-        </p:txBody>
-      </p:sp>
-      <p:sp>
-        <p:nvSpPr>
-          <p:cNvPr id="7" name="TextBox 6"/>
-          <p:cNvSpPr/>
-          <p:nvPr>
-            <p:ph type="body" idx="2"/>
-          </p:nvPr>
-        </p:nvSpPr>
-        <p:spPr>
-          <a:xfrm>
-            <a:off x="457200" y="2154935"/>
-            <a:ext cx="2613660" cy="3605785"/>
-          </a:xfrm>
-          <a:prstGeom prst="rect">
-            <a:avLst/>
-          </a:prstGeom>
-          <a:noFill/>
-        </p:spPr>
-        <p:txBody>
-          <a:bodyPr wrap="square" lIns="0" rIns="0">
-            <a:noAutofit/>
-          </a:bodyPr>
-          <a:lstStyle/>
-          <a:p>
-            <a:pPr algn="l"/>
-            <a:r>
-              <a:rPr sz="3400" b="0" i="0">
-                <a:solidFill>
-                  <a:srgbClr val="0A2240"/>
-                </a:solidFill>
-                <a:latin typeface="Arial"/>
-              </a:rPr>
-              <a:t>Live data and AI analytics.</a:t>
-            </a:r>
-          </a:p>
-        </p:txBody>
-      </p:sp>
-      <p:sp>
-        <p:nvSpPr>
-          <p:cNvPr id="8" name="TextBox 7"/>
-          <p:cNvSpPr/>
-          <p:nvPr>
-            <p:ph type="body" idx="3"/>
-          </p:nvPr>
-        </p:nvSpPr>
-        <p:spPr>
-          <a:xfrm>
-            <a:off x="3345180" y="1499616"/>
-            <a:ext cx="2909292" cy="518159"/>
-          </a:xfrm>
-          <a:prstGeom prst="rect">
-            <a:avLst/>
-          </a:prstGeom>
-          <a:noFill/>
-        </p:spPr>
-        <p:txBody>
-          <a:bodyPr wrap="none" lIns="0" rIns="0">
-            <a:noAutofit/>
-          </a:bodyPr>
-          <a:lstStyle/>
-          <a:p>
-            <a:pPr algn="l"/>
-            <a:r>
-              <a:rPr sz="3400" b="1" i="0">
-                <a:solidFill>
-                  <a:srgbClr val="0A2240"/>
-                </a:solidFill>
-                <a:latin typeface="Arial"/>
-              </a:rPr>
-              <a:t>Security</a:t>
-            </a:r>
-          </a:p>
-        </p:txBody>
-      </p:sp>
-      <p:sp>
-        <p:nvSpPr>
-          <p:cNvPr id="9" name="TextBox 8"/>
-          <p:cNvSpPr/>
-          <p:nvPr>
-            <p:ph type="body" idx="4"/>
-          </p:nvPr>
-        </p:nvSpPr>
-        <p:spPr>
-          <a:xfrm>
-            <a:off x="3345180" y="2154935"/>
-            <a:ext cx="2613660" cy="3605785"/>
-          </a:xfrm>
-          <a:prstGeom prst="rect">
-            <a:avLst/>
-          </a:prstGeom>
-          <a:noFill/>
-        </p:spPr>
-        <p:txBody>
-          <a:bodyPr wrap="square" lIns="0" rIns="0">
-            <a:noAutofit/>
-          </a:bodyPr>
-          <a:lstStyle/>
-          <a:p>
-            <a:pPr algn="l"/>
-            <a:r>
-              <a:rPr sz="3400" b="0" i="0">
-                <a:solidFill>
-                  <a:srgbClr val="0A2240"/>
-                </a:solidFill>
-                <a:latin typeface="Arial"/>
-              </a:rPr>
-              <a:t>Zero-trust, SOC 2 ready.</a:t>
-            </a:r>
-          </a:p>
-        </p:txBody>
-      </p:sp>
-      <p:sp>
-        <p:nvSpPr>
-          <p:cNvPr id="10" name="TextBox 9"/>
-          <p:cNvSpPr/>
-          <p:nvPr>
-            <p:ph type="body" idx="5"/>
-          </p:nvPr>
-        </p:nvSpPr>
-        <p:spPr>
-          <a:xfrm>
-            <a:off x="6233160" y="1499616"/>
-            <a:ext cx="2613660" cy="518159"/>
-          </a:xfrm>
-          <a:prstGeom prst="rect">
-            <a:avLst/>
-          </a:prstGeom>
-          <a:noFill/>
-        </p:spPr>
-        <p:txBody>
-          <a:bodyPr wrap="none" lIns="0" rIns="0">
-            <a:noAutofit/>
-          </a:bodyPr>
-          <a:lstStyle/>
-          <a:p>
-            <a:pPr algn="l"/>
-            <a:r>
-              <a:rPr sz="3400" b="1" i="0">
-                <a:solidFill>
-                  <a:srgbClr val="0A2240"/>
-                </a:solidFill>
-                <a:latin typeface="Arial"/>
-              </a:rPr>
-              <a:t>Speed</a:t>
-            </a:r>
-          </a:p>
-        </p:txBody>
-      </p:sp>
-      <p:sp>
-        <p:nvSpPr>
-          <p:cNvPr id="11" name="TextBox 10"/>
-          <p:cNvSpPr/>
-          <p:nvPr>
-            <p:ph type="body" idx="6"/>
-          </p:nvPr>
-        </p:nvSpPr>
-        <p:spPr>
-          <a:xfrm>
-            <a:off x="6233160" y="2154935"/>
-            <a:ext cx="2613660" cy="3605785"/>
-          </a:xfrm>
-          <a:prstGeom prst="rect">
-            <a:avLst/>
-          </a:prstGeom>
-          <a:noFill/>
-        </p:spPr>
-        <p:txBody>
-          <a:bodyPr wrap="square" lIns="0" rIns="0">
-            <a:noAutofit/>
-          </a:bodyPr>
-          <a:lstStyle/>
-          <a:p>
-            <a:pPr algn="l"/>
-            <a:r>
-              <a:rPr sz="3400" b="0" i="0">
-                <a:solidFill>
-                  <a:srgbClr val="0A2240"/>
-                </a:solidFill>
-                <a:latin typeface="Arial"/>
-              </a:rPr>
-              <a:t>Sub-100ms p99 latency.</a:t>
-            </a:r>
-          </a:p>
-        </p:txBody>
-      </p:sp>
-      <p:sp>
-        <p:nvSpPr>
-          <p:cNvPr id="12" name="TextBox 11"/>
-          <p:cNvSpPr/>
-          <p:nvPr>
-            <p:ph type="body" idx="7"/>
-          </p:nvPr>
-        </p:nvSpPr>
-        <p:spPr>
-          <a:xfrm>
-            <a:off x="9121140" y="1499616"/>
-            <a:ext cx="2613660" cy="518159"/>
-          </a:xfrm>
-          <a:prstGeom prst="rect">
-            <a:avLst/>
-          </a:prstGeom>
-          <a:noFill/>
-        </p:spPr>
-        <p:txBody>
-          <a:bodyPr wrap="none" lIns="0" rIns="0">
-            <a:noAutofit/>
-          </a:bodyPr>
-          <a:lstStyle/>
-          <a:p>
-            <a:pPr algn="l"/>
-            <a:r>
-              <a:rPr sz="3400" b="1" i="0">
-                <a:solidFill>
-                  <a:srgbClr val="0A2240"/>
-                </a:solidFill>
-                <a:latin typeface="Arial"/>
-              </a:rPr>
-              <a:t>APIs</a:t>
-            </a:r>
-          </a:p>
-        </p:txBody>
-      </p:sp>
-      <p:sp>
-        <p:nvSpPr>
-          <p:cNvPr id="13" name="TextBox 12"/>
-          <p:cNvSpPr/>
-          <p:nvPr>
-            <p:ph type="body" idx="8"/>
-          </p:nvPr>
-        </p:nvSpPr>
-        <p:spPr>
-          <a:xfrm>
-            <a:off x="9121140" y="2154935"/>
-            <a:ext cx="2613660" cy="3605785"/>
-          </a:xfrm>
-          <a:prstGeom prst="rect">
-            <a:avLst/>
-          </a:prstGeom>
-          <a:noFill/>
-        </p:spPr>
-        <p:txBody>
-          <a:bodyPr wrap="square" lIns="0" rIns="0">
-            <a:noAutofit/>
-          </a:bodyPr>
-          <a:lstStyle/>
-          <a:p>
-            <a:pPr algn="l"/>
-            <a:r>
-              <a:rPr sz="3400" b="0" i="0">
-                <a:solidFill>
-                  <a:srgbClr val="0A2240"/>
-                </a:solidFill>
-                <a:latin typeface="Arial"/>
-              </a:rPr>
-              <a:t>300+ open connectors.</a:t>
-            </a:r>
-          </a:p>
-        </p:txBody>
-      </p:sp>
-    </p:spTree>
-    <p:extLst>
-      <p:ext uri="{BB962C8B-B14F-4D97-AF65-F5344CB8AC3E}">
-        <p14:creationId xmlns:p14="http://schemas.microsoft.com/office/powerpoint/2010/main" val="1212999818"/>
-      </p:ext>
-    </p:extLst>
-  </p:cSld>
-  <p:clrMapOvr>
-    <a:masterClrMapping/>
-  </p:clrMapOvr>
-</p:sldLayout>
-</file>
-
-<file path=ppt/slideLayouts/slideLayout19.xml><?xml version="1.0" encoding="utf-8"?>
 <p:sldLayout xmlns:a="http://schemas.openxmlformats.org/drawingml/2006/main" xmlns:r="http://schemas.openxmlformats.org/officeDocument/2006/relationships" xmlns:p="http://schemas.openxmlformats.org/presentationml/2006/main" type="blank" preserve="1">
   <p:cSld name="slidekit · Section Divider">
     <p:bg>
@@ -7241,6 +6842,511 @@
                 <a:latin typeface="Arial"/>
               </a:rPr>
               <a:t>Where We Stand Today</a:t>
+            </a:r>
+          </a:p>
+        </p:txBody>
+      </p:sp>
+    </p:spTree>
+    <p:extLst>
+      <p:ext uri="{BB962C8B-B14F-4D97-AF65-F5344CB8AC3E}">
+        <p14:creationId xmlns:p14="http://schemas.microsoft.com/office/powerpoint/2010/main" val="1212999818"/>
+      </p:ext>
+    </p:extLst>
+  </p:cSld>
+  <p:clrMapOvr>
+    <a:masterClrMapping/>
+  </p:clrMapOvr>
+</p:sldLayout>
+</file>
+
+<file path=ppt/slideLayouts/slideLayout19.xml><?xml version="1.0" encoding="utf-8"?>
+<p:sldLayout xmlns:a="http://schemas.openxmlformats.org/drawingml/2006/main" xmlns:r="http://schemas.openxmlformats.org/officeDocument/2006/relationships" xmlns:p="http://schemas.openxmlformats.org/presentationml/2006/main" type="blank" preserve="1">
+  <p:cSld name="slidekit · Agenda">
+    <p:bg>
+      <p:bgPr>
+        <a:solidFill>
+          <a:srgbClr val="FFFFFF"/>
+        </a:solidFill>
+        <a:effectLst/>
+      </p:bgPr>
+    </p:bg>
+    <p:spTree>
+      <p:nvGrpSpPr>
+        <p:cNvPr id="1" name=""/>
+        <p:cNvGrpSpPr/>
+        <p:nvPr/>
+      </p:nvGrpSpPr>
+      <p:grpSpPr>
+        <a:xfrm>
+          <a:off x="0" y="0"/>
+          <a:ext cx="0" cy="0"/>
+          <a:chOff x="0" y="0"/>
+          <a:chExt cx="0" cy="0"/>
+        </a:xfrm>
+      </p:grpSpPr>
+      <p:sp>
+        <p:nvSpPr>
+          <p:cNvPr id="4" name="Slide Number Placeholder 3"/>
+          <p:cNvSpPr>
+            <a:spLocks noGrp="1"/>
+          </p:cNvSpPr>
+          <p:nvPr>
+            <p:ph type="sldNum" sz="quarter" idx="12"/>
+          </p:nvPr>
+        </p:nvSpPr>
+        <p:spPr>
+          <a:xfrm>
+            <a:off x="11186160" y="6035040"/>
+            <a:ext cx="548640" cy="365760"/>
+          </a:xfrm>
+        </p:spPr>
+        <p:txBody>
+          <a:bodyPr/>
+          <a:lstStyle/>
+          <a:p>
+            <a:fld id="{C1FF6DA9-008F-8B48-92A6-B652298478BF}" type="slidenum">
+              <a:rPr lang="en-US" smtClean="0"/>
+              <a:t>‹#›</a:t>
+            </a:fld>
+            <a:endParaRPr lang="en-US"/>
+          </a:p>
+        </p:txBody>
+      </p:sp>
+      <p:sp>
+        <p:nvSpPr>
+          <p:cNvPr id="5" name="TextBox 4"/>
+          <p:cNvSpPr/>
+          <p:nvPr>
+            <p:ph type="title"/>
+          </p:nvPr>
+        </p:nvSpPr>
+        <p:spPr>
+          <a:xfrm>
+            <a:off x="457200" y="457200"/>
+            <a:ext cx="11277600" cy="768096"/>
+          </a:xfrm>
+          <a:prstGeom prst="rect">
+            <a:avLst/>
+          </a:prstGeom>
+          <a:noFill/>
+        </p:spPr>
+        <p:txBody>
+          <a:bodyPr wrap="none" lIns="0" rIns="0">
+            <a:noAutofit/>
+          </a:bodyPr>
+          <a:lstStyle/>
+          <a:p>
+            <a:pPr algn="l"/>
+            <a:r>
+              <a:rPr sz="4200" b="1" i="0">
+                <a:solidFill>
+                  <a:srgbClr val="0072CE"/>
+                </a:solidFill>
+                <a:latin typeface="Arial"/>
+              </a:rPr>
+              <a:t>What We Will Cover</a:t>
+            </a:r>
+          </a:p>
+        </p:txBody>
+      </p:sp>
+      <p:sp>
+        <p:nvSpPr>
+          <p:cNvPr id="6" name="Rectangle 5"/>
+          <p:cNvSpPr/>
+          <p:nvPr>
+            <p:ph type="body" idx="1"/>
+          </p:nvPr>
+        </p:nvSpPr>
+        <p:spPr>
+          <a:xfrm>
+            <a:off x="457200" y="1280160"/>
+            <a:ext cx="11277600" cy="64008"/>
+          </a:xfrm>
+          <a:prstGeom prst="rect">
+            <a:avLst/>
+          </a:prstGeom>
+          <a:solidFill>
+            <a:srgbClr val="0072CE"/>
+          </a:solidFill>
+          <a:ln>
+            <a:noFill/>
+          </a:ln>
+          <a:effectLst/>
+        </p:spPr>
+        <p:txBody>
+          <a:bodyPr rtlCol="0" anchor="ctr"/>
+          <a:lstStyle/>
+          <a:p>
+            <a:pPr algn="ctr"/>
+          </a:p>
+        </p:txBody>
+      </p:sp>
+      <p:sp>
+        <p:nvSpPr>
+          <p:cNvPr id="7" name="TextBox 6"/>
+          <p:cNvSpPr/>
+          <p:nvPr>
+            <p:ph type="body" idx="2"/>
+          </p:nvPr>
+        </p:nvSpPr>
+        <p:spPr>
+          <a:xfrm>
+            <a:off x="457200" y="1618488"/>
+            <a:ext cx="951348" cy="518159"/>
+          </a:xfrm>
+          <a:prstGeom prst="rect">
+            <a:avLst/>
+          </a:prstGeom>
+          <a:noFill/>
+        </p:spPr>
+        <p:txBody>
+          <a:bodyPr wrap="none" lIns="0" rIns="0">
+            <a:noAutofit/>
+          </a:bodyPr>
+          <a:lstStyle/>
+          <a:p>
+            <a:pPr algn="l"/>
+            <a:r>
+              <a:rPr sz="3400" b="1" i="0">
+                <a:solidFill>
+                  <a:srgbClr val="0072CE"/>
+                </a:solidFill>
+                <a:latin typeface="Arial"/>
+              </a:rPr>
+              <a:t>01</a:t>
+            </a:r>
+          </a:p>
+        </p:txBody>
+      </p:sp>
+      <p:sp>
+        <p:nvSpPr>
+          <p:cNvPr id="8" name="TextBox 7"/>
+          <p:cNvSpPr/>
+          <p:nvPr>
+            <p:ph type="body" idx="3"/>
+          </p:nvPr>
+        </p:nvSpPr>
+        <p:spPr>
+          <a:xfrm>
+            <a:off x="1371600" y="1618488"/>
+            <a:ext cx="10363200" cy="518159"/>
+          </a:xfrm>
+          <a:prstGeom prst="rect">
+            <a:avLst/>
+          </a:prstGeom>
+          <a:noFill/>
+        </p:spPr>
+        <p:txBody>
+          <a:bodyPr wrap="none" lIns="0" rIns="0">
+            <a:noAutofit/>
+          </a:bodyPr>
+          <a:lstStyle/>
+          <a:p>
+            <a:pPr algn="l"/>
+            <a:r>
+              <a:rPr sz="3400" b="0" i="0">
+                <a:solidFill>
+                  <a:srgbClr val="0A2240"/>
+                </a:solidFill>
+                <a:latin typeface="Arial"/>
+              </a:rPr>
+              <a:t>Performance against targets</a:t>
+            </a:r>
+          </a:p>
+        </p:txBody>
+      </p:sp>
+      <p:sp>
+        <p:nvSpPr>
+          <p:cNvPr id="9" name="TextBox 8"/>
+          <p:cNvSpPr/>
+          <p:nvPr>
+            <p:ph type="body" idx="4"/>
+          </p:nvPr>
+        </p:nvSpPr>
+        <p:spPr>
+          <a:xfrm>
+            <a:off x="457200" y="2501798"/>
+            <a:ext cx="951348" cy="518159"/>
+          </a:xfrm>
+          <a:prstGeom prst="rect">
+            <a:avLst/>
+          </a:prstGeom>
+          <a:noFill/>
+        </p:spPr>
+        <p:txBody>
+          <a:bodyPr wrap="none" lIns="0" rIns="0">
+            <a:noAutofit/>
+          </a:bodyPr>
+          <a:lstStyle/>
+          <a:p>
+            <a:pPr algn="l"/>
+            <a:r>
+              <a:rPr sz="3400" b="1" i="0">
+                <a:solidFill>
+                  <a:srgbClr val="0072CE"/>
+                </a:solidFill>
+                <a:latin typeface="Arial"/>
+              </a:rPr>
+              <a:t>02</a:t>
+            </a:r>
+          </a:p>
+        </p:txBody>
+      </p:sp>
+      <p:sp>
+        <p:nvSpPr>
+          <p:cNvPr id="10" name="TextBox 9"/>
+          <p:cNvSpPr/>
+          <p:nvPr>
+            <p:ph type="body" idx="5"/>
+          </p:nvPr>
+        </p:nvSpPr>
+        <p:spPr>
+          <a:xfrm>
+            <a:off x="1371600" y="2501798"/>
+            <a:ext cx="10363200" cy="518159"/>
+          </a:xfrm>
+          <a:prstGeom prst="rect">
+            <a:avLst/>
+          </a:prstGeom>
+          <a:noFill/>
+        </p:spPr>
+        <p:txBody>
+          <a:bodyPr wrap="none" lIns="0" rIns="0">
+            <a:noAutofit/>
+          </a:bodyPr>
+          <a:lstStyle/>
+          <a:p>
+            <a:pPr algn="l"/>
+            <a:r>
+              <a:rPr sz="3400" b="0" i="0">
+                <a:solidFill>
+                  <a:srgbClr val="0A2240"/>
+                </a:solidFill>
+                <a:latin typeface="Arial"/>
+              </a:rPr>
+              <a:t>Customer and market signals</a:t>
+            </a:r>
+          </a:p>
+        </p:txBody>
+      </p:sp>
+      <p:sp>
+        <p:nvSpPr>
+          <p:cNvPr id="11" name="TextBox 10"/>
+          <p:cNvSpPr/>
+          <p:nvPr>
+            <p:ph type="body" idx="6"/>
+          </p:nvPr>
+        </p:nvSpPr>
+        <p:spPr>
+          <a:xfrm>
+            <a:off x="457200" y="3385108"/>
+            <a:ext cx="951348" cy="518159"/>
+          </a:xfrm>
+          <a:prstGeom prst="rect">
+            <a:avLst/>
+          </a:prstGeom>
+          <a:noFill/>
+        </p:spPr>
+        <p:txBody>
+          <a:bodyPr wrap="none" lIns="0" rIns="0">
+            <a:noAutofit/>
+          </a:bodyPr>
+          <a:lstStyle/>
+          <a:p>
+            <a:pPr algn="l"/>
+            <a:r>
+              <a:rPr sz="3400" b="1" i="0">
+                <a:solidFill>
+                  <a:srgbClr val="0072CE"/>
+                </a:solidFill>
+                <a:latin typeface="Arial"/>
+              </a:rPr>
+              <a:t>03</a:t>
+            </a:r>
+          </a:p>
+        </p:txBody>
+      </p:sp>
+      <p:sp>
+        <p:nvSpPr>
+          <p:cNvPr id="12" name="TextBox 11"/>
+          <p:cNvSpPr/>
+          <p:nvPr>
+            <p:ph type="body" idx="7"/>
+          </p:nvPr>
+        </p:nvSpPr>
+        <p:spPr>
+          <a:xfrm>
+            <a:off x="1371600" y="3385108"/>
+            <a:ext cx="10363200" cy="518159"/>
+          </a:xfrm>
+          <a:prstGeom prst="rect">
+            <a:avLst/>
+          </a:prstGeom>
+          <a:noFill/>
+        </p:spPr>
+        <p:txBody>
+          <a:bodyPr wrap="none" lIns="0" rIns="0">
+            <a:noAutofit/>
+          </a:bodyPr>
+          <a:lstStyle/>
+          <a:p>
+            <a:pPr algn="l"/>
+            <a:r>
+              <a:rPr sz="3400" b="0" i="0">
+                <a:solidFill>
+                  <a:srgbClr val="0A2240"/>
+                </a:solidFill>
+                <a:latin typeface="Arial"/>
+              </a:rPr>
+              <a:t>Operational health and risks</a:t>
+            </a:r>
+          </a:p>
+        </p:txBody>
+      </p:sp>
+      <p:sp>
+        <p:nvSpPr>
+          <p:cNvPr id="13" name="TextBox 12"/>
+          <p:cNvSpPr/>
+          <p:nvPr>
+            <p:ph type="body" idx="8"/>
+          </p:nvPr>
+        </p:nvSpPr>
+        <p:spPr>
+          <a:xfrm>
+            <a:off x="457200" y="4268418"/>
+            <a:ext cx="951348" cy="518159"/>
+          </a:xfrm>
+          <a:prstGeom prst="rect">
+            <a:avLst/>
+          </a:prstGeom>
+          <a:noFill/>
+        </p:spPr>
+        <p:txBody>
+          <a:bodyPr wrap="none" lIns="0" rIns="0">
+            <a:noAutofit/>
+          </a:bodyPr>
+          <a:lstStyle/>
+          <a:p>
+            <a:pPr algn="l"/>
+            <a:r>
+              <a:rPr sz="3400" b="1" i="0">
+                <a:solidFill>
+                  <a:srgbClr val="0072CE"/>
+                </a:solidFill>
+                <a:latin typeface="Arial"/>
+              </a:rPr>
+              <a:t>04</a:t>
+            </a:r>
+          </a:p>
+        </p:txBody>
+      </p:sp>
+      <p:sp>
+        <p:nvSpPr>
+          <p:cNvPr id="14" name="TextBox 13"/>
+          <p:cNvSpPr/>
+          <p:nvPr>
+            <p:ph type="body" idx="9"/>
+          </p:nvPr>
+        </p:nvSpPr>
+        <p:spPr>
+          <a:xfrm>
+            <a:off x="1371600" y="4268418"/>
+            <a:ext cx="10363200" cy="518159"/>
+          </a:xfrm>
+          <a:prstGeom prst="rect">
+            <a:avLst/>
+          </a:prstGeom>
+          <a:noFill/>
+        </p:spPr>
+        <p:txBody>
+          <a:bodyPr wrap="none" lIns="0" rIns="0">
+            <a:noAutofit/>
+          </a:bodyPr>
+          <a:lstStyle/>
+          <a:p>
+            <a:pPr algn="l"/>
+            <a:r>
+              <a:rPr sz="3400" b="0" i="0">
+                <a:solidFill>
+                  <a:srgbClr val="0A2240"/>
+                </a:solidFill>
+                <a:latin typeface="Arial"/>
+              </a:rPr>
+              <a:t>Roadmap for next quarter</a:t>
+            </a:r>
+          </a:p>
+        </p:txBody>
+      </p:sp>
+      <p:sp>
+        <p:nvSpPr>
+          <p:cNvPr id="15" name="TextBox 14"/>
+          <p:cNvSpPr/>
+          <p:nvPr>
+            <p:ph type="body" idx="13"/>
+          </p:nvPr>
+        </p:nvSpPr>
+        <p:spPr>
+          <a:xfrm>
+            <a:off x="457200" y="5151728"/>
+            <a:ext cx="951348" cy="518159"/>
+          </a:xfrm>
+          <a:prstGeom prst="rect">
+            <a:avLst/>
+          </a:prstGeom>
+          <a:noFill/>
+        </p:spPr>
+        <p:txBody>
+          <a:bodyPr wrap="none" lIns="0" rIns="0">
+            <a:noAutofit/>
+          </a:bodyPr>
+          <a:lstStyle/>
+          <a:p>
+            <a:pPr algn="l"/>
+            <a:r>
+              <a:rPr sz="3400" b="1" i="0">
+                <a:solidFill>
+                  <a:srgbClr val="0072CE"/>
+                </a:solidFill>
+                <a:latin typeface="Arial"/>
+              </a:rPr>
+              <a:t>05</a:t>
+            </a:r>
+          </a:p>
+        </p:txBody>
+      </p:sp>
+      <p:sp>
+        <p:nvSpPr>
+          <p:cNvPr id="16" name="TextBox 15"/>
+          <p:cNvSpPr/>
+          <p:nvPr>
+            <p:ph type="body" idx="14"/>
+          </p:nvPr>
+        </p:nvSpPr>
+        <p:spPr>
+          <a:xfrm>
+            <a:off x="1371600" y="5151728"/>
+            <a:ext cx="10363200" cy="518159"/>
+          </a:xfrm>
+          <a:prstGeom prst="rect">
+            <a:avLst/>
+          </a:prstGeom>
+          <a:noFill/>
+        </p:spPr>
+        <p:txBody>
+          <a:bodyPr wrap="none" lIns="0" rIns="0">
+            <a:noAutofit/>
+          </a:bodyPr>
+          <a:lstStyle/>
+          <a:p>
+            <a:pPr algn="l"/>
+            <a:r>
+              <a:rPr sz="3400" b="0" i="0">
+                <a:solidFill>
+                  <a:srgbClr val="0A2240"/>
+                </a:solidFill>
+                <a:latin typeface="Arial"/>
+              </a:rPr>
+              <a:t>Decisions we need today</a:t>
             </a:r>
           </a:p>
         </p:txBody>
@@ -7430,511 +7536,6 @@
 
 <file path=ppt/slideLayouts/slideLayout20.xml><?xml version="1.0" encoding="utf-8"?>
 <p:sldLayout xmlns:a="http://schemas.openxmlformats.org/drawingml/2006/main" xmlns:r="http://schemas.openxmlformats.org/officeDocument/2006/relationships" xmlns:p="http://schemas.openxmlformats.org/presentationml/2006/main" type="blank" preserve="1">
-  <p:cSld name="slidekit · Agenda">
-    <p:bg>
-      <p:bgPr>
-        <a:solidFill>
-          <a:srgbClr val="FFFFFF"/>
-        </a:solidFill>
-        <a:effectLst/>
-      </p:bgPr>
-    </p:bg>
-    <p:spTree>
-      <p:nvGrpSpPr>
-        <p:cNvPr id="1" name=""/>
-        <p:cNvGrpSpPr/>
-        <p:nvPr/>
-      </p:nvGrpSpPr>
-      <p:grpSpPr>
-        <a:xfrm>
-          <a:off x="0" y="0"/>
-          <a:ext cx="0" cy="0"/>
-          <a:chOff x="0" y="0"/>
-          <a:chExt cx="0" cy="0"/>
-        </a:xfrm>
-      </p:grpSpPr>
-      <p:sp>
-        <p:nvSpPr>
-          <p:cNvPr id="4" name="Slide Number Placeholder 3"/>
-          <p:cNvSpPr>
-            <a:spLocks noGrp="1"/>
-          </p:cNvSpPr>
-          <p:nvPr>
-            <p:ph type="sldNum" sz="quarter" idx="12"/>
-          </p:nvPr>
-        </p:nvSpPr>
-        <p:spPr>
-          <a:xfrm>
-            <a:off x="11186160" y="6035040"/>
-            <a:ext cx="548640" cy="365760"/>
-          </a:xfrm>
-        </p:spPr>
-        <p:txBody>
-          <a:bodyPr/>
-          <a:lstStyle/>
-          <a:p>
-            <a:fld id="{C1FF6DA9-008F-8B48-92A6-B652298478BF}" type="slidenum">
-              <a:rPr lang="en-US" smtClean="0"/>
-              <a:t>‹#›</a:t>
-            </a:fld>
-            <a:endParaRPr lang="en-US"/>
-          </a:p>
-        </p:txBody>
-      </p:sp>
-      <p:sp>
-        <p:nvSpPr>
-          <p:cNvPr id="5" name="TextBox 4"/>
-          <p:cNvSpPr/>
-          <p:nvPr>
-            <p:ph type="title"/>
-          </p:nvPr>
-        </p:nvSpPr>
-        <p:spPr>
-          <a:xfrm>
-            <a:off x="457200" y="457200"/>
-            <a:ext cx="11277600" cy="768096"/>
-          </a:xfrm>
-          <a:prstGeom prst="rect">
-            <a:avLst/>
-          </a:prstGeom>
-          <a:noFill/>
-        </p:spPr>
-        <p:txBody>
-          <a:bodyPr wrap="none" lIns="0" rIns="0">
-            <a:noAutofit/>
-          </a:bodyPr>
-          <a:lstStyle/>
-          <a:p>
-            <a:pPr algn="l"/>
-            <a:r>
-              <a:rPr sz="4200" b="1" i="0">
-                <a:solidFill>
-                  <a:srgbClr val="0072CE"/>
-                </a:solidFill>
-                <a:latin typeface="Arial"/>
-              </a:rPr>
-              <a:t>What We Will Cover</a:t>
-            </a:r>
-          </a:p>
-        </p:txBody>
-      </p:sp>
-      <p:sp>
-        <p:nvSpPr>
-          <p:cNvPr id="6" name="Rectangle 5"/>
-          <p:cNvSpPr/>
-          <p:nvPr>
-            <p:ph type="body" idx="1"/>
-          </p:nvPr>
-        </p:nvSpPr>
-        <p:spPr>
-          <a:xfrm>
-            <a:off x="457200" y="1280160"/>
-            <a:ext cx="11277600" cy="64008"/>
-          </a:xfrm>
-          <a:prstGeom prst="rect">
-            <a:avLst/>
-          </a:prstGeom>
-          <a:solidFill>
-            <a:srgbClr val="0072CE"/>
-          </a:solidFill>
-          <a:ln>
-            <a:noFill/>
-          </a:ln>
-          <a:effectLst/>
-        </p:spPr>
-        <p:txBody>
-          <a:bodyPr rtlCol="0" anchor="ctr"/>
-          <a:lstStyle/>
-          <a:p>
-            <a:pPr algn="ctr"/>
-          </a:p>
-        </p:txBody>
-      </p:sp>
-      <p:sp>
-        <p:nvSpPr>
-          <p:cNvPr id="7" name="TextBox 6"/>
-          <p:cNvSpPr/>
-          <p:nvPr>
-            <p:ph type="body" idx="2"/>
-          </p:nvPr>
-        </p:nvSpPr>
-        <p:spPr>
-          <a:xfrm>
-            <a:off x="457200" y="1618488"/>
-            <a:ext cx="951348" cy="518159"/>
-          </a:xfrm>
-          <a:prstGeom prst="rect">
-            <a:avLst/>
-          </a:prstGeom>
-          <a:noFill/>
-        </p:spPr>
-        <p:txBody>
-          <a:bodyPr wrap="none" lIns="0" rIns="0">
-            <a:noAutofit/>
-          </a:bodyPr>
-          <a:lstStyle/>
-          <a:p>
-            <a:pPr algn="l"/>
-            <a:r>
-              <a:rPr sz="3400" b="1" i="0">
-                <a:solidFill>
-                  <a:srgbClr val="0072CE"/>
-                </a:solidFill>
-                <a:latin typeface="Arial"/>
-              </a:rPr>
-              <a:t>01</a:t>
-            </a:r>
-          </a:p>
-        </p:txBody>
-      </p:sp>
-      <p:sp>
-        <p:nvSpPr>
-          <p:cNvPr id="8" name="TextBox 7"/>
-          <p:cNvSpPr/>
-          <p:nvPr>
-            <p:ph type="body" idx="3"/>
-          </p:nvPr>
-        </p:nvSpPr>
-        <p:spPr>
-          <a:xfrm>
-            <a:off x="1371600" y="1618488"/>
-            <a:ext cx="10363200" cy="518159"/>
-          </a:xfrm>
-          <a:prstGeom prst="rect">
-            <a:avLst/>
-          </a:prstGeom>
-          <a:noFill/>
-        </p:spPr>
-        <p:txBody>
-          <a:bodyPr wrap="none" lIns="0" rIns="0">
-            <a:noAutofit/>
-          </a:bodyPr>
-          <a:lstStyle/>
-          <a:p>
-            <a:pPr algn="l"/>
-            <a:r>
-              <a:rPr sz="3400" b="0" i="0">
-                <a:solidFill>
-                  <a:srgbClr val="0A2240"/>
-                </a:solidFill>
-                <a:latin typeface="Arial"/>
-              </a:rPr>
-              <a:t>Performance against targets</a:t>
-            </a:r>
-          </a:p>
-        </p:txBody>
-      </p:sp>
-      <p:sp>
-        <p:nvSpPr>
-          <p:cNvPr id="9" name="TextBox 8"/>
-          <p:cNvSpPr/>
-          <p:nvPr>
-            <p:ph type="body" idx="4"/>
-          </p:nvPr>
-        </p:nvSpPr>
-        <p:spPr>
-          <a:xfrm>
-            <a:off x="457200" y="2501798"/>
-            <a:ext cx="951348" cy="518159"/>
-          </a:xfrm>
-          <a:prstGeom prst="rect">
-            <a:avLst/>
-          </a:prstGeom>
-          <a:noFill/>
-        </p:spPr>
-        <p:txBody>
-          <a:bodyPr wrap="none" lIns="0" rIns="0">
-            <a:noAutofit/>
-          </a:bodyPr>
-          <a:lstStyle/>
-          <a:p>
-            <a:pPr algn="l"/>
-            <a:r>
-              <a:rPr sz="3400" b="1" i="0">
-                <a:solidFill>
-                  <a:srgbClr val="0072CE"/>
-                </a:solidFill>
-                <a:latin typeface="Arial"/>
-              </a:rPr>
-              <a:t>02</a:t>
-            </a:r>
-          </a:p>
-        </p:txBody>
-      </p:sp>
-      <p:sp>
-        <p:nvSpPr>
-          <p:cNvPr id="10" name="TextBox 9"/>
-          <p:cNvSpPr/>
-          <p:nvPr>
-            <p:ph type="body" idx="5"/>
-          </p:nvPr>
-        </p:nvSpPr>
-        <p:spPr>
-          <a:xfrm>
-            <a:off x="1371600" y="2501798"/>
-            <a:ext cx="10363200" cy="518159"/>
-          </a:xfrm>
-          <a:prstGeom prst="rect">
-            <a:avLst/>
-          </a:prstGeom>
-          <a:noFill/>
-        </p:spPr>
-        <p:txBody>
-          <a:bodyPr wrap="none" lIns="0" rIns="0">
-            <a:noAutofit/>
-          </a:bodyPr>
-          <a:lstStyle/>
-          <a:p>
-            <a:pPr algn="l"/>
-            <a:r>
-              <a:rPr sz="3400" b="0" i="0">
-                <a:solidFill>
-                  <a:srgbClr val="0A2240"/>
-                </a:solidFill>
-                <a:latin typeface="Arial"/>
-              </a:rPr>
-              <a:t>Customer and market signals</a:t>
-            </a:r>
-          </a:p>
-        </p:txBody>
-      </p:sp>
-      <p:sp>
-        <p:nvSpPr>
-          <p:cNvPr id="11" name="TextBox 10"/>
-          <p:cNvSpPr/>
-          <p:nvPr>
-            <p:ph type="body" idx="6"/>
-          </p:nvPr>
-        </p:nvSpPr>
-        <p:spPr>
-          <a:xfrm>
-            <a:off x="457200" y="3385108"/>
-            <a:ext cx="951348" cy="518159"/>
-          </a:xfrm>
-          <a:prstGeom prst="rect">
-            <a:avLst/>
-          </a:prstGeom>
-          <a:noFill/>
-        </p:spPr>
-        <p:txBody>
-          <a:bodyPr wrap="none" lIns="0" rIns="0">
-            <a:noAutofit/>
-          </a:bodyPr>
-          <a:lstStyle/>
-          <a:p>
-            <a:pPr algn="l"/>
-            <a:r>
-              <a:rPr sz="3400" b="1" i="0">
-                <a:solidFill>
-                  <a:srgbClr val="0072CE"/>
-                </a:solidFill>
-                <a:latin typeface="Arial"/>
-              </a:rPr>
-              <a:t>03</a:t>
-            </a:r>
-          </a:p>
-        </p:txBody>
-      </p:sp>
-      <p:sp>
-        <p:nvSpPr>
-          <p:cNvPr id="12" name="TextBox 11"/>
-          <p:cNvSpPr/>
-          <p:nvPr>
-            <p:ph type="body" idx="7"/>
-          </p:nvPr>
-        </p:nvSpPr>
-        <p:spPr>
-          <a:xfrm>
-            <a:off x="1371600" y="3385108"/>
-            <a:ext cx="10363200" cy="518159"/>
-          </a:xfrm>
-          <a:prstGeom prst="rect">
-            <a:avLst/>
-          </a:prstGeom>
-          <a:noFill/>
-        </p:spPr>
-        <p:txBody>
-          <a:bodyPr wrap="none" lIns="0" rIns="0">
-            <a:noAutofit/>
-          </a:bodyPr>
-          <a:lstStyle/>
-          <a:p>
-            <a:pPr algn="l"/>
-            <a:r>
-              <a:rPr sz="3400" b="0" i="0">
-                <a:solidFill>
-                  <a:srgbClr val="0A2240"/>
-                </a:solidFill>
-                <a:latin typeface="Arial"/>
-              </a:rPr>
-              <a:t>Operational health and risks</a:t>
-            </a:r>
-          </a:p>
-        </p:txBody>
-      </p:sp>
-      <p:sp>
-        <p:nvSpPr>
-          <p:cNvPr id="13" name="TextBox 12"/>
-          <p:cNvSpPr/>
-          <p:nvPr>
-            <p:ph type="body" idx="8"/>
-          </p:nvPr>
-        </p:nvSpPr>
-        <p:spPr>
-          <a:xfrm>
-            <a:off x="457200" y="4268418"/>
-            <a:ext cx="951348" cy="518159"/>
-          </a:xfrm>
-          <a:prstGeom prst="rect">
-            <a:avLst/>
-          </a:prstGeom>
-          <a:noFill/>
-        </p:spPr>
-        <p:txBody>
-          <a:bodyPr wrap="none" lIns="0" rIns="0">
-            <a:noAutofit/>
-          </a:bodyPr>
-          <a:lstStyle/>
-          <a:p>
-            <a:pPr algn="l"/>
-            <a:r>
-              <a:rPr sz="3400" b="1" i="0">
-                <a:solidFill>
-                  <a:srgbClr val="0072CE"/>
-                </a:solidFill>
-                <a:latin typeface="Arial"/>
-              </a:rPr>
-              <a:t>04</a:t>
-            </a:r>
-          </a:p>
-        </p:txBody>
-      </p:sp>
-      <p:sp>
-        <p:nvSpPr>
-          <p:cNvPr id="14" name="TextBox 13"/>
-          <p:cNvSpPr/>
-          <p:nvPr>
-            <p:ph type="body" idx="9"/>
-          </p:nvPr>
-        </p:nvSpPr>
-        <p:spPr>
-          <a:xfrm>
-            <a:off x="1371600" y="4268418"/>
-            <a:ext cx="10363200" cy="518159"/>
-          </a:xfrm>
-          <a:prstGeom prst="rect">
-            <a:avLst/>
-          </a:prstGeom>
-          <a:noFill/>
-        </p:spPr>
-        <p:txBody>
-          <a:bodyPr wrap="none" lIns="0" rIns="0">
-            <a:noAutofit/>
-          </a:bodyPr>
-          <a:lstStyle/>
-          <a:p>
-            <a:pPr algn="l"/>
-            <a:r>
-              <a:rPr sz="3400" b="0" i="0">
-                <a:solidFill>
-                  <a:srgbClr val="0A2240"/>
-                </a:solidFill>
-                <a:latin typeface="Arial"/>
-              </a:rPr>
-              <a:t>Roadmap for next quarter</a:t>
-            </a:r>
-          </a:p>
-        </p:txBody>
-      </p:sp>
-      <p:sp>
-        <p:nvSpPr>
-          <p:cNvPr id="15" name="TextBox 14"/>
-          <p:cNvSpPr/>
-          <p:nvPr>
-            <p:ph type="body" idx="13"/>
-          </p:nvPr>
-        </p:nvSpPr>
-        <p:spPr>
-          <a:xfrm>
-            <a:off x="457200" y="5151728"/>
-            <a:ext cx="951348" cy="518159"/>
-          </a:xfrm>
-          <a:prstGeom prst="rect">
-            <a:avLst/>
-          </a:prstGeom>
-          <a:noFill/>
-        </p:spPr>
-        <p:txBody>
-          <a:bodyPr wrap="none" lIns="0" rIns="0">
-            <a:noAutofit/>
-          </a:bodyPr>
-          <a:lstStyle/>
-          <a:p>
-            <a:pPr algn="l"/>
-            <a:r>
-              <a:rPr sz="3400" b="1" i="0">
-                <a:solidFill>
-                  <a:srgbClr val="0072CE"/>
-                </a:solidFill>
-                <a:latin typeface="Arial"/>
-              </a:rPr>
-              <a:t>05</a:t>
-            </a:r>
-          </a:p>
-        </p:txBody>
-      </p:sp>
-      <p:sp>
-        <p:nvSpPr>
-          <p:cNvPr id="16" name="TextBox 15"/>
-          <p:cNvSpPr/>
-          <p:nvPr>
-            <p:ph type="body" idx="14"/>
-          </p:nvPr>
-        </p:nvSpPr>
-        <p:spPr>
-          <a:xfrm>
-            <a:off x="1371600" y="5151728"/>
-            <a:ext cx="10363200" cy="518159"/>
-          </a:xfrm>
-          <a:prstGeom prst="rect">
-            <a:avLst/>
-          </a:prstGeom>
-          <a:noFill/>
-        </p:spPr>
-        <p:txBody>
-          <a:bodyPr wrap="none" lIns="0" rIns="0">
-            <a:noAutofit/>
-          </a:bodyPr>
-          <a:lstStyle/>
-          <a:p>
-            <a:pPr algn="l"/>
-            <a:r>
-              <a:rPr sz="3400" b="0" i="0">
-                <a:solidFill>
-                  <a:srgbClr val="0A2240"/>
-                </a:solidFill>
-                <a:latin typeface="Arial"/>
-              </a:rPr>
-              <a:t>Decisions we need today</a:t>
-            </a:r>
-          </a:p>
-        </p:txBody>
-      </p:sp>
-    </p:spTree>
-    <p:extLst>
-      <p:ext uri="{BB962C8B-B14F-4D97-AF65-F5344CB8AC3E}">
-        <p14:creationId xmlns:p14="http://schemas.microsoft.com/office/powerpoint/2010/main" val="1212999818"/>
-      </p:ext>
-    </p:extLst>
-  </p:cSld>
-  <p:clrMapOvr>
-    <a:masterClrMapping/>
-  </p:clrMapOvr>
-</p:sldLayout>
-</file>
-
-<file path=ppt/slideLayouts/slideLayout21.xml><?xml version="1.0" encoding="utf-8"?>
-<p:sldLayout xmlns:a="http://schemas.openxmlformats.org/drawingml/2006/main" xmlns:r="http://schemas.openxmlformats.org/officeDocument/2006/relationships" xmlns:p="http://schemas.openxmlformats.org/presentationml/2006/main" type="blank" preserve="1">
   <p:cSld name="slidekit · Big Number">
     <p:bg>
       <p:bgPr>
@@ -8105,7 +7706,7 @@
 </p:sldLayout>
 </file>
 
-<file path=ppt/slideLayouts/slideLayout22.xml><?xml version="1.0" encoding="utf-8"?>
+<file path=ppt/slideLayouts/slideLayout21.xml><?xml version="1.0" encoding="utf-8"?>
 <p:sldLayout xmlns:a="http://schemas.openxmlformats.org/drawingml/2006/main" xmlns:r="http://schemas.openxmlformats.org/officeDocument/2006/relationships" xmlns:p="http://schemas.openxmlformats.org/presentationml/2006/main" type="blank" preserve="1">
   <p:cSld name="slidekit · Pull Quote">
     <p:bg>
@@ -8168,8 +7769,8 @@
         </p:nvSpPr>
         <p:spPr>
           <a:xfrm>
-            <a:off x="457200" y="2301240"/>
-            <a:ext cx="128016" cy="2255520"/>
+            <a:off x="457200" y="2621280"/>
+            <a:ext cx="128016" cy="1615440"/>
           </a:xfrm>
           <a:prstGeom prst="rect">
             <a:avLst/>
@@ -8200,16 +7801,16 @@
         </p:nvSpPr>
         <p:spPr>
           <a:xfrm>
-            <a:off x="996696" y="2301240"/>
-            <a:ext cx="10738104" cy="1371600"/>
-          </a:xfrm>
-          <a:prstGeom prst="rect">
-            <a:avLst/>
-          </a:prstGeom>
-          <a:noFill/>
-        </p:spPr>
-        <p:txBody>
-          <a:bodyPr wrap="square" lIns="0" rIns="0">
+            <a:off x="996696" y="2621280"/>
+            <a:ext cx="11195304" cy="731520"/>
+          </a:xfrm>
+          <a:prstGeom prst="rect">
+            <a:avLst/>
+          </a:prstGeom>
+          <a:noFill/>
+        </p:spPr>
+        <p:txBody>
+          <a:bodyPr wrap="none" lIns="0" rIns="0">
             <a:noAutofit/>
           </a:bodyPr>
           <a:lstStyle/>
@@ -8222,7 +7823,7 @@
                 </a:solidFill>
                 <a:latin typeface="Arial"/>
               </a:rPr>
-              <a:t>"We stopped buying tools and started buying outcomes."</a:t>
+              <a:t>"We buy outcomes, not tools."</a:t>
             </a:r>
           </a:p>
         </p:txBody>
@@ -8237,7 +7838,7 @@
         </p:nvSpPr>
         <p:spPr>
           <a:xfrm>
-            <a:off x="996696" y="3947160"/>
+            <a:off x="996696" y="3627120"/>
             <a:ext cx="11195304" cy="609600"/>
           </a:xfrm>
           <a:prstGeom prst="rect">
@@ -8255,7 +7856,7 @@
             <a:r>
               <a:rPr sz="3400" b="0" i="0">
                 <a:solidFill>
-                  <a:srgbClr val="5B6B82"/>
+                  <a:srgbClr val="0A2240"/>
                 </a:solidFill>
                 <a:latin typeface="Arial"/>
               </a:rPr>
@@ -8277,7 +7878,7 @@
 </p:sldLayout>
 </file>
 
-<file path=ppt/slideLayouts/slideLayout23.xml><?xml version="1.0" encoding="utf-8"?>
+<file path=ppt/slideLayouts/slideLayout22.xml><?xml version="1.0" encoding="utf-8"?>
 <p:sldLayout xmlns:a="http://schemas.openxmlformats.org/drawingml/2006/main" xmlns:r="http://schemas.openxmlformats.org/officeDocument/2006/relationships" xmlns:p="http://schemas.openxmlformats.org/presentationml/2006/main" type="blank" preserve="1">
   <p:cSld name="slidekit · Definition">
     <p:bg>
@@ -8340,8 +7941,8 @@
         </p:nvSpPr>
         <p:spPr>
           <a:xfrm>
-            <a:off x="457200" y="1965960"/>
-            <a:ext cx="128016" cy="2926080"/>
+            <a:off x="457200" y="2484120"/>
+            <a:ext cx="128016" cy="1889760"/>
           </a:xfrm>
           <a:prstGeom prst="rect">
             <a:avLst/>
@@ -8372,7 +7973,7 @@
         </p:nvSpPr>
         <p:spPr>
           <a:xfrm>
-            <a:off x="996696" y="1965960"/>
+            <a:off x="996696" y="2484120"/>
             <a:ext cx="11195304" cy="1005840"/>
           </a:xfrm>
           <a:prstGeom prst="rect">
@@ -8409,16 +8010,16 @@
         </p:nvSpPr>
         <p:spPr>
           <a:xfrm>
-            <a:off x="996696" y="3246120"/>
-            <a:ext cx="10738104" cy="1645920"/>
-          </a:xfrm>
-          <a:prstGeom prst="rect">
-            <a:avLst/>
-          </a:prstGeom>
-          <a:noFill/>
-        </p:spPr>
-        <p:txBody>
-          <a:bodyPr wrap="square" lIns="0" rIns="0">
+            <a:off x="996696" y="3764280"/>
+            <a:ext cx="11195304" cy="609600"/>
+          </a:xfrm>
+          <a:prstGeom prst="rect">
+            <a:avLst/>
+          </a:prstGeom>
+          <a:noFill/>
+        </p:spPr>
+        <p:txBody>
+          <a:bodyPr wrap="none" lIns="0" rIns="0">
             <a:noAutofit/>
           </a:bodyPr>
           <a:lstStyle/>
@@ -8431,7 +8032,7 @@
                 </a:solidFill>
                 <a:latin typeface="Arial"/>
               </a:rPr>
-              <a:t>The percentage of recurring revenue retained from existing customers over a period, including expansion and after churn.</a:t>
+              <a:t>Revenue kept from existing customers.</a:t>
             </a:r>
           </a:p>
         </p:txBody>
@@ -8449,7 +8050,7 @@
 </p:sldLayout>
 </file>
 
-<file path=ppt/slideLayouts/slideLayout24.xml><?xml version="1.0" encoding="utf-8"?>
+<file path=ppt/slideLayouts/slideLayout23.xml><?xml version="1.0" encoding="utf-8"?>
 <p:sldLayout xmlns:a="http://schemas.openxmlformats.org/drawingml/2006/main" xmlns:r="http://schemas.openxmlformats.org/officeDocument/2006/relationships" xmlns:p="http://schemas.openxmlformats.org/presentationml/2006/main" type="blank" preserve="1">
   <p:cSld name="slidekit · Question">
     <p:bg>
@@ -8512,8 +8113,8 @@
         </p:nvSpPr>
         <p:spPr>
           <a:xfrm>
-            <a:off x="457200" y="2011680"/>
-            <a:ext cx="128016" cy="2834640"/>
+            <a:off x="457200" y="2926080"/>
+            <a:ext cx="128016" cy="1005840"/>
           </a:xfrm>
           <a:prstGeom prst="rect">
             <a:avLst/>
@@ -8544,16 +8145,16 @@
         </p:nvSpPr>
         <p:spPr>
           <a:xfrm>
-            <a:off x="996696" y="2011680"/>
-            <a:ext cx="10738104" cy="2834640"/>
-          </a:xfrm>
-          <a:prstGeom prst="rect">
-            <a:avLst/>
-          </a:prstGeom>
-          <a:noFill/>
-        </p:spPr>
-        <p:txBody>
-          <a:bodyPr wrap="square" lIns="0" rIns="0">
+            <a:off x="996696" y="2926080"/>
+            <a:ext cx="11195304" cy="1005840"/>
+          </a:xfrm>
+          <a:prstGeom prst="rect">
+            <a:avLst/>
+          </a:prstGeom>
+          <a:noFill/>
+        </p:spPr>
+        <p:txBody>
+          <a:bodyPr wrap="none" lIns="0" rIns="0">
             <a:noAutofit/>
           </a:bodyPr>
           <a:lstStyle/>
@@ -8566,7 +8167,7 @@
                 </a:solidFill>
                 <a:latin typeface="Arial"/>
               </a:rPr>
-              <a:t>What would we build if we trusted our customers completely?</a:t>
+              <a:t>What if we trusted users?</a:t>
             </a:r>
           </a:p>
         </p:txBody>
@@ -8584,7 +8185,7 @@
 </p:sldLayout>
 </file>
 
-<file path=ppt/slideLayouts/slideLayout25.xml><?xml version="1.0" encoding="utf-8"?>
+<file path=ppt/slideLayouts/slideLayout24.xml><?xml version="1.0" encoding="utf-8"?>
 <p:sldLayout xmlns:a="http://schemas.openxmlformats.org/drawingml/2006/main" xmlns:r="http://schemas.openxmlformats.org/officeDocument/2006/relationships" xmlns:p="http://schemas.openxmlformats.org/presentationml/2006/main" type="blank" preserve="1">
   <p:cSld name="slidekit · Bullet List">
     <p:bg>
@@ -8798,7 +8399,7 @@
 </p:sldLayout>
 </file>
 
-<file path=ppt/slideLayouts/slideLayout26.xml><?xml version="1.0" encoding="utf-8"?>
+<file path=ppt/slideLayouts/slideLayout25.xml><?xml version="1.0" encoding="utf-8"?>
 <p:sldLayout xmlns:a="http://schemas.openxmlformats.org/drawingml/2006/main" xmlns:r="http://schemas.openxmlformats.org/officeDocument/2006/relationships" xmlns:p="http://schemas.openxmlformats.org/presentationml/2006/main" type="blank" preserve="1">
   <p:cSld name="slidekit · Code Block">
     <p:bg>
@@ -8868,7 +8469,7 @@
             <a:avLst/>
           </a:prstGeom>
           <a:solidFill>
-            <a:srgbClr val="FF5F56"/>
+            <a:srgbClr val="FFFFFF"/>
           </a:solidFill>
           <a:ln>
             <a:noFill/>
@@ -8900,7 +8501,7 @@
             <a:avLst/>
           </a:prstGeom>
           <a:solidFill>
-            <a:srgbClr val="FFBD2E"/>
+            <a:srgbClr val="FFFFFF"/>
           </a:solidFill>
           <a:ln>
             <a:noFill/>
@@ -8932,7 +8533,7 @@
             <a:avLst/>
           </a:prstGeom>
           <a:solidFill>
-            <a:srgbClr val="27C93F"/>
+            <a:srgbClr val="FFFFFF"/>
           </a:solidFill>
           <a:ln>
             <a:noFill/>
@@ -8975,7 +8576,7 @@
             <a:r>
               <a:rPr sz="4200" b="0" i="0">
                 <a:solidFill>
-                  <a:srgbClr val="D4D4D4"/>
+                  <a:srgbClr val="FFFFFF"/>
                 </a:solidFill>
                 <a:latin typeface="Arial"/>
               </a:rPr>
@@ -9012,7 +8613,7 @@
             <a:r>
               <a:rPr sz="3400" b="0" i="0">
                 <a:solidFill>
-                  <a:srgbClr val="6A9955"/>
+                  <a:srgbClr val="FFFFFF"/>
                 </a:solidFill>
                 <a:latin typeface="Arial"/>
               </a:rPr>
@@ -9069,7 +8670,7 @@
         <p:spPr>
           <a:xfrm>
             <a:off x="1057461" y="2356103"/>
-            <a:ext cx="302848" cy="518159"/>
+            <a:ext cx="2524382" cy="518159"/>
           </a:xfrm>
           <a:prstGeom prst="rect">
             <a:avLst/>
@@ -9086,11 +8687,11 @@
             <a:r>
               <a:rPr sz="3400" b="0" i="0">
                 <a:solidFill>
-                  <a:srgbClr val="D4D4D4"/>
-                </a:solidFill>
-                <a:latin typeface="Arial"/>
-              </a:rPr>
-              <a:t> </a:t>
+                  <a:srgbClr val="FFFFFF"/>
+                </a:solidFill>
+                <a:latin typeface="Arial"/>
+              </a:rPr>
+              <a:t> main():</a:t>
             </a:r>
           </a:p>
         </p:txBody>
@@ -9105,8 +8706,8 @@
         </p:nvSpPr>
         <p:spPr>
           <a:xfrm>
-            <a:off x="1177429" y="2356103"/>
-            <a:ext cx="1680348" cy="518159"/>
+            <a:off x="457200" y="2874262"/>
+            <a:ext cx="7046475" cy="518159"/>
           </a:xfrm>
           <a:prstGeom prst="rect">
             <a:avLst/>
@@ -9123,11 +8724,11 @@
             <a:r>
               <a:rPr sz="3400" b="0" i="0">
                 <a:solidFill>
-                  <a:srgbClr val="DCDCAA"/>
-                </a:solidFill>
-                <a:latin typeface="Arial"/>
-              </a:rPr>
-              <a:t>main</a:t>
+                  <a:srgbClr val="FFFFFF"/>
+                </a:solidFill>
+                <a:latin typeface="Arial"/>
+              </a:rPr>
+              <a:t>    print("Hello, world!")</a:t>
             </a:r>
           </a:p>
         </p:txBody>
@@ -9142,8 +8743,8 @@
         </p:nvSpPr>
         <p:spPr>
           <a:xfrm>
-            <a:off x="2113347" y="2356103"/>
-            <a:ext cx="834964" cy="518159"/>
+            <a:off x="457200" y="3910580"/>
+            <a:ext cx="2140486" cy="518159"/>
           </a:xfrm>
           <a:prstGeom prst="rect">
             <a:avLst/>
@@ -9160,11 +8761,11 @@
             <a:r>
               <a:rPr sz="3400" b="0" i="0">
                 <a:solidFill>
-                  <a:srgbClr val="D4D4D4"/>
-                </a:solidFill>
-                <a:latin typeface="Arial"/>
-              </a:rPr>
-              <a:t>():</a:t>
+                  <a:srgbClr val="FFFFFF"/>
+                </a:solidFill>
+                <a:latin typeface="Arial"/>
+              </a:rPr>
+              <a:t>main()</a:t>
             </a:r>
           </a:p>
         </p:txBody>
@@ -9175,265 +8776,6 @@
           <p:cNvSpPr/>
           <p:nvPr>
             <p:ph type="body" idx="13"/>
-          </p:nvPr>
-        </p:nvSpPr>
-        <p:spPr>
-          <a:xfrm>
-            <a:off x="457200" y="2874262"/>
-            <a:ext cx="662751" cy="518159"/>
-          </a:xfrm>
-          <a:prstGeom prst="rect">
-            <a:avLst/>
-          </a:prstGeom>
-          <a:noFill/>
-        </p:spPr>
-        <p:txBody>
-          <a:bodyPr wrap="none" lIns="0" rIns="0">
-            <a:noAutofit/>
-          </a:bodyPr>
-          <a:lstStyle/>
-          <a:p>
-            <a:pPr algn="l"/>
-            <a:r>
-              <a:rPr sz="3400" b="0" i="0">
-                <a:solidFill>
-                  <a:srgbClr val="D4D4D4"/>
-                </a:solidFill>
-                <a:latin typeface="Arial"/>
-              </a:rPr>
-              <a:t>    </a:t>
-            </a:r>
-          </a:p>
-        </p:txBody>
-      </p:sp>
-      <p:sp>
-        <p:nvSpPr>
-          <p:cNvPr id="15" name="TextBox 14"/>
-          <p:cNvSpPr/>
-          <p:nvPr>
-            <p:ph type="body" idx="14"/>
-          </p:nvPr>
-        </p:nvSpPr>
-        <p:spPr>
-          <a:xfrm>
-            <a:off x="937071" y="2874262"/>
-            <a:ext cx="1526857" cy="518159"/>
-          </a:xfrm>
-          <a:prstGeom prst="rect">
-            <a:avLst/>
-          </a:prstGeom>
-          <a:noFill/>
-        </p:spPr>
-        <p:txBody>
-          <a:bodyPr wrap="none" lIns="0" rIns="0">
-            <a:noAutofit/>
-          </a:bodyPr>
-          <a:lstStyle/>
-          <a:p>
-            <a:pPr algn="l"/>
-            <a:r>
-              <a:rPr sz="3400" b="0" i="0">
-                <a:solidFill>
-                  <a:srgbClr val="DCDCAA"/>
-                </a:solidFill>
-                <a:latin typeface="Arial"/>
-              </a:rPr>
-              <a:t>print</a:t>
-            </a:r>
-          </a:p>
-        </p:txBody>
-      </p:sp>
-      <p:sp>
-        <p:nvSpPr>
-          <p:cNvPr id="16" name="TextBox 15"/>
-          <p:cNvSpPr/>
-          <p:nvPr>
-            <p:ph type="body" idx="15"/>
-          </p:nvPr>
-        </p:nvSpPr>
-        <p:spPr>
-          <a:xfrm>
-            <a:off x="1777057" y="2874262"/>
-            <a:ext cx="412948" cy="518159"/>
-          </a:xfrm>
-          <a:prstGeom prst="rect">
-            <a:avLst/>
-          </a:prstGeom>
-          <a:noFill/>
-        </p:spPr>
-        <p:txBody>
-          <a:bodyPr wrap="none" lIns="0" rIns="0">
-            <a:noAutofit/>
-          </a:bodyPr>
-          <a:lstStyle/>
-          <a:p>
-            <a:pPr algn="l"/>
-            <a:r>
-              <a:rPr sz="3400" b="0" i="0">
-                <a:solidFill>
-                  <a:srgbClr val="D4D4D4"/>
-                </a:solidFill>
-                <a:latin typeface="Arial"/>
-              </a:rPr>
-              <a:t>(</a:t>
-            </a:r>
-          </a:p>
-        </p:txBody>
-      </p:sp>
-      <p:sp>
-        <p:nvSpPr>
-          <p:cNvPr id="17" name="TextBox 16"/>
-          <p:cNvSpPr/>
-          <p:nvPr>
-            <p:ph type="body" idx="16"/>
-          </p:nvPr>
-        </p:nvSpPr>
-        <p:spPr>
-          <a:xfrm>
-            <a:off x="1920850" y="2874262"/>
-            <a:ext cx="4474566" cy="518159"/>
-          </a:xfrm>
-          <a:prstGeom prst="rect">
-            <a:avLst/>
-          </a:prstGeom>
-          <a:noFill/>
-        </p:spPr>
-        <p:txBody>
-          <a:bodyPr wrap="none" lIns="0" rIns="0">
-            <a:noAutofit/>
-          </a:bodyPr>
-          <a:lstStyle/>
-          <a:p>
-            <a:pPr algn="l"/>
-            <a:r>
-              <a:rPr sz="3400" b="0" i="0">
-                <a:solidFill>
-                  <a:srgbClr val="CE9178"/>
-                </a:solidFill>
-                <a:latin typeface="Arial"/>
-              </a:rPr>
-              <a:t>"Hello, world!"</a:t>
-            </a:r>
-          </a:p>
-        </p:txBody>
-      </p:sp>
-      <p:sp>
-        <p:nvSpPr>
-          <p:cNvPr id="18" name="TextBox 17"/>
-          <p:cNvSpPr/>
-          <p:nvPr>
-            <p:ph type="body" idx="17"/>
-          </p:nvPr>
-        </p:nvSpPr>
-        <p:spPr>
-          <a:xfrm>
-            <a:off x="4603155" y="2874262"/>
-            <a:ext cx="412948" cy="518159"/>
-          </a:xfrm>
-          <a:prstGeom prst="rect">
-            <a:avLst/>
-          </a:prstGeom>
-          <a:noFill/>
-        </p:spPr>
-        <p:txBody>
-          <a:bodyPr wrap="none" lIns="0" rIns="0">
-            <a:noAutofit/>
-          </a:bodyPr>
-          <a:lstStyle/>
-          <a:p>
-            <a:pPr algn="l"/>
-            <a:r>
-              <a:rPr sz="3400" b="0" i="0">
-                <a:solidFill>
-                  <a:srgbClr val="D4D4D4"/>
-                </a:solidFill>
-                <a:latin typeface="Arial"/>
-              </a:rPr>
-              <a:t>)</a:t>
-            </a:r>
-          </a:p>
-        </p:txBody>
-      </p:sp>
-      <p:sp>
-        <p:nvSpPr>
-          <p:cNvPr id="19" name="TextBox 18"/>
-          <p:cNvSpPr/>
-          <p:nvPr>
-            <p:ph type="body" idx="18"/>
-          </p:nvPr>
-        </p:nvSpPr>
-        <p:spPr>
-          <a:xfrm>
-            <a:off x="457200" y="3910580"/>
-            <a:ext cx="1680348" cy="518159"/>
-          </a:xfrm>
-          <a:prstGeom prst="rect">
-            <a:avLst/>
-          </a:prstGeom>
-          <a:noFill/>
-        </p:spPr>
-        <p:txBody>
-          <a:bodyPr wrap="none" lIns="0" rIns="0">
-            <a:noAutofit/>
-          </a:bodyPr>
-          <a:lstStyle/>
-          <a:p>
-            <a:pPr algn="l"/>
-            <a:r>
-              <a:rPr sz="3400" b="0" i="0">
-                <a:solidFill>
-                  <a:srgbClr val="DCDCAA"/>
-                </a:solidFill>
-                <a:latin typeface="Arial"/>
-              </a:rPr>
-              <a:t>main</a:t>
-            </a:r>
-          </a:p>
-        </p:txBody>
-      </p:sp>
-      <p:sp>
-        <p:nvSpPr>
-          <p:cNvPr id="20" name="TextBox 19"/>
-          <p:cNvSpPr/>
-          <p:nvPr>
-            <p:ph type="body" idx="19"/>
-          </p:nvPr>
-        </p:nvSpPr>
-        <p:spPr>
-          <a:xfrm>
-            <a:off x="1393118" y="3910580"/>
-            <a:ext cx="643017" cy="518159"/>
-          </a:xfrm>
-          <a:prstGeom prst="rect">
-            <a:avLst/>
-          </a:prstGeom>
-          <a:noFill/>
-        </p:spPr>
-        <p:txBody>
-          <a:bodyPr wrap="none" lIns="0" rIns="0">
-            <a:noAutofit/>
-          </a:bodyPr>
-          <a:lstStyle/>
-          <a:p>
-            <a:pPr algn="l"/>
-            <a:r>
-              <a:rPr sz="3400" b="0" i="0">
-                <a:solidFill>
-                  <a:srgbClr val="D4D4D4"/>
-                </a:solidFill>
-                <a:latin typeface="Arial"/>
-              </a:rPr>
-              <a:t>()</a:t>
-            </a:r>
-          </a:p>
-        </p:txBody>
-      </p:sp>
-      <p:sp>
-        <p:nvSpPr>
-          <p:cNvPr id="21" name="TextBox 20"/>
-          <p:cNvSpPr/>
-          <p:nvPr>
-            <p:ph type="body" idx="20"/>
           </p:nvPr>
         </p:nvSpPr>
         <p:spPr>
@@ -9456,7 +8798,7 @@
             <a:r>
               <a:rPr sz="3400" b="0" i="0">
                 <a:solidFill>
-                  <a:srgbClr val="4EC9B0"/>
+                  <a:srgbClr val="569CD6"/>
                 </a:solidFill>
                 <a:latin typeface="Arial"/>
               </a:rPr>
@@ -9467,10 +8809,10 @@
       </p:sp>
       <p:sp>
         <p:nvSpPr>
-          <p:cNvPr id="22" name="TextBox 21"/>
-          <p:cNvSpPr/>
-          <p:nvPr>
-            <p:ph type="body" idx="21"/>
+          <p:cNvPr id="15" name="TextBox 14"/>
+          <p:cNvSpPr/>
+          <p:nvPr>
+            <p:ph type="body" idx="14"/>
           </p:nvPr>
         </p:nvSpPr>
         <p:spPr>
@@ -9493,7 +8835,7 @@
             <a:r>
               <a:rPr sz="3400" b="0" i="0">
                 <a:solidFill>
-                  <a:srgbClr val="D4D4D4"/>
+                  <a:srgbClr val="FFFFFF"/>
                 </a:solidFill>
                 <a:latin typeface="Arial"/>
               </a:rPr>
@@ -9504,10 +8846,10 @@
       </p:sp>
       <p:sp>
         <p:nvSpPr>
-          <p:cNvPr id="23" name="TextBox 22"/>
-          <p:cNvSpPr/>
-          <p:nvPr>
-            <p:ph type="body" idx="22"/>
+          <p:cNvPr id="16" name="TextBox 15"/>
+          <p:cNvSpPr/>
+          <p:nvPr>
+            <p:ph type="body" idx="15"/>
           </p:nvPr>
         </p:nvSpPr>
         <p:spPr>
@@ -9530,7 +8872,7 @@
             <a:r>
               <a:rPr sz="3400" b="0" i="0">
                 <a:solidFill>
-                  <a:srgbClr val="D4D4D4"/>
+                  <a:srgbClr val="FFFFFF"/>
                 </a:solidFill>
                 <a:latin typeface="Arial"/>
               </a:rPr>
@@ -9552,7 +8894,7 @@
 </p:sldLayout>
 </file>
 
-<file path=ppt/slideLayouts/slideLayout27.xml><?xml version="1.0" encoding="utf-8"?>
+<file path=ppt/slideLayouts/slideLayout26.xml><?xml version="1.0" encoding="utf-8"?>
 <p:sldLayout xmlns:a="http://schemas.openxmlformats.org/drawingml/2006/main" xmlns:r="http://schemas.openxmlformats.org/officeDocument/2006/relationships" xmlns:p="http://schemas.openxmlformats.org/presentationml/2006/main" type="blank" preserve="1">
   <p:cSld name="slidekit · File Tree">
     <p:bg>
@@ -9661,7 +9003,7 @@
             </a:avLst>
           </a:prstGeom>
           <a:solidFill>
-            <a:srgbClr val="0C1A1C"/>
+            <a:srgbClr val="0A2240"/>
           </a:solidFill>
           <a:ln>
             <a:noFill/>
@@ -9704,7 +9046,7 @@
             <a:r>
               <a:rPr sz="2600" b="1" i="0">
                 <a:solidFill>
-                  <a:srgbClr val="569CD6"/>
+                  <a:srgbClr val="0072CE"/>
                 </a:solidFill>
                 <a:latin typeface="Courier New"/>
               </a:rPr>
@@ -9741,7 +9083,7 @@
             <a:r>
               <a:rPr sz="2600" b="0" i="0">
                 <a:solidFill>
-                  <a:srgbClr val="55707A"/>
+                  <a:srgbClr val="0072CE"/>
                 </a:solidFill>
                 <a:latin typeface="Courier New"/>
               </a:rPr>
@@ -9778,7 +9120,7 @@
             <a:r>
               <a:rPr sz="2600" b="1" i="0">
                 <a:solidFill>
-                  <a:srgbClr val="569CD6"/>
+                  <a:srgbClr val="0072CE"/>
                 </a:solidFill>
                 <a:latin typeface="Courier New"/>
               </a:rPr>
@@ -9815,7 +9157,7 @@
             <a:r>
               <a:rPr sz="2600" b="0" i="0">
                 <a:solidFill>
-                  <a:srgbClr val="55707A"/>
+                  <a:srgbClr val="0072CE"/>
                 </a:solidFill>
                 <a:latin typeface="Courier New"/>
               </a:rPr>
@@ -9852,7 +9194,7 @@
             <a:r>
               <a:rPr sz="2600" b="1" i="0">
                 <a:solidFill>
-                  <a:srgbClr val="569CD6"/>
+                  <a:srgbClr val="0072CE"/>
                 </a:solidFill>
                 <a:latin typeface="Courier New"/>
               </a:rPr>
@@ -9889,7 +9231,7 @@
             <a:r>
               <a:rPr sz="2600" b="0" i="0">
                 <a:solidFill>
-                  <a:srgbClr val="55707A"/>
+                  <a:srgbClr val="0072CE"/>
                 </a:solidFill>
                 <a:latin typeface="Courier New"/>
               </a:rPr>
@@ -9926,7 +9268,7 @@
             <a:r>
               <a:rPr sz="2600" b="0" i="0">
                 <a:solidFill>
-                  <a:srgbClr val="D4D4D4"/>
+                  <a:srgbClr val="FFFFFF"/>
                 </a:solidFill>
                 <a:latin typeface="Courier New"/>
               </a:rPr>
@@ -9963,7 +9305,7 @@
             <a:r>
               <a:rPr sz="2600" b="0" i="0">
                 <a:solidFill>
-                  <a:srgbClr val="55707A"/>
+                  <a:srgbClr val="0072CE"/>
                 </a:solidFill>
                 <a:latin typeface="Courier New"/>
               </a:rPr>
@@ -10000,7 +9342,7 @@
             <a:r>
               <a:rPr sz="2600" b="0" i="0">
                 <a:solidFill>
-                  <a:srgbClr val="D4D4D4"/>
+                  <a:srgbClr val="FFFFFF"/>
                 </a:solidFill>
                 <a:latin typeface="Courier New"/>
               </a:rPr>
@@ -10037,7 +9379,7 @@
             <a:r>
               <a:rPr sz="2600" b="0" i="0">
                 <a:solidFill>
-                  <a:srgbClr val="55707A"/>
+                  <a:srgbClr val="0072CE"/>
                 </a:solidFill>
                 <a:latin typeface="Courier New"/>
               </a:rPr>
@@ -10074,7 +9416,7 @@
             <a:r>
               <a:rPr sz="2600" b="0" i="0">
                 <a:solidFill>
-                  <a:srgbClr val="D4D4D4"/>
+                  <a:srgbClr val="FFFFFF"/>
                 </a:solidFill>
                 <a:latin typeface="Courier New"/>
               </a:rPr>
@@ -10111,7 +9453,7 @@
             <a:r>
               <a:rPr sz="2600" b="0" i="0">
                 <a:solidFill>
-                  <a:srgbClr val="55707A"/>
+                  <a:srgbClr val="0072CE"/>
                 </a:solidFill>
                 <a:latin typeface="Courier New"/>
               </a:rPr>
@@ -10148,7 +9490,7 @@
             <a:r>
               <a:rPr sz="2600" b="0" i="0">
                 <a:solidFill>
-                  <a:srgbClr val="D4D4D4"/>
+                  <a:srgbClr val="FFFFFF"/>
                 </a:solidFill>
                 <a:latin typeface="Courier New"/>
               </a:rPr>
@@ -10185,7 +9527,7 @@
             <a:r>
               <a:rPr sz="2600" b="0" i="0">
                 <a:solidFill>
-                  <a:srgbClr val="55707A"/>
+                  <a:srgbClr val="0072CE"/>
                 </a:solidFill>
                 <a:latin typeface="Courier New"/>
               </a:rPr>
@@ -10222,7 +9564,7 @@
             <a:r>
               <a:rPr sz="2600" b="0" i="0">
                 <a:solidFill>
-                  <a:srgbClr val="D4D4D4"/>
+                  <a:srgbClr val="FFFFFF"/>
                 </a:solidFill>
                 <a:latin typeface="Courier New"/>
               </a:rPr>
@@ -10244,7 +9586,7 @@
 </p:sldLayout>
 </file>
 
-<file path=ppt/slideLayouts/slideLayout28.xml><?xml version="1.0" encoding="utf-8"?>
+<file path=ppt/slideLayouts/slideLayout27.xml><?xml version="1.0" encoding="utf-8"?>
 <p:sldLayout xmlns:a="http://schemas.openxmlformats.org/drawingml/2006/main" xmlns:r="http://schemas.openxmlformats.org/officeDocument/2006/relationships" xmlns:p="http://schemas.openxmlformats.org/presentationml/2006/main" type="blank" preserve="1">
   <p:cSld name="slidekit · Numbered Steps">
     <p:bg>
@@ -10362,7 +9704,7 @@
             <a:r>
               <a:rPr sz="4200" b="1" i="0">
                 <a:solidFill>
-                  <a:srgbClr val="123A6B"/>
+                  <a:srgbClr val="0072CE"/>
                 </a:solidFill>
                 <a:latin typeface="Arial"/>
               </a:rPr>
@@ -10399,7 +9741,7 @@
             <a:r>
               <a:rPr sz="4200" b="1" i="0">
                 <a:solidFill>
-                  <a:srgbClr val="123A6B"/>
+                  <a:srgbClr val="0072CE"/>
                 </a:solidFill>
                 <a:latin typeface="Arial"/>
               </a:rPr>
@@ -10473,7 +9815,7 @@
             <a:r>
               <a:rPr sz="4200" b="1" i="0">
                 <a:solidFill>
-                  <a:srgbClr val="123A6B"/>
+                  <a:srgbClr val="0072CE"/>
                 </a:solidFill>
                 <a:latin typeface="Arial"/>
               </a:rPr>
@@ -10510,7 +9852,7 @@
             <a:r>
               <a:rPr sz="4200" b="1" i="0">
                 <a:solidFill>
-                  <a:srgbClr val="123A6B"/>
+                  <a:srgbClr val="0072CE"/>
                 </a:solidFill>
                 <a:latin typeface="Arial"/>
               </a:rPr>
@@ -10584,7 +9926,7 @@
             <a:r>
               <a:rPr sz="4200" b="1" i="0">
                 <a:solidFill>
-                  <a:srgbClr val="123A6B"/>
+                  <a:srgbClr val="0072CE"/>
                 </a:solidFill>
                 <a:latin typeface="Arial"/>
               </a:rPr>
@@ -10621,7 +9963,7 @@
             <a:r>
               <a:rPr sz="4200" b="1" i="0">
                 <a:solidFill>
-                  <a:srgbClr val="123A6B"/>
+                  <a:srgbClr val="0072CE"/>
                 </a:solidFill>
                 <a:latin typeface="Arial"/>
               </a:rPr>
@@ -10680,7 +10022,7 @@
 </p:sldLayout>
 </file>
 
-<file path=ppt/slideLayouts/slideLayout29.xml><?xml version="1.0" encoding="utf-8"?>
+<file path=ppt/slideLayouts/slideLayout28.xml><?xml version="1.0" encoding="utf-8"?>
 <p:sldLayout xmlns:a="http://schemas.openxmlformats.org/drawingml/2006/main" xmlns:r="http://schemas.openxmlformats.org/officeDocument/2006/relationships" xmlns:p="http://schemas.openxmlformats.org/presentationml/2006/main" type="blank" preserve="1">
   <p:cSld name="slidekit · Two Panel List">
     <p:bg>
@@ -10798,7 +10140,7 @@
             <a:r>
               <a:rPr sz="3400" b="1" i="0">
                 <a:solidFill>
-                  <a:srgbClr val="123A6B"/>
+                  <a:srgbClr val="0072CE"/>
                 </a:solidFill>
                 <a:latin typeface="Arial"/>
               </a:rPr>
@@ -10817,14 +10159,14 @@
         </p:nvSpPr>
         <p:spPr>
           <a:xfrm>
-            <a:off x="548640" y="2176271"/>
-            <a:ext cx="1650492" cy="54864"/>
+            <a:off x="457200" y="2176271"/>
+            <a:ext cx="1367718" cy="54864"/>
           </a:xfrm>
           <a:prstGeom prst="rect">
             <a:avLst/>
           </a:prstGeom>
           <a:solidFill>
-            <a:srgbClr val="123A6B"/>
+            <a:srgbClr val="0072CE"/>
           </a:solidFill>
           <a:ln>
             <a:noFill/>
@@ -10867,7 +10209,7 @@
             <a:r>
               <a:rPr sz="3400" b="1" i="0">
                 <a:solidFill>
-                  <a:srgbClr val="5B6B82"/>
+                  <a:srgbClr val="0A2240"/>
                 </a:solidFill>
                 <a:latin typeface="Arial"/>
               </a:rPr>
@@ -10886,14 +10228,14 @@
         </p:nvSpPr>
         <p:spPr>
           <a:xfrm>
-            <a:off x="6324600" y="2176271"/>
-            <a:ext cx="1650492" cy="54864"/>
+            <a:off x="6233160" y="2176271"/>
+            <a:ext cx="1007604" cy="54864"/>
           </a:xfrm>
           <a:prstGeom prst="rect">
             <a:avLst/>
           </a:prstGeom>
           <a:solidFill>
-            <a:srgbClr val="5B6B82"/>
+            <a:srgbClr val="0A2240"/>
           </a:solidFill>
           <a:ln>
             <a:noFill/>
@@ -11126,6 +10468,294 @@
                 <a:latin typeface="Arial"/>
               </a:rPr>
               <a:t>In-product live chat</a:t>
+            </a:r>
+          </a:p>
+        </p:txBody>
+      </p:sp>
+    </p:spTree>
+    <p:extLst>
+      <p:ext uri="{BB962C8B-B14F-4D97-AF65-F5344CB8AC3E}">
+        <p14:creationId xmlns:p14="http://schemas.microsoft.com/office/powerpoint/2010/main" val="1212999818"/>
+      </p:ext>
+    </p:extLst>
+  </p:cSld>
+  <p:clrMapOvr>
+    <a:masterClrMapping/>
+  </p:clrMapOvr>
+</p:sldLayout>
+</file>
+
+<file path=ppt/slideLayouts/slideLayout29.xml><?xml version="1.0" encoding="utf-8"?>
+<p:sldLayout xmlns:a="http://schemas.openxmlformats.org/drawingml/2006/main" xmlns:r="http://schemas.openxmlformats.org/officeDocument/2006/relationships" xmlns:p="http://schemas.openxmlformats.org/presentationml/2006/main" type="blank" preserve="1">
+  <p:cSld name="slidekit · This vs That">
+    <p:bg>
+      <p:bgPr>
+        <a:solidFill>
+          <a:srgbClr val="FFFFFF"/>
+        </a:solidFill>
+        <a:effectLst/>
+      </p:bgPr>
+    </p:bg>
+    <p:spTree>
+      <p:nvGrpSpPr>
+        <p:cNvPr id="1" name=""/>
+        <p:cNvGrpSpPr/>
+        <p:nvPr/>
+      </p:nvGrpSpPr>
+      <p:grpSpPr>
+        <a:xfrm>
+          <a:off x="0" y="0"/>
+          <a:ext cx="0" cy="0"/>
+          <a:chOff x="0" y="0"/>
+          <a:chExt cx="0" cy="0"/>
+        </a:xfrm>
+      </p:grpSpPr>
+      <p:sp>
+        <p:nvSpPr>
+          <p:cNvPr id="4" name="Slide Number Placeholder 3"/>
+          <p:cNvSpPr>
+            <a:spLocks noGrp="1"/>
+          </p:cNvSpPr>
+          <p:nvPr>
+            <p:ph type="sldNum" sz="quarter" idx="12"/>
+          </p:nvPr>
+        </p:nvSpPr>
+        <p:spPr>
+          <a:xfrm>
+            <a:off x="11186160" y="6035040"/>
+            <a:ext cx="548640" cy="365760"/>
+          </a:xfrm>
+        </p:spPr>
+        <p:txBody>
+          <a:bodyPr/>
+          <a:lstStyle/>
+          <a:p>
+            <a:fld id="{C1FF6DA9-008F-8B48-92A6-B652298478BF}" type="slidenum">
+              <a:rPr lang="en-US" smtClean="0"/>
+              <a:t>‹#›</a:t>
+            </a:fld>
+            <a:endParaRPr lang="en-US"/>
+          </a:p>
+        </p:txBody>
+      </p:sp>
+      <p:sp>
+        <p:nvSpPr>
+          <p:cNvPr id="5" name="TextBox 4"/>
+          <p:cNvSpPr/>
+          <p:nvPr>
+            <p:ph type="title"/>
+          </p:nvPr>
+        </p:nvSpPr>
+        <p:spPr>
+          <a:xfrm>
+            <a:off x="457200" y="457200"/>
+            <a:ext cx="11277600" cy="768096"/>
+          </a:xfrm>
+          <a:prstGeom prst="rect">
+            <a:avLst/>
+          </a:prstGeom>
+          <a:noFill/>
+        </p:spPr>
+        <p:txBody>
+          <a:bodyPr wrap="none" lIns="0" rIns="0">
+            <a:noAutofit/>
+          </a:bodyPr>
+          <a:lstStyle/>
+          <a:p>
+            <a:pPr algn="l"/>
+            <a:r>
+              <a:rPr sz="4200" b="1" i="0">
+                <a:solidFill>
+                  <a:srgbClr val="0072CE"/>
+                </a:solidFill>
+                <a:latin typeface="Arial"/>
+              </a:rPr>
+              <a:t>Cloud or On-Prem</a:t>
+            </a:r>
+          </a:p>
+        </p:txBody>
+      </p:sp>
+      <p:sp>
+        <p:nvSpPr>
+          <p:cNvPr id="6" name="TextBox 5"/>
+          <p:cNvSpPr/>
+          <p:nvPr>
+            <p:ph type="body" idx="1"/>
+          </p:nvPr>
+        </p:nvSpPr>
+        <p:spPr>
+          <a:xfrm>
+            <a:off x="457200" y="2776728"/>
+            <a:ext cx="4792980" cy="914400"/>
+          </a:xfrm>
+          <a:prstGeom prst="rect">
+            <a:avLst/>
+          </a:prstGeom>
+          <a:noFill/>
+        </p:spPr>
+        <p:txBody>
+          <a:bodyPr wrap="none" lIns="0" rIns="0">
+            <a:noAutofit/>
+          </a:bodyPr>
+          <a:lstStyle/>
+          <a:p>
+            <a:pPr algn="ctr"/>
+            <a:r>
+              <a:rPr sz="6000" b="1" i="0">
+                <a:solidFill>
+                  <a:srgbClr val="0A2240"/>
+                </a:solidFill>
+                <a:latin typeface="Arial"/>
+              </a:rPr>
+              <a:t>3 wks</a:t>
+            </a:r>
+          </a:p>
+        </p:txBody>
+      </p:sp>
+      <p:sp>
+        <p:nvSpPr>
+          <p:cNvPr id="7" name="TextBox 6"/>
+          <p:cNvSpPr/>
+          <p:nvPr>
+            <p:ph type="body" idx="2"/>
+          </p:nvPr>
+        </p:nvSpPr>
+        <p:spPr>
+          <a:xfrm>
+            <a:off x="0" y="3965448"/>
+            <a:ext cx="5707380" cy="518159"/>
+          </a:xfrm>
+          <a:prstGeom prst="rect">
+            <a:avLst/>
+          </a:prstGeom>
+          <a:noFill/>
+        </p:spPr>
+        <p:txBody>
+          <a:bodyPr wrap="none" lIns="0" rIns="0">
+            <a:noAutofit/>
+          </a:bodyPr>
+          <a:lstStyle/>
+          <a:p>
+            <a:pPr algn="ctr"/>
+            <a:r>
+              <a:rPr sz="3400" b="0" i="0">
+                <a:solidFill>
+                  <a:srgbClr val="0A2240"/>
+                </a:solidFill>
+                <a:latin typeface="Arial"/>
+              </a:rPr>
+              <a:t>Cloud time-to-launch</a:t>
+            </a:r>
+          </a:p>
+        </p:txBody>
+      </p:sp>
+      <p:sp>
+        <p:nvSpPr>
+          <p:cNvPr id="8" name="TextBox 7"/>
+          <p:cNvSpPr/>
+          <p:nvPr>
+            <p:ph type="body" idx="3"/>
+          </p:nvPr>
+        </p:nvSpPr>
+        <p:spPr>
+          <a:xfrm>
+            <a:off x="6941820" y="2776728"/>
+            <a:ext cx="4792980" cy="914400"/>
+          </a:xfrm>
+          <a:prstGeom prst="rect">
+            <a:avLst/>
+          </a:prstGeom>
+          <a:noFill/>
+        </p:spPr>
+        <p:txBody>
+          <a:bodyPr wrap="none" lIns="0" rIns="0">
+            <a:noAutofit/>
+          </a:bodyPr>
+          <a:lstStyle/>
+          <a:p>
+            <a:pPr algn="ctr"/>
+            <a:r>
+              <a:rPr sz="6000" b="1" i="0">
+                <a:solidFill>
+                  <a:srgbClr val="0A2240"/>
+                </a:solidFill>
+                <a:latin typeface="Arial"/>
+              </a:rPr>
+              <a:t>6 mo</a:t>
+            </a:r>
+          </a:p>
+        </p:txBody>
+      </p:sp>
+      <p:sp>
+        <p:nvSpPr>
+          <p:cNvPr id="9" name="TextBox 8"/>
+          <p:cNvSpPr/>
+          <p:nvPr>
+            <p:ph type="body" idx="4"/>
+          </p:nvPr>
+        </p:nvSpPr>
+        <p:spPr>
+          <a:xfrm>
+            <a:off x="6484620" y="3965448"/>
+            <a:ext cx="5707380" cy="518159"/>
+          </a:xfrm>
+          <a:prstGeom prst="rect">
+            <a:avLst/>
+          </a:prstGeom>
+          <a:noFill/>
+        </p:spPr>
+        <p:txBody>
+          <a:bodyPr wrap="none" lIns="0" rIns="0">
+            <a:noAutofit/>
+          </a:bodyPr>
+          <a:lstStyle/>
+          <a:p>
+            <a:pPr algn="ctr"/>
+            <a:r>
+              <a:rPr sz="3400" b="0" i="0">
+                <a:solidFill>
+                  <a:srgbClr val="0A2240"/>
+                </a:solidFill>
+                <a:latin typeface="Arial"/>
+              </a:rPr>
+              <a:t>On-prem time-to-launch</a:t>
+            </a:r>
+          </a:p>
+        </p:txBody>
+      </p:sp>
+      <p:sp>
+        <p:nvSpPr>
+          <p:cNvPr id="10" name="TextBox 9"/>
+          <p:cNvSpPr/>
+          <p:nvPr>
+            <p:ph type="body" idx="5"/>
+          </p:nvPr>
+        </p:nvSpPr>
+        <p:spPr>
+          <a:xfrm>
+            <a:off x="5435323" y="3310127"/>
+            <a:ext cx="1321354" cy="640080"/>
+          </a:xfrm>
+          <a:prstGeom prst="rect">
+            <a:avLst/>
+          </a:prstGeom>
+          <a:noFill/>
+        </p:spPr>
+        <p:txBody>
+          <a:bodyPr wrap="none" lIns="0" rIns="0">
+            <a:noAutofit/>
+          </a:bodyPr>
+          <a:lstStyle/>
+          <a:p>
+            <a:pPr algn="ctr"/>
+            <a:r>
+              <a:rPr sz="4200" b="1" i="0">
+                <a:solidFill>
+                  <a:srgbClr val="0A2240"/>
+                </a:solidFill>
+                <a:latin typeface="Arial"/>
+              </a:rPr>
+              <a:t>VS</a:t>
             </a:r>
           </a:p>
         </p:txBody>
@@ -11391,294 +11021,6 @@
 
 <file path=ppt/slideLayouts/slideLayout30.xml><?xml version="1.0" encoding="utf-8"?>
 <p:sldLayout xmlns:a="http://schemas.openxmlformats.org/drawingml/2006/main" xmlns:r="http://schemas.openxmlformats.org/officeDocument/2006/relationships" xmlns:p="http://schemas.openxmlformats.org/presentationml/2006/main" type="blank" preserve="1">
-  <p:cSld name="slidekit · This vs That">
-    <p:bg>
-      <p:bgPr>
-        <a:solidFill>
-          <a:srgbClr val="FFFFFF"/>
-        </a:solidFill>
-        <a:effectLst/>
-      </p:bgPr>
-    </p:bg>
-    <p:spTree>
-      <p:nvGrpSpPr>
-        <p:cNvPr id="1" name=""/>
-        <p:cNvGrpSpPr/>
-        <p:nvPr/>
-      </p:nvGrpSpPr>
-      <p:grpSpPr>
-        <a:xfrm>
-          <a:off x="0" y="0"/>
-          <a:ext cx="0" cy="0"/>
-          <a:chOff x="0" y="0"/>
-          <a:chExt cx="0" cy="0"/>
-        </a:xfrm>
-      </p:grpSpPr>
-      <p:sp>
-        <p:nvSpPr>
-          <p:cNvPr id="4" name="Slide Number Placeholder 3"/>
-          <p:cNvSpPr>
-            <a:spLocks noGrp="1"/>
-          </p:cNvSpPr>
-          <p:nvPr>
-            <p:ph type="sldNum" sz="quarter" idx="12"/>
-          </p:nvPr>
-        </p:nvSpPr>
-        <p:spPr>
-          <a:xfrm>
-            <a:off x="11186160" y="6035040"/>
-            <a:ext cx="548640" cy="365760"/>
-          </a:xfrm>
-        </p:spPr>
-        <p:txBody>
-          <a:bodyPr/>
-          <a:lstStyle/>
-          <a:p>
-            <a:fld id="{C1FF6DA9-008F-8B48-92A6-B652298478BF}" type="slidenum">
-              <a:rPr lang="en-US" smtClean="0"/>
-              <a:t>‹#›</a:t>
-            </a:fld>
-            <a:endParaRPr lang="en-US"/>
-          </a:p>
-        </p:txBody>
-      </p:sp>
-      <p:sp>
-        <p:nvSpPr>
-          <p:cNvPr id="5" name="TextBox 4"/>
-          <p:cNvSpPr/>
-          <p:nvPr>
-            <p:ph type="title"/>
-          </p:nvPr>
-        </p:nvSpPr>
-        <p:spPr>
-          <a:xfrm>
-            <a:off x="457200" y="457200"/>
-            <a:ext cx="11277600" cy="768096"/>
-          </a:xfrm>
-          <a:prstGeom prst="rect">
-            <a:avLst/>
-          </a:prstGeom>
-          <a:noFill/>
-        </p:spPr>
-        <p:txBody>
-          <a:bodyPr wrap="none" lIns="0" rIns="0">
-            <a:noAutofit/>
-          </a:bodyPr>
-          <a:lstStyle/>
-          <a:p>
-            <a:pPr algn="l"/>
-            <a:r>
-              <a:rPr sz="4200" b="1" i="0">
-                <a:solidFill>
-                  <a:srgbClr val="0072CE"/>
-                </a:solidFill>
-                <a:latin typeface="Arial"/>
-              </a:rPr>
-              <a:t>Cloud or On-Prem</a:t>
-            </a:r>
-          </a:p>
-        </p:txBody>
-      </p:sp>
-      <p:sp>
-        <p:nvSpPr>
-          <p:cNvPr id="6" name="TextBox 5"/>
-          <p:cNvSpPr/>
-          <p:nvPr>
-            <p:ph type="body" idx="1"/>
-          </p:nvPr>
-        </p:nvSpPr>
-        <p:spPr>
-          <a:xfrm>
-            <a:off x="457200" y="2776728"/>
-            <a:ext cx="4792980" cy="914400"/>
-          </a:xfrm>
-          <a:prstGeom prst="rect">
-            <a:avLst/>
-          </a:prstGeom>
-          <a:noFill/>
-        </p:spPr>
-        <p:txBody>
-          <a:bodyPr wrap="none" lIns="0" rIns="0">
-            <a:noAutofit/>
-          </a:bodyPr>
-          <a:lstStyle/>
-          <a:p>
-            <a:pPr algn="ctr"/>
-            <a:r>
-              <a:rPr sz="6000" b="1" i="0">
-                <a:solidFill>
-                  <a:srgbClr val="0A2240"/>
-                </a:solidFill>
-                <a:latin typeface="Arial"/>
-              </a:rPr>
-              <a:t>3 wks</a:t>
-            </a:r>
-          </a:p>
-        </p:txBody>
-      </p:sp>
-      <p:sp>
-        <p:nvSpPr>
-          <p:cNvPr id="7" name="TextBox 6"/>
-          <p:cNvSpPr/>
-          <p:nvPr>
-            <p:ph type="body" idx="2"/>
-          </p:nvPr>
-        </p:nvSpPr>
-        <p:spPr>
-          <a:xfrm>
-            <a:off x="0" y="3965448"/>
-            <a:ext cx="5707380" cy="518159"/>
-          </a:xfrm>
-          <a:prstGeom prst="rect">
-            <a:avLst/>
-          </a:prstGeom>
-          <a:noFill/>
-        </p:spPr>
-        <p:txBody>
-          <a:bodyPr wrap="none" lIns="0" rIns="0">
-            <a:noAutofit/>
-          </a:bodyPr>
-          <a:lstStyle/>
-          <a:p>
-            <a:pPr algn="ctr"/>
-            <a:r>
-              <a:rPr sz="3400" b="0" i="0">
-                <a:solidFill>
-                  <a:srgbClr val="0A2240"/>
-                </a:solidFill>
-                <a:latin typeface="Arial"/>
-              </a:rPr>
-              <a:t>Cloud time-to-launch</a:t>
-            </a:r>
-          </a:p>
-        </p:txBody>
-      </p:sp>
-      <p:sp>
-        <p:nvSpPr>
-          <p:cNvPr id="8" name="TextBox 7"/>
-          <p:cNvSpPr/>
-          <p:nvPr>
-            <p:ph type="body" idx="3"/>
-          </p:nvPr>
-        </p:nvSpPr>
-        <p:spPr>
-          <a:xfrm>
-            <a:off x="6941820" y="2776728"/>
-            <a:ext cx="4792980" cy="914400"/>
-          </a:xfrm>
-          <a:prstGeom prst="rect">
-            <a:avLst/>
-          </a:prstGeom>
-          <a:noFill/>
-        </p:spPr>
-        <p:txBody>
-          <a:bodyPr wrap="none" lIns="0" rIns="0">
-            <a:noAutofit/>
-          </a:bodyPr>
-          <a:lstStyle/>
-          <a:p>
-            <a:pPr algn="ctr"/>
-            <a:r>
-              <a:rPr sz="6000" b="1" i="0">
-                <a:solidFill>
-                  <a:srgbClr val="0A2240"/>
-                </a:solidFill>
-                <a:latin typeface="Arial"/>
-              </a:rPr>
-              <a:t>6 mo</a:t>
-            </a:r>
-          </a:p>
-        </p:txBody>
-      </p:sp>
-      <p:sp>
-        <p:nvSpPr>
-          <p:cNvPr id="9" name="TextBox 8"/>
-          <p:cNvSpPr/>
-          <p:nvPr>
-            <p:ph type="body" idx="4"/>
-          </p:nvPr>
-        </p:nvSpPr>
-        <p:spPr>
-          <a:xfrm>
-            <a:off x="6484620" y="3965448"/>
-            <a:ext cx="5707380" cy="518159"/>
-          </a:xfrm>
-          <a:prstGeom prst="rect">
-            <a:avLst/>
-          </a:prstGeom>
-          <a:noFill/>
-        </p:spPr>
-        <p:txBody>
-          <a:bodyPr wrap="none" lIns="0" rIns="0">
-            <a:noAutofit/>
-          </a:bodyPr>
-          <a:lstStyle/>
-          <a:p>
-            <a:pPr algn="ctr"/>
-            <a:r>
-              <a:rPr sz="3400" b="0" i="0">
-                <a:solidFill>
-                  <a:srgbClr val="0A2240"/>
-                </a:solidFill>
-                <a:latin typeface="Arial"/>
-              </a:rPr>
-              <a:t>On-prem time-to-launch</a:t>
-            </a:r>
-          </a:p>
-        </p:txBody>
-      </p:sp>
-      <p:sp>
-        <p:nvSpPr>
-          <p:cNvPr id="10" name="TextBox 9"/>
-          <p:cNvSpPr/>
-          <p:nvPr>
-            <p:ph type="body" idx="5"/>
-          </p:nvPr>
-        </p:nvSpPr>
-        <p:spPr>
-          <a:xfrm>
-            <a:off x="5435323" y="3310127"/>
-            <a:ext cx="1321354" cy="640080"/>
-          </a:xfrm>
-          <a:prstGeom prst="rect">
-            <a:avLst/>
-          </a:prstGeom>
-          <a:noFill/>
-        </p:spPr>
-        <p:txBody>
-          <a:bodyPr wrap="none" lIns="0" rIns="0">
-            <a:noAutofit/>
-          </a:bodyPr>
-          <a:lstStyle/>
-          <a:p>
-            <a:pPr algn="ctr"/>
-            <a:r>
-              <a:rPr sz="4200" b="1" i="0">
-                <a:solidFill>
-                  <a:srgbClr val="5B6B82"/>
-                </a:solidFill>
-                <a:latin typeface="Arial"/>
-              </a:rPr>
-              <a:t>VS</a:t>
-            </a:r>
-          </a:p>
-        </p:txBody>
-      </p:sp>
-    </p:spTree>
-    <p:extLst>
-      <p:ext uri="{BB962C8B-B14F-4D97-AF65-F5344CB8AC3E}">
-        <p14:creationId xmlns:p14="http://schemas.microsoft.com/office/powerpoint/2010/main" val="1212999818"/>
-      </p:ext>
-    </p:extLst>
-  </p:cSld>
-  <p:clrMapOvr>
-    <a:masterClrMapping/>
-  </p:clrMapOvr>
-</p:sldLayout>
-</file>
-
-<file path=ppt/slideLayouts/slideLayout31.xml><?xml version="1.0" encoding="utf-8"?>
-<p:sldLayout xmlns:a="http://schemas.openxmlformats.org/drawingml/2006/main" xmlns:r="http://schemas.openxmlformats.org/officeDocument/2006/relationships" xmlns:p="http://schemas.openxmlformats.org/presentationml/2006/main" type="blank" preserve="1">
   <p:cSld name="slidekit · KPI Grid">
     <p:bg>
       <p:bgPr>
@@ -12201,7 +11543,7 @@
         </p:nvSpPr>
         <p:spPr>
           <a:xfrm>
-            <a:off x="4307840" y="3797808"/>
+            <a:off x="4307840" y="4056888"/>
             <a:ext cx="3576320" cy="640080"/>
           </a:xfrm>
           <a:prstGeom prst="rect">
@@ -12238,7 +11580,7 @@
         </p:nvSpPr>
         <p:spPr>
           <a:xfrm>
-            <a:off x="5559552" y="4492752"/>
+            <a:off x="5559552" y="4751832"/>
             <a:ext cx="1072896" cy="54864"/>
           </a:xfrm>
           <a:prstGeom prst="rect">
@@ -12270,16 +11612,16 @@
         </p:nvSpPr>
         <p:spPr>
           <a:xfrm>
-            <a:off x="4307840" y="4602480"/>
-            <a:ext cx="3576320" cy="1127760"/>
-          </a:xfrm>
-          <a:prstGeom prst="rect">
-            <a:avLst/>
-          </a:prstGeom>
-          <a:noFill/>
-        </p:spPr>
-        <p:txBody>
-          <a:bodyPr wrap="square" lIns="0" rIns="0">
+            <a:off x="3943896" y="4861560"/>
+            <a:ext cx="4304208" cy="609600"/>
+          </a:xfrm>
+          <a:prstGeom prst="rect">
+            <a:avLst/>
+          </a:prstGeom>
+          <a:noFill/>
+        </p:spPr>
+        <p:txBody>
+          <a:bodyPr wrap="none" lIns="0" rIns="0">
             <a:noAutofit/>
           </a:bodyPr>
           <a:lstStyle/>
@@ -12292,7 +11634,7 @@
                 </a:solidFill>
                 <a:latin typeface="Arial"/>
               </a:rPr>
-              <a:t>Avg. time to value</a:t>
+              <a:t>Time to value</a:t>
             </a:r>
           </a:p>
         </p:txBody>
@@ -12416,7 +11758,7 @@
 </p:sldLayout>
 </file>
 
-<file path=ppt/slideLayouts/slideLayout32.xml><?xml version="1.0" encoding="utf-8"?>
+<file path=ppt/slideLayouts/slideLayout31.xml><?xml version="1.0" encoding="utf-8"?>
 <p:sldLayout xmlns:a="http://schemas.openxmlformats.org/drawingml/2006/main" xmlns:r="http://schemas.openxmlformats.org/officeDocument/2006/relationships" xmlns:p="http://schemas.openxmlformats.org/presentationml/2006/main" type="blank" preserve="1">
   <p:cSld name="slidekit · Chart With Insight">
     <p:bg>
@@ -12603,7 +11945,7 @@
             <a:r>
               <a:rPr sz="2500" b="0" i="0">
                 <a:solidFill>
-                  <a:srgbClr val="5B6B82"/>
+                  <a:srgbClr val="0A2240"/>
                 </a:solidFill>
                 <a:latin typeface="Arial"/>
               </a:rPr>
@@ -12709,7 +12051,7 @@
             <a:r>
               <a:rPr sz="2500" b="0" i="0">
                 <a:solidFill>
-                  <a:srgbClr val="5B6B82"/>
+                  <a:srgbClr val="0A2240"/>
                 </a:solidFill>
                 <a:latin typeface="Arial"/>
               </a:rPr>
@@ -12815,7 +12157,7 @@
             <a:r>
               <a:rPr sz="2500" b="0" i="0">
                 <a:solidFill>
-                  <a:srgbClr val="5B6B82"/>
+                  <a:srgbClr val="0A2240"/>
                 </a:solidFill>
                 <a:latin typeface="Arial"/>
               </a:rPr>
@@ -12921,7 +12263,7 @@
             <a:r>
               <a:rPr sz="2500" b="0" i="0">
                 <a:solidFill>
-                  <a:srgbClr val="5B6B82"/>
+                  <a:srgbClr val="0A2240"/>
                 </a:solidFill>
                 <a:latin typeface="Arial"/>
               </a:rPr>
@@ -12940,8 +12282,8 @@
         </p:nvSpPr>
         <p:spPr>
           <a:xfrm>
-            <a:off x="7498080" y="1770888"/>
-            <a:ext cx="128016" cy="3718560"/>
+            <a:off x="7498080" y="3325368"/>
+            <a:ext cx="128016" cy="609600"/>
           </a:xfrm>
           <a:prstGeom prst="rect">
             <a:avLst/>
@@ -12972,16 +12314,16 @@
         </p:nvSpPr>
         <p:spPr>
           <a:xfrm>
-            <a:off x="8037576" y="1770888"/>
-            <a:ext cx="3697224" cy="3718560"/>
-          </a:xfrm>
-          <a:prstGeom prst="rect">
-            <a:avLst/>
-          </a:prstGeom>
-          <a:noFill/>
-        </p:spPr>
-        <p:txBody>
-          <a:bodyPr wrap="square" lIns="0" rIns="0">
+            <a:off x="8037576" y="3325368"/>
+            <a:ext cx="4154424" cy="609600"/>
+          </a:xfrm>
+          <a:prstGeom prst="rect">
+            <a:avLst/>
+          </a:prstGeom>
+          <a:noFill/>
+        </p:spPr>
+        <p:txBody>
+          <a:bodyPr wrap="none" lIns="0" rIns="0">
             <a:noAutofit/>
           </a:bodyPr>
           <a:lstStyle/>
@@ -12994,7 +12336,7 @@
                 </a:solidFill>
                 <a:latin typeface="Arial"/>
               </a:rPr>
-              <a:t>Activations nearly quadrupled once self-serve onboarding shipped in February.</a:t>
+              <a:t>Activations 4x.</a:t>
             </a:r>
           </a:p>
         </p:txBody>
@@ -13012,7 +12354,7 @@
 </p:sldLayout>
 </file>
 
-<file path=ppt/slideLayouts/slideLayout33.xml><?xml version="1.0" encoding="utf-8"?>
+<file path=ppt/slideLayouts/slideLayout32.xml><?xml version="1.0" encoding="utf-8"?>
 <p:sldLayout xmlns:a="http://schemas.openxmlformats.org/drawingml/2006/main" xmlns:r="http://schemas.openxmlformats.org/officeDocument/2006/relationships" xmlns:p="http://schemas.openxmlformats.org/presentationml/2006/main" type="blank" preserve="1">
   <p:cSld name="slidekit · Table">
     <p:bg>
@@ -13130,7 +12472,7 @@
             <a:r>
               <a:rPr sz="3400" b="1" i="0">
                 <a:solidFill>
-                  <a:srgbClr val="123A6B"/>
+                  <a:srgbClr val="0072CE"/>
                 </a:solidFill>
                 <a:latin typeface="Arial"/>
               </a:rPr>
@@ -13167,7 +12509,7 @@
             <a:r>
               <a:rPr sz="3400" b="1" i="0">
                 <a:solidFill>
-                  <a:srgbClr val="123A6B"/>
+                  <a:srgbClr val="0072CE"/>
                 </a:solidFill>
                 <a:latin typeface="Arial"/>
               </a:rPr>
@@ -13204,7 +12546,7 @@
             <a:r>
               <a:rPr sz="3400" b="1" i="0">
                 <a:solidFill>
-                  <a:srgbClr val="123A6B"/>
+                  <a:srgbClr val="0072CE"/>
                 </a:solidFill>
                 <a:latin typeface="Arial"/>
               </a:rPr>
@@ -13702,7 +13044,7 @@
 </p:sldLayout>
 </file>
 
-<file path=ppt/slideLayouts/slideLayout34.xml><?xml version="1.0" encoding="utf-8"?>
+<file path=ppt/slideLayouts/slideLayout33.xml><?xml version="1.0" encoding="utf-8"?>
 <p:sldLayout xmlns:a="http://schemas.openxmlformats.org/drawingml/2006/main" xmlns:r="http://schemas.openxmlformats.org/officeDocument/2006/relationships" xmlns:p="http://schemas.openxmlformats.org/presentationml/2006/main" type="blank" preserve="1">
   <p:cSld name="slidekit · Metric Comparison">
     <p:bg>
@@ -13802,7 +13144,7 @@
         </p:nvSpPr>
         <p:spPr>
           <a:xfrm>
-            <a:off x="457200" y="2075688"/>
+            <a:off x="457200" y="2334768"/>
             <a:ext cx="3576320" cy="914400"/>
           </a:xfrm>
           <a:prstGeom prst="rect">
@@ -13839,16 +13181,16 @@
         </p:nvSpPr>
         <p:spPr>
           <a:xfrm>
-            <a:off x="457200" y="3264408"/>
-            <a:ext cx="3576320" cy="1127760"/>
-          </a:xfrm>
-          <a:prstGeom prst="rect">
-            <a:avLst/>
-          </a:prstGeom>
-          <a:noFill/>
-        </p:spPr>
-        <p:txBody>
-          <a:bodyPr wrap="square" lIns="0" rIns="0">
+            <a:off x="457200" y="3523488"/>
+            <a:ext cx="3576320" cy="609600"/>
+          </a:xfrm>
+          <a:prstGeom prst="rect">
+            <a:avLst/>
+          </a:prstGeom>
+          <a:noFill/>
+        </p:spPr>
+        <p:txBody>
+          <a:bodyPr wrap="none" lIns="0" rIns="0">
             <a:noAutofit/>
           </a:bodyPr>
           <a:lstStyle/>
@@ -13861,7 +13203,7 @@
                 </a:solidFill>
                 <a:latin typeface="Arial"/>
               </a:rPr>
-              <a:t>Annual recurring revenue</a:t>
+              <a:t>Revenue</a:t>
             </a:r>
           </a:p>
         </p:txBody>
@@ -13876,7 +13218,7 @@
         </p:nvSpPr>
         <p:spPr>
           <a:xfrm>
-            <a:off x="1522569" y="4666488"/>
+            <a:off x="1522569" y="4407408"/>
             <a:ext cx="1445581" cy="518159"/>
           </a:xfrm>
           <a:prstGeom prst="rect">
@@ -13908,7 +13250,7 @@
         </p:nvSpPr>
         <p:spPr>
           <a:xfrm>
-            <a:off x="1260802" y="4666488"/>
+            <a:off x="1260802" y="4407408"/>
             <a:ext cx="1969115" cy="518159"/>
           </a:xfrm>
           <a:prstGeom prst="rect">
@@ -13945,7 +13287,7 @@
         </p:nvSpPr>
         <p:spPr>
           <a:xfrm>
-            <a:off x="4307840" y="2075688"/>
+            <a:off x="4307840" y="2334768"/>
             <a:ext cx="3576320" cy="914400"/>
           </a:xfrm>
           <a:prstGeom prst="rect">
@@ -13982,8 +13324,8 @@
         </p:nvSpPr>
         <p:spPr>
           <a:xfrm>
-            <a:off x="3834934" y="3264408"/>
-            <a:ext cx="4522132" cy="1127760"/>
+            <a:off x="3834934" y="3523488"/>
+            <a:ext cx="4522132" cy="609600"/>
           </a:xfrm>
           <a:prstGeom prst="rect">
             <a:avLst/>
@@ -14019,7 +13361,7 @@
         </p:nvSpPr>
         <p:spPr>
           <a:xfrm>
-            <a:off x="5175547" y="4666488"/>
+            <a:off x="5175547" y="4407408"/>
             <a:ext cx="1840906" cy="518159"/>
           </a:xfrm>
           <a:prstGeom prst="rect">
@@ -14051,7 +13393,7 @@
         </p:nvSpPr>
         <p:spPr>
           <a:xfrm>
-            <a:off x="4795183" y="4666488"/>
+            <a:off x="4795183" y="4407408"/>
             <a:ext cx="2601634" cy="518159"/>
           </a:xfrm>
           <a:prstGeom prst="rect">
@@ -14088,7 +13430,7 @@
         </p:nvSpPr>
         <p:spPr>
           <a:xfrm>
-            <a:off x="8158480" y="2075688"/>
+            <a:off x="8158480" y="2334768"/>
             <a:ext cx="3576320" cy="914400"/>
           </a:xfrm>
           <a:prstGeom prst="rect">
@@ -14125,16 +13467,16 @@
         </p:nvSpPr>
         <p:spPr>
           <a:xfrm>
-            <a:off x="8158480" y="3264408"/>
-            <a:ext cx="3576320" cy="1127760"/>
-          </a:xfrm>
-          <a:prstGeom prst="rect">
-            <a:avLst/>
-          </a:prstGeom>
-          <a:noFill/>
-        </p:spPr>
-        <p:txBody>
-          <a:bodyPr wrap="square" lIns="0" rIns="0">
+            <a:off x="7701280" y="3523488"/>
+            <a:ext cx="4490720" cy="609600"/>
+          </a:xfrm>
+          <a:prstGeom prst="rect">
+            <a:avLst/>
+          </a:prstGeom>
+          <a:noFill/>
+        </p:spPr>
+        <p:txBody>
+          <a:bodyPr wrap="none" lIns="0" rIns="0">
             <a:noAutofit/>
           </a:bodyPr>
           <a:lstStyle/>
@@ -14147,7 +13489,7 @@
                 </a:solidFill>
                 <a:latin typeface="Arial"/>
               </a:rPr>
-              <a:t>Net promoter score</a:t>
+              <a:t>Promoter score</a:t>
             </a:r>
           </a:p>
         </p:txBody>
@@ -14162,7 +13504,7 @@
         </p:nvSpPr>
         <p:spPr>
           <a:xfrm>
-            <a:off x="9427731" y="4666488"/>
+            <a:off x="9427731" y="4407408"/>
             <a:ext cx="1037817" cy="518159"/>
           </a:xfrm>
           <a:prstGeom prst="rect">
@@ -14194,7 +13536,7 @@
         </p:nvSpPr>
         <p:spPr>
           <a:xfrm>
-            <a:off x="9288294" y="4666488"/>
+            <a:off x="9288294" y="4407408"/>
             <a:ext cx="1316691" cy="518159"/>
           </a:xfrm>
           <a:prstGeom prst="rect">
@@ -14234,7 +13576,7 @@
 </p:sldLayout>
 </file>
 
-<file path=ppt/slideLayouts/slideLayout35.xml><?xml version="1.0" encoding="utf-8"?>
+<file path=ppt/slideLayouts/slideLayout34.xml><?xml version="1.0" encoding="utf-8"?>
 <p:sldLayout xmlns:a="http://schemas.openxmlformats.org/drawingml/2006/main" xmlns:r="http://schemas.openxmlformats.org/officeDocument/2006/relationships" xmlns:p="http://schemas.openxmlformats.org/presentationml/2006/main" type="blank" preserve="1">
   <p:cSld name="slidekit · Process Steps">
     <p:bg>
@@ -14352,7 +13694,7 @@
             <a:r>
               <a:rPr sz="4200" b="1" i="0">
                 <a:solidFill>
-                  <a:srgbClr val="123A6B"/>
+                  <a:srgbClr val="0072CE"/>
                 </a:solidFill>
                 <a:latin typeface="Arial"/>
               </a:rPr>
@@ -14372,13 +13714,13 @@
         <p:spPr>
           <a:xfrm>
             <a:off x="457200" y="2194560"/>
-            <a:ext cx="784098" cy="54864"/>
+            <a:ext cx="593303" cy="54864"/>
           </a:xfrm>
           <a:prstGeom prst="rect">
             <a:avLst/>
           </a:prstGeom>
           <a:solidFill>
-            <a:srgbClr val="123A6B"/>
+            <a:srgbClr val="0072CE"/>
           </a:solidFill>
           <a:ln>
             <a:noFill/>
@@ -14421,7 +13763,7 @@
             <a:r>
               <a:rPr sz="3400" b="1" i="0">
                 <a:solidFill>
-                  <a:srgbClr val="123A6B"/>
+                  <a:srgbClr val="0072CE"/>
                 </a:solidFill>
                 <a:latin typeface="Arial"/>
               </a:rPr>
@@ -14495,7 +13837,7 @@
             <a:r>
               <a:rPr sz="4200" b="1" i="0">
                 <a:solidFill>
-                  <a:srgbClr val="123A6B"/>
+                  <a:srgbClr val="0072CE"/>
                 </a:solidFill>
                 <a:latin typeface="Arial"/>
               </a:rPr>
@@ -14515,13 +13857,13 @@
         <p:spPr>
           <a:xfrm>
             <a:off x="3345180" y="2194560"/>
-            <a:ext cx="784098" cy="54864"/>
+            <a:ext cx="593303" cy="54864"/>
           </a:xfrm>
           <a:prstGeom prst="rect">
             <a:avLst/>
           </a:prstGeom>
           <a:solidFill>
-            <a:srgbClr val="123A6B"/>
+            <a:srgbClr val="0072CE"/>
           </a:solidFill>
           <a:ln>
             <a:noFill/>
@@ -14564,7 +13906,7 @@
             <a:r>
               <a:rPr sz="3400" b="1" i="0">
                 <a:solidFill>
-                  <a:srgbClr val="123A6B"/>
+                  <a:srgbClr val="0072CE"/>
                 </a:solidFill>
                 <a:latin typeface="Arial"/>
               </a:rPr>
@@ -14638,7 +13980,7 @@
             <a:r>
               <a:rPr sz="4200" b="1" i="0">
                 <a:solidFill>
-                  <a:srgbClr val="123A6B"/>
+                  <a:srgbClr val="0072CE"/>
                 </a:solidFill>
                 <a:latin typeface="Arial"/>
               </a:rPr>
@@ -14658,13 +14000,13 @@
         <p:spPr>
           <a:xfrm>
             <a:off x="6233160" y="2194560"/>
-            <a:ext cx="784098" cy="54864"/>
+            <a:ext cx="593303" cy="54864"/>
           </a:xfrm>
           <a:prstGeom prst="rect">
             <a:avLst/>
           </a:prstGeom>
           <a:solidFill>
-            <a:srgbClr val="123A6B"/>
+            <a:srgbClr val="0072CE"/>
           </a:solidFill>
           <a:ln>
             <a:noFill/>
@@ -14707,7 +14049,7 @@
             <a:r>
               <a:rPr sz="3400" b="1" i="0">
                 <a:solidFill>
-                  <a:srgbClr val="123A6B"/>
+                  <a:srgbClr val="0072CE"/>
                 </a:solidFill>
                 <a:latin typeface="Arial"/>
               </a:rPr>
@@ -14781,7 +14123,7 @@
             <a:r>
               <a:rPr sz="4200" b="1" i="0">
                 <a:solidFill>
-                  <a:srgbClr val="123A6B"/>
+                  <a:srgbClr val="0072CE"/>
                 </a:solidFill>
                 <a:latin typeface="Arial"/>
               </a:rPr>
@@ -14801,13 +14143,13 @@
         <p:spPr>
           <a:xfrm>
             <a:off x="9121140" y="2194560"/>
-            <a:ext cx="784098" cy="54864"/>
+            <a:ext cx="593303" cy="54864"/>
           </a:xfrm>
           <a:prstGeom prst="rect">
             <a:avLst/>
           </a:prstGeom>
           <a:solidFill>
-            <a:srgbClr val="123A6B"/>
+            <a:srgbClr val="0072CE"/>
           </a:solidFill>
           <a:ln>
             <a:noFill/>
@@ -14850,7 +14192,7 @@
             <a:r>
               <a:rPr sz="3400" b="1" i="0">
                 <a:solidFill>
-                  <a:srgbClr val="123A6B"/>
+                  <a:srgbClr val="0072CE"/>
                 </a:solidFill>
                 <a:latin typeface="Arial"/>
               </a:rPr>
@@ -14909,7 +14251,7 @@
 </p:sldLayout>
 </file>
 
-<file path=ppt/slideLayouts/slideLayout36.xml><?xml version="1.0" encoding="utf-8"?>
+<file path=ppt/slideLayouts/slideLayout35.xml><?xml version="1.0" encoding="utf-8"?>
 <p:sldLayout xmlns:a="http://schemas.openxmlformats.org/drawingml/2006/main" xmlns:r="http://schemas.openxmlformats.org/officeDocument/2006/relationships" xmlns:p="http://schemas.openxmlformats.org/presentationml/2006/main" type="blank" preserve="1">
   <p:cSld name="slidekit · Roadmap">
     <p:bg>
@@ -15441,7 +14783,7 @@
 </p:sldLayout>
 </file>
 
-<file path=ppt/slideLayouts/slideLayout37.xml><?xml version="1.0" encoding="utf-8"?>
+<file path=ppt/slideLayouts/slideLayout36.xml><?xml version="1.0" encoding="utf-8"?>
 <p:sldLayout xmlns:a="http://schemas.openxmlformats.org/drawingml/2006/main" xmlns:r="http://schemas.openxmlformats.org/officeDocument/2006/relationships" xmlns:p="http://schemas.openxmlformats.org/presentationml/2006/main" type="blank" preserve="1">
   <p:cSld name="slidekit · Funnel">
     <p:bg>
@@ -15820,7 +15162,7 @@
 </p:sldLayout>
 </file>
 
-<file path=ppt/slideLayouts/slideLayout38.xml><?xml version="1.0" encoding="utf-8"?>
+<file path=ppt/slideLayouts/slideLayout37.xml><?xml version="1.0" encoding="utf-8"?>
 <p:sldLayout xmlns:a="http://schemas.openxmlformats.org/drawingml/2006/main" xmlns:r="http://schemas.openxmlformats.org/officeDocument/2006/relationships" xmlns:p="http://schemas.openxmlformats.org/presentationml/2006/main" type="blank" preserve="1">
   <p:cSld name="slidekit · Nested Circles">
     <p:bg>
@@ -15927,7 +15269,7 @@
             <a:avLst/>
           </a:prstGeom>
           <a:solidFill>
-            <a:srgbClr val="5B6B82"/>
+            <a:srgbClr val="0A2240"/>
           </a:solidFill>
           <a:ln>
             <a:noFill/>
@@ -15991,7 +15333,7 @@
             <a:avLst/>
           </a:prstGeom>
           <a:solidFill>
-            <a:srgbClr val="123A6B"/>
+            <a:srgbClr val="0A2240"/>
           </a:solidFill>
           <a:ln>
             <a:noFill/>
@@ -16241,7 +15583,7 @@
 </p:sldLayout>
 </file>
 
-<file path=ppt/slideLayouts/slideLayout39.xml><?xml version="1.0" encoding="utf-8"?>
+<file path=ppt/slideLayouts/slideLayout38.xml><?xml version="1.0" encoding="utf-8"?>
 <p:sldLayout xmlns:a="http://schemas.openxmlformats.org/drawingml/2006/main" xmlns:r="http://schemas.openxmlformats.org/officeDocument/2006/relationships" xmlns:p="http://schemas.openxmlformats.org/presentationml/2006/main" type="blank" preserve="1">
   <p:cSld name="slidekit · Pyramid">
     <p:bg>
@@ -16348,7 +15690,7 @@
             <a:avLst/>
           </a:prstGeom>
           <a:solidFill>
-            <a:srgbClr val="123A6B"/>
+            <a:srgbClr val="0072CE"/>
           </a:solidFill>
           <a:ln>
             <a:noFill/>
@@ -16486,7 +15828,7 @@
             <a:avLst/>
           </a:prstGeom>
           <a:solidFill>
-            <a:srgbClr val="123A6B"/>
+            <a:srgbClr val="0072CE"/>
           </a:solidFill>
           <a:ln>
             <a:noFill/>
@@ -16603,6 +15945,533 @@
                 <a:latin typeface="Arial"/>
               </a:rPr>
               <a:t>Tactics</a:t>
+            </a:r>
+          </a:p>
+        </p:txBody>
+      </p:sp>
+    </p:spTree>
+    <p:extLst>
+      <p:ext uri="{BB962C8B-B14F-4D97-AF65-F5344CB8AC3E}">
+        <p14:creationId xmlns:p14="http://schemas.microsoft.com/office/powerpoint/2010/main" val="1212999818"/>
+      </p:ext>
+    </p:extLst>
+  </p:cSld>
+  <p:clrMapOvr>
+    <a:masterClrMapping/>
+  </p:clrMapOvr>
+</p:sldLayout>
+</file>
+
+<file path=ppt/slideLayouts/slideLayout39.xml><?xml version="1.0" encoding="utf-8"?>
+<p:sldLayout xmlns:a="http://schemas.openxmlformats.org/drawingml/2006/main" xmlns:r="http://schemas.openxmlformats.org/officeDocument/2006/relationships" xmlns:p="http://schemas.openxmlformats.org/presentationml/2006/main" type="blank" preserve="1">
+  <p:cSld name="slidekit · SWOT">
+    <p:bg>
+      <p:bgPr>
+        <a:solidFill>
+          <a:srgbClr val="FFFFFF"/>
+        </a:solidFill>
+        <a:effectLst/>
+      </p:bgPr>
+    </p:bg>
+    <p:spTree>
+      <p:nvGrpSpPr>
+        <p:cNvPr id="1" name=""/>
+        <p:cNvGrpSpPr/>
+        <p:nvPr/>
+      </p:nvGrpSpPr>
+      <p:grpSpPr>
+        <a:xfrm>
+          <a:off x="0" y="0"/>
+          <a:ext cx="0" cy="0"/>
+          <a:chOff x="0" y="0"/>
+          <a:chExt cx="0" cy="0"/>
+        </a:xfrm>
+      </p:grpSpPr>
+      <p:sp>
+        <p:nvSpPr>
+          <p:cNvPr id="4" name="Slide Number Placeholder 3"/>
+          <p:cNvSpPr>
+            <a:spLocks noGrp="1"/>
+          </p:cNvSpPr>
+          <p:nvPr>
+            <p:ph type="sldNum" sz="quarter" idx="12"/>
+          </p:nvPr>
+        </p:nvSpPr>
+        <p:spPr>
+          <a:xfrm>
+            <a:off x="11186160" y="6035040"/>
+            <a:ext cx="548640" cy="365760"/>
+          </a:xfrm>
+        </p:spPr>
+        <p:txBody>
+          <a:bodyPr/>
+          <a:lstStyle/>
+          <a:p>
+            <a:fld id="{C1FF6DA9-008F-8B48-92A6-B652298478BF}" type="slidenum">
+              <a:rPr lang="en-US" smtClean="0"/>
+              <a:t>‹#›</a:t>
+            </a:fld>
+            <a:endParaRPr lang="en-US"/>
+          </a:p>
+        </p:txBody>
+      </p:sp>
+      <p:sp>
+        <p:nvSpPr>
+          <p:cNvPr id="5" name="TextBox 4"/>
+          <p:cNvSpPr/>
+          <p:nvPr>
+            <p:ph type="title"/>
+          </p:nvPr>
+        </p:nvSpPr>
+        <p:spPr>
+          <a:xfrm>
+            <a:off x="457200" y="457200"/>
+            <a:ext cx="11277600" cy="768096"/>
+          </a:xfrm>
+          <a:prstGeom prst="rect">
+            <a:avLst/>
+          </a:prstGeom>
+          <a:noFill/>
+        </p:spPr>
+        <p:txBody>
+          <a:bodyPr wrap="none" lIns="0" rIns="0">
+            <a:noAutofit/>
+          </a:bodyPr>
+          <a:lstStyle/>
+          <a:p>
+            <a:pPr algn="l"/>
+            <a:r>
+              <a:rPr sz="4200" b="1" i="0">
+                <a:solidFill>
+                  <a:srgbClr val="0072CE"/>
+                </a:solidFill>
+                <a:latin typeface="Arial"/>
+              </a:rPr>
+              <a:t>SWOT Analysis</a:t>
+            </a:r>
+          </a:p>
+        </p:txBody>
+      </p:sp>
+      <p:sp>
+        <p:nvSpPr>
+          <p:cNvPr id="6" name="TextBox 5"/>
+          <p:cNvSpPr/>
+          <p:nvPr>
+            <p:ph type="body" idx="1"/>
+          </p:nvPr>
+        </p:nvSpPr>
+        <p:spPr>
+          <a:xfrm>
+            <a:off x="457200" y="1499616"/>
+            <a:ext cx="5501640" cy="621791"/>
+          </a:xfrm>
+          <a:prstGeom prst="rect">
+            <a:avLst/>
+          </a:prstGeom>
+          <a:noFill/>
+        </p:spPr>
+        <p:txBody>
+          <a:bodyPr wrap="none" lIns="0" rIns="0">
+            <a:noAutofit/>
+          </a:bodyPr>
+          <a:lstStyle/>
+          <a:p>
+            <a:pPr algn="l"/>
+            <a:r>
+              <a:rPr sz="3400" b="1" i="0">
+                <a:solidFill>
+                  <a:srgbClr val="0072CE"/>
+                </a:solidFill>
+                <a:latin typeface="Arial"/>
+              </a:rPr>
+              <a:t>Strengths</a:t>
+            </a:r>
+          </a:p>
+        </p:txBody>
+      </p:sp>
+      <p:sp>
+        <p:nvSpPr>
+          <p:cNvPr id="7" name="Rectangle 6"/>
+          <p:cNvSpPr/>
+          <p:nvPr>
+            <p:ph type="body" idx="2"/>
+          </p:nvPr>
+        </p:nvSpPr>
+        <p:spPr>
+          <a:xfrm>
+            <a:off x="457200" y="2176271"/>
+            <a:ext cx="2015207" cy="54864"/>
+          </a:xfrm>
+          <a:prstGeom prst="rect">
+            <a:avLst/>
+          </a:prstGeom>
+          <a:solidFill>
+            <a:srgbClr val="0072CE"/>
+          </a:solidFill>
+          <a:ln>
+            <a:noFill/>
+          </a:ln>
+          <a:effectLst/>
+        </p:spPr>
+        <p:txBody>
+          <a:bodyPr rtlCol="0" anchor="ctr"/>
+          <a:lstStyle/>
+          <a:p>
+            <a:pPr algn="ctr"/>
+          </a:p>
+        </p:txBody>
+      </p:sp>
+      <p:sp>
+        <p:nvSpPr>
+          <p:cNvPr id="8" name="TextBox 7"/>
+          <p:cNvSpPr/>
+          <p:nvPr>
+            <p:ph type="body" idx="3"/>
+          </p:nvPr>
+        </p:nvSpPr>
+        <p:spPr>
+          <a:xfrm>
+            <a:off x="457200" y="2395727"/>
+            <a:ext cx="7863523" cy="609600"/>
+          </a:xfrm>
+          <a:prstGeom prst="rect">
+            <a:avLst/>
+          </a:prstGeom>
+          <a:noFill/>
+        </p:spPr>
+        <p:txBody>
+          <a:bodyPr wrap="none" lIns="0" rIns="0">
+            <a:noAutofit/>
+          </a:bodyPr>
+          <a:lstStyle/>
+          <a:p>
+            <a:pPr algn="l"/>
+            <a:r>
+              <a:rPr sz="3400" b="0" i="0">
+                <a:solidFill>
+                  <a:srgbClr val="0A2240"/>
+                </a:solidFill>
+                <a:latin typeface="Arial"/>
+              </a:rPr>
+              <a:t>Strong brand, loyal users</a:t>
+            </a:r>
+          </a:p>
+        </p:txBody>
+      </p:sp>
+      <p:sp>
+        <p:nvSpPr>
+          <p:cNvPr id="9" name="TextBox 8"/>
+          <p:cNvSpPr/>
+          <p:nvPr>
+            <p:ph type="body" idx="4"/>
+          </p:nvPr>
+        </p:nvSpPr>
+        <p:spPr>
+          <a:xfrm>
+            <a:off x="6233160" y="1499616"/>
+            <a:ext cx="5501640" cy="621791"/>
+          </a:xfrm>
+          <a:prstGeom prst="rect">
+            <a:avLst/>
+          </a:prstGeom>
+          <a:noFill/>
+        </p:spPr>
+        <p:txBody>
+          <a:bodyPr wrap="none" lIns="0" rIns="0">
+            <a:noAutofit/>
+          </a:bodyPr>
+          <a:lstStyle/>
+          <a:p>
+            <a:pPr algn="l"/>
+            <a:r>
+              <a:rPr sz="3400" b="1" i="0">
+                <a:solidFill>
+                  <a:srgbClr val="0A2240"/>
+                </a:solidFill>
+                <a:latin typeface="Arial"/>
+              </a:rPr>
+              <a:t>Weaknesses</a:t>
+            </a:r>
+          </a:p>
+        </p:txBody>
+      </p:sp>
+      <p:sp>
+        <p:nvSpPr>
+          <p:cNvPr id="10" name="Rectangle 9"/>
+          <p:cNvSpPr/>
+          <p:nvPr>
+            <p:ph type="body" idx="5"/>
+          </p:nvPr>
+        </p:nvSpPr>
+        <p:spPr>
+          <a:xfrm>
+            <a:off x="6233160" y="2176271"/>
+            <a:ext cx="2584686" cy="54864"/>
+          </a:xfrm>
+          <a:prstGeom prst="rect">
+            <a:avLst/>
+          </a:prstGeom>
+          <a:solidFill>
+            <a:srgbClr val="0A2240"/>
+          </a:solidFill>
+          <a:ln>
+            <a:noFill/>
+          </a:ln>
+          <a:effectLst/>
+        </p:spPr>
+        <p:txBody>
+          <a:bodyPr rtlCol="0" anchor="ctr"/>
+          <a:lstStyle/>
+          <a:p>
+            <a:pPr algn="ctr"/>
+          </a:p>
+        </p:txBody>
+      </p:sp>
+      <p:sp>
+        <p:nvSpPr>
+          <p:cNvPr id="11" name="TextBox 10"/>
+          <p:cNvSpPr/>
+          <p:nvPr>
+            <p:ph type="body" idx="6"/>
+          </p:nvPr>
+        </p:nvSpPr>
+        <p:spPr>
+          <a:xfrm>
+            <a:off x="6233160" y="2395727"/>
+            <a:ext cx="5958840" cy="609600"/>
+          </a:xfrm>
+          <a:prstGeom prst="rect">
+            <a:avLst/>
+          </a:prstGeom>
+          <a:noFill/>
+        </p:spPr>
+        <p:txBody>
+          <a:bodyPr wrap="none" lIns="0" rIns="0">
+            <a:noAutofit/>
+          </a:bodyPr>
+          <a:lstStyle/>
+          <a:p>
+            <a:pPr algn="l"/>
+            <a:r>
+              <a:rPr sz="3400" b="0" i="0">
+                <a:solidFill>
+                  <a:srgbClr val="0A2240"/>
+                </a:solidFill>
+                <a:latin typeface="Arial"/>
+              </a:rPr>
+              <a:t>Thin margins, small team</a:t>
+            </a:r>
+          </a:p>
+        </p:txBody>
+      </p:sp>
+      <p:sp>
+        <p:nvSpPr>
+          <p:cNvPr id="12" name="TextBox 11"/>
+          <p:cNvSpPr/>
+          <p:nvPr>
+            <p:ph type="body" idx="7"/>
+          </p:nvPr>
+        </p:nvSpPr>
+        <p:spPr>
+          <a:xfrm>
+            <a:off x="457200" y="3767328"/>
+            <a:ext cx="5501640" cy="621791"/>
+          </a:xfrm>
+          <a:prstGeom prst="rect">
+            <a:avLst/>
+          </a:prstGeom>
+          <a:noFill/>
+        </p:spPr>
+        <p:txBody>
+          <a:bodyPr wrap="none" lIns="0" rIns="0">
+            <a:noAutofit/>
+          </a:bodyPr>
+          <a:lstStyle/>
+          <a:p>
+            <a:pPr algn="l"/>
+            <a:r>
+              <a:rPr sz="3400" b="1" i="0">
+                <a:solidFill>
+                  <a:srgbClr val="0072CE"/>
+                </a:solidFill>
+                <a:latin typeface="Arial"/>
+              </a:rPr>
+              <a:t>Opportunities</a:t>
+            </a:r>
+          </a:p>
+        </p:txBody>
+      </p:sp>
+      <p:sp>
+        <p:nvSpPr>
+          <p:cNvPr id="13" name="Rectangle 12"/>
+          <p:cNvSpPr/>
+          <p:nvPr>
+            <p:ph type="body" idx="8"/>
+          </p:nvPr>
+        </p:nvSpPr>
+        <p:spPr>
+          <a:xfrm>
+            <a:off x="457200" y="4443983"/>
+            <a:ext cx="2830525" cy="54864"/>
+          </a:xfrm>
+          <a:prstGeom prst="rect">
+            <a:avLst/>
+          </a:prstGeom>
+          <a:solidFill>
+            <a:srgbClr val="0072CE"/>
+          </a:solidFill>
+          <a:ln>
+            <a:noFill/>
+          </a:ln>
+          <a:effectLst/>
+        </p:spPr>
+        <p:txBody>
+          <a:bodyPr rtlCol="0" anchor="ctr"/>
+          <a:lstStyle/>
+          <a:p>
+            <a:pPr algn="ctr"/>
+          </a:p>
+        </p:txBody>
+      </p:sp>
+      <p:sp>
+        <p:nvSpPr>
+          <p:cNvPr id="14" name="TextBox 13"/>
+          <p:cNvSpPr/>
+          <p:nvPr>
+            <p:ph type="body" idx="9"/>
+          </p:nvPr>
+        </p:nvSpPr>
+        <p:spPr>
+          <a:xfrm>
+            <a:off x="457200" y="4663439"/>
+            <a:ext cx="8015326" cy="609600"/>
+          </a:xfrm>
+          <a:prstGeom prst="rect">
+            <a:avLst/>
+          </a:prstGeom>
+          <a:noFill/>
+        </p:spPr>
+        <p:txBody>
+          <a:bodyPr wrap="none" lIns="0" rIns="0">
+            <a:noAutofit/>
+          </a:bodyPr>
+          <a:lstStyle/>
+          <a:p>
+            <a:pPr algn="l"/>
+            <a:r>
+              <a:rPr sz="3400" b="0" i="0">
+                <a:solidFill>
+                  <a:srgbClr val="0A2240"/>
+                </a:solidFill>
+                <a:latin typeface="Arial"/>
+              </a:rPr>
+              <a:t>New markets via partners</a:t>
+            </a:r>
+          </a:p>
+        </p:txBody>
+      </p:sp>
+      <p:sp>
+        <p:nvSpPr>
+          <p:cNvPr id="15" name="TextBox 14"/>
+          <p:cNvSpPr/>
+          <p:nvPr>
+            <p:ph type="body" idx="13"/>
+          </p:nvPr>
+        </p:nvSpPr>
+        <p:spPr>
+          <a:xfrm>
+            <a:off x="6233160" y="3767328"/>
+            <a:ext cx="5501640" cy="621791"/>
+          </a:xfrm>
+          <a:prstGeom prst="rect">
+            <a:avLst/>
+          </a:prstGeom>
+          <a:noFill/>
+        </p:spPr>
+        <p:txBody>
+          <a:bodyPr wrap="none" lIns="0" rIns="0">
+            <a:noAutofit/>
+          </a:bodyPr>
+          <a:lstStyle/>
+          <a:p>
+            <a:pPr algn="l"/>
+            <a:r>
+              <a:rPr sz="3400" b="1" i="0">
+                <a:solidFill>
+                  <a:srgbClr val="0A2240"/>
+                </a:solidFill>
+                <a:latin typeface="Arial"/>
+              </a:rPr>
+              <a:t>Threats</a:t>
+            </a:r>
+          </a:p>
+        </p:txBody>
+      </p:sp>
+      <p:sp>
+        <p:nvSpPr>
+          <p:cNvPr id="16" name="Rectangle 15"/>
+          <p:cNvSpPr/>
+          <p:nvPr>
+            <p:ph type="body" idx="14"/>
+          </p:nvPr>
+        </p:nvSpPr>
+        <p:spPr>
+          <a:xfrm>
+            <a:off x="6233160" y="4443983"/>
+            <a:ext cx="1559793" cy="54864"/>
+          </a:xfrm>
+          <a:prstGeom prst="rect">
+            <a:avLst/>
+          </a:prstGeom>
+          <a:solidFill>
+            <a:srgbClr val="0A2240"/>
+          </a:solidFill>
+          <a:ln>
+            <a:noFill/>
+          </a:ln>
+          <a:effectLst/>
+        </p:spPr>
+        <p:txBody>
+          <a:bodyPr rtlCol="0" anchor="ctr"/>
+          <a:lstStyle/>
+          <a:p>
+            <a:pPr algn="ctr"/>
+          </a:p>
+        </p:txBody>
+      </p:sp>
+      <p:sp>
+        <p:nvSpPr>
+          <p:cNvPr id="17" name="TextBox 16"/>
+          <p:cNvSpPr/>
+          <p:nvPr>
+            <p:ph type="body" idx="15"/>
+          </p:nvPr>
+        </p:nvSpPr>
+        <p:spPr>
+          <a:xfrm>
+            <a:off x="6233160" y="4663439"/>
+            <a:ext cx="5958840" cy="609600"/>
+          </a:xfrm>
+          <a:prstGeom prst="rect">
+            <a:avLst/>
+          </a:prstGeom>
+          <a:noFill/>
+        </p:spPr>
+        <p:txBody>
+          <a:bodyPr wrap="none" lIns="0" rIns="0">
+            <a:noAutofit/>
+          </a:bodyPr>
+          <a:lstStyle/>
+          <a:p>
+            <a:pPr algn="l"/>
+            <a:r>
+              <a:rPr sz="3400" b="0" i="0">
+                <a:solidFill>
+                  <a:srgbClr val="0A2240"/>
+                </a:solidFill>
+                <a:latin typeface="Arial"/>
+              </a:rPr>
+              <a:t>New entrants cut prices</a:t>
             </a:r>
           </a:p>
         </p:txBody>
@@ -16909,533 +16778,6 @@
 </file>
 
 <file path=ppt/slideLayouts/slideLayout40.xml><?xml version="1.0" encoding="utf-8"?>
-<p:sldLayout xmlns:a="http://schemas.openxmlformats.org/drawingml/2006/main" xmlns:r="http://schemas.openxmlformats.org/officeDocument/2006/relationships" xmlns:p="http://schemas.openxmlformats.org/presentationml/2006/main" type="blank" preserve="1">
-  <p:cSld name="slidekit · SWOT">
-    <p:bg>
-      <p:bgPr>
-        <a:solidFill>
-          <a:srgbClr val="FFFFFF"/>
-        </a:solidFill>
-        <a:effectLst/>
-      </p:bgPr>
-    </p:bg>
-    <p:spTree>
-      <p:nvGrpSpPr>
-        <p:cNvPr id="1" name=""/>
-        <p:cNvGrpSpPr/>
-        <p:nvPr/>
-      </p:nvGrpSpPr>
-      <p:grpSpPr>
-        <a:xfrm>
-          <a:off x="0" y="0"/>
-          <a:ext cx="0" cy="0"/>
-          <a:chOff x="0" y="0"/>
-          <a:chExt cx="0" cy="0"/>
-        </a:xfrm>
-      </p:grpSpPr>
-      <p:sp>
-        <p:nvSpPr>
-          <p:cNvPr id="4" name="Slide Number Placeholder 3"/>
-          <p:cNvSpPr>
-            <a:spLocks noGrp="1"/>
-          </p:cNvSpPr>
-          <p:nvPr>
-            <p:ph type="sldNum" sz="quarter" idx="12"/>
-          </p:nvPr>
-        </p:nvSpPr>
-        <p:spPr>
-          <a:xfrm>
-            <a:off x="11186160" y="6035040"/>
-            <a:ext cx="548640" cy="365760"/>
-          </a:xfrm>
-        </p:spPr>
-        <p:txBody>
-          <a:bodyPr/>
-          <a:lstStyle/>
-          <a:p>
-            <a:fld id="{C1FF6DA9-008F-8B48-92A6-B652298478BF}" type="slidenum">
-              <a:rPr lang="en-US" smtClean="0"/>
-              <a:t>‹#›</a:t>
-            </a:fld>
-            <a:endParaRPr lang="en-US"/>
-          </a:p>
-        </p:txBody>
-      </p:sp>
-      <p:sp>
-        <p:nvSpPr>
-          <p:cNvPr id="5" name="TextBox 4"/>
-          <p:cNvSpPr/>
-          <p:nvPr>
-            <p:ph type="title"/>
-          </p:nvPr>
-        </p:nvSpPr>
-        <p:spPr>
-          <a:xfrm>
-            <a:off x="457200" y="457200"/>
-            <a:ext cx="11277600" cy="768096"/>
-          </a:xfrm>
-          <a:prstGeom prst="rect">
-            <a:avLst/>
-          </a:prstGeom>
-          <a:noFill/>
-        </p:spPr>
-        <p:txBody>
-          <a:bodyPr wrap="none" lIns="0" rIns="0">
-            <a:noAutofit/>
-          </a:bodyPr>
-          <a:lstStyle/>
-          <a:p>
-            <a:pPr algn="l"/>
-            <a:r>
-              <a:rPr sz="4200" b="1" i="0">
-                <a:solidFill>
-                  <a:srgbClr val="0072CE"/>
-                </a:solidFill>
-                <a:latin typeface="Arial"/>
-              </a:rPr>
-              <a:t>SWOT Analysis</a:t>
-            </a:r>
-          </a:p>
-        </p:txBody>
-      </p:sp>
-      <p:sp>
-        <p:nvSpPr>
-          <p:cNvPr id="6" name="TextBox 5"/>
-          <p:cNvSpPr/>
-          <p:nvPr>
-            <p:ph type="body" idx="1"/>
-          </p:nvPr>
-        </p:nvSpPr>
-        <p:spPr>
-          <a:xfrm>
-            <a:off x="457200" y="1499616"/>
-            <a:ext cx="5501640" cy="621791"/>
-          </a:xfrm>
-          <a:prstGeom prst="rect">
-            <a:avLst/>
-          </a:prstGeom>
-          <a:noFill/>
-        </p:spPr>
-        <p:txBody>
-          <a:bodyPr wrap="none" lIns="0" rIns="0">
-            <a:noAutofit/>
-          </a:bodyPr>
-          <a:lstStyle/>
-          <a:p>
-            <a:pPr algn="l"/>
-            <a:r>
-              <a:rPr sz="3400" b="1" i="0">
-                <a:solidFill>
-                  <a:srgbClr val="0072CE"/>
-                </a:solidFill>
-                <a:latin typeface="Arial"/>
-              </a:rPr>
-              <a:t>Strengths</a:t>
-            </a:r>
-          </a:p>
-        </p:txBody>
-      </p:sp>
-      <p:sp>
-        <p:nvSpPr>
-          <p:cNvPr id="7" name="Rectangle 6"/>
-          <p:cNvSpPr/>
-          <p:nvPr>
-            <p:ph type="body" idx="2"/>
-          </p:nvPr>
-        </p:nvSpPr>
-        <p:spPr>
-          <a:xfrm>
-            <a:off x="457200" y="2176271"/>
-            <a:ext cx="1650492" cy="54864"/>
-          </a:xfrm>
-          <a:prstGeom prst="rect">
-            <a:avLst/>
-          </a:prstGeom>
-          <a:solidFill>
-            <a:srgbClr val="0072CE"/>
-          </a:solidFill>
-          <a:ln>
-            <a:noFill/>
-          </a:ln>
-          <a:effectLst/>
-        </p:spPr>
-        <p:txBody>
-          <a:bodyPr rtlCol="0" anchor="ctr"/>
-          <a:lstStyle/>
-          <a:p>
-            <a:pPr algn="ctr"/>
-          </a:p>
-        </p:txBody>
-      </p:sp>
-      <p:sp>
-        <p:nvSpPr>
-          <p:cNvPr id="8" name="TextBox 7"/>
-          <p:cNvSpPr/>
-          <p:nvPr>
-            <p:ph type="body" idx="3"/>
-          </p:nvPr>
-        </p:nvSpPr>
-        <p:spPr>
-          <a:xfrm>
-            <a:off x="457200" y="2395727"/>
-            <a:ext cx="5501640" cy="1097281"/>
-          </a:xfrm>
-          <a:prstGeom prst="rect">
-            <a:avLst/>
-          </a:prstGeom>
-          <a:noFill/>
-        </p:spPr>
-        <p:txBody>
-          <a:bodyPr wrap="square" lIns="0" rIns="0">
-            <a:noAutofit/>
-          </a:bodyPr>
-          <a:lstStyle/>
-          <a:p>
-            <a:pPr algn="l"/>
-            <a:r>
-              <a:rPr sz="3400" b="0" i="0">
-                <a:solidFill>
-                  <a:srgbClr val="0A2240"/>
-                </a:solidFill>
-                <a:latin typeface="Arial"/>
-              </a:rPr>
-              <a:t>A strong brand with loyal users</a:t>
-            </a:r>
-          </a:p>
-        </p:txBody>
-      </p:sp>
-      <p:sp>
-        <p:nvSpPr>
-          <p:cNvPr id="9" name="TextBox 8"/>
-          <p:cNvSpPr/>
-          <p:nvPr>
-            <p:ph type="body" idx="4"/>
-          </p:nvPr>
-        </p:nvSpPr>
-        <p:spPr>
-          <a:xfrm>
-            <a:off x="6233160" y="1499616"/>
-            <a:ext cx="5501640" cy="621791"/>
-          </a:xfrm>
-          <a:prstGeom prst="rect">
-            <a:avLst/>
-          </a:prstGeom>
-          <a:noFill/>
-        </p:spPr>
-        <p:txBody>
-          <a:bodyPr wrap="none" lIns="0" rIns="0">
-            <a:noAutofit/>
-          </a:bodyPr>
-          <a:lstStyle/>
-          <a:p>
-            <a:pPr algn="l"/>
-            <a:r>
-              <a:rPr sz="3400" b="1" i="0">
-                <a:solidFill>
-                  <a:srgbClr val="5B6B82"/>
-                </a:solidFill>
-                <a:latin typeface="Arial"/>
-              </a:rPr>
-              <a:t>Weaknesses</a:t>
-            </a:r>
-          </a:p>
-        </p:txBody>
-      </p:sp>
-      <p:sp>
-        <p:nvSpPr>
-          <p:cNvPr id="10" name="Rectangle 9"/>
-          <p:cNvSpPr/>
-          <p:nvPr>
-            <p:ph type="body" idx="5"/>
-          </p:nvPr>
-        </p:nvSpPr>
-        <p:spPr>
-          <a:xfrm>
-            <a:off x="6233160" y="2176271"/>
-            <a:ext cx="1650492" cy="54864"/>
-          </a:xfrm>
-          <a:prstGeom prst="rect">
-            <a:avLst/>
-          </a:prstGeom>
-          <a:solidFill>
-            <a:srgbClr val="5B6B82"/>
-          </a:solidFill>
-          <a:ln>
-            <a:noFill/>
-          </a:ln>
-          <a:effectLst/>
-        </p:spPr>
-        <p:txBody>
-          <a:bodyPr rtlCol="0" anchor="ctr"/>
-          <a:lstStyle/>
-          <a:p>
-            <a:pPr algn="ctr"/>
-          </a:p>
-        </p:txBody>
-      </p:sp>
-      <p:sp>
-        <p:nvSpPr>
-          <p:cNvPr id="11" name="TextBox 10"/>
-          <p:cNvSpPr/>
-          <p:nvPr>
-            <p:ph type="body" idx="6"/>
-          </p:nvPr>
-        </p:nvSpPr>
-        <p:spPr>
-          <a:xfrm>
-            <a:off x="6233160" y="2395727"/>
-            <a:ext cx="5501640" cy="1097281"/>
-          </a:xfrm>
-          <a:prstGeom prst="rect">
-            <a:avLst/>
-          </a:prstGeom>
-          <a:noFill/>
-        </p:spPr>
-        <p:txBody>
-          <a:bodyPr wrap="square" lIns="0" rIns="0">
-            <a:noAutofit/>
-          </a:bodyPr>
-          <a:lstStyle/>
-          <a:p>
-            <a:pPr algn="l"/>
-            <a:r>
-              <a:rPr sz="3400" b="0" i="0">
-                <a:solidFill>
-                  <a:srgbClr val="0A2240"/>
-                </a:solidFill>
-                <a:latin typeface="Arial"/>
-              </a:rPr>
-              <a:t>Thin margins and a small team</a:t>
-            </a:r>
-          </a:p>
-        </p:txBody>
-      </p:sp>
-      <p:sp>
-        <p:nvSpPr>
-          <p:cNvPr id="12" name="TextBox 11"/>
-          <p:cNvSpPr/>
-          <p:nvPr>
-            <p:ph type="body" idx="7"/>
-          </p:nvPr>
-        </p:nvSpPr>
-        <p:spPr>
-          <a:xfrm>
-            <a:off x="457200" y="3767328"/>
-            <a:ext cx="5501640" cy="621791"/>
-          </a:xfrm>
-          <a:prstGeom prst="rect">
-            <a:avLst/>
-          </a:prstGeom>
-          <a:noFill/>
-        </p:spPr>
-        <p:txBody>
-          <a:bodyPr wrap="none" lIns="0" rIns="0">
-            <a:noAutofit/>
-          </a:bodyPr>
-          <a:lstStyle/>
-          <a:p>
-            <a:pPr algn="l"/>
-            <a:r>
-              <a:rPr sz="3400" b="1" i="0">
-                <a:solidFill>
-                  <a:srgbClr val="0072CE"/>
-                </a:solidFill>
-                <a:latin typeface="Arial"/>
-              </a:rPr>
-              <a:t>Opportunities</a:t>
-            </a:r>
-          </a:p>
-        </p:txBody>
-      </p:sp>
-      <p:sp>
-        <p:nvSpPr>
-          <p:cNvPr id="13" name="Rectangle 12"/>
-          <p:cNvSpPr/>
-          <p:nvPr>
-            <p:ph type="body" idx="8"/>
-          </p:nvPr>
-        </p:nvSpPr>
-        <p:spPr>
-          <a:xfrm>
-            <a:off x="457200" y="4443983"/>
-            <a:ext cx="1650492" cy="54864"/>
-          </a:xfrm>
-          <a:prstGeom prst="rect">
-            <a:avLst/>
-          </a:prstGeom>
-          <a:solidFill>
-            <a:srgbClr val="0072CE"/>
-          </a:solidFill>
-          <a:ln>
-            <a:noFill/>
-          </a:ln>
-          <a:effectLst/>
-        </p:spPr>
-        <p:txBody>
-          <a:bodyPr rtlCol="0" anchor="ctr"/>
-          <a:lstStyle/>
-          <a:p>
-            <a:pPr algn="ctr"/>
-          </a:p>
-        </p:txBody>
-      </p:sp>
-      <p:sp>
-        <p:nvSpPr>
-          <p:cNvPr id="14" name="TextBox 13"/>
-          <p:cNvSpPr/>
-          <p:nvPr>
-            <p:ph type="body" idx="9"/>
-          </p:nvPr>
-        </p:nvSpPr>
-        <p:spPr>
-          <a:xfrm>
-            <a:off x="457200" y="4663439"/>
-            <a:ext cx="5501640" cy="1097281"/>
-          </a:xfrm>
-          <a:prstGeom prst="rect">
-            <a:avLst/>
-          </a:prstGeom>
-          <a:noFill/>
-        </p:spPr>
-        <p:txBody>
-          <a:bodyPr wrap="square" lIns="0" rIns="0">
-            <a:noAutofit/>
-          </a:bodyPr>
-          <a:lstStyle/>
-          <a:p>
-            <a:pPr algn="l"/>
-            <a:r>
-              <a:rPr sz="3400" b="0" i="0">
-                <a:solidFill>
-                  <a:srgbClr val="0A2240"/>
-                </a:solidFill>
-                <a:latin typeface="Arial"/>
-              </a:rPr>
-              <a:t>New markets through partnerships</a:t>
-            </a:r>
-          </a:p>
-        </p:txBody>
-      </p:sp>
-      <p:sp>
-        <p:nvSpPr>
-          <p:cNvPr id="15" name="TextBox 14"/>
-          <p:cNvSpPr/>
-          <p:nvPr>
-            <p:ph type="body" idx="13"/>
-          </p:nvPr>
-        </p:nvSpPr>
-        <p:spPr>
-          <a:xfrm>
-            <a:off x="6233160" y="3767328"/>
-            <a:ext cx="5501640" cy="621791"/>
-          </a:xfrm>
-          <a:prstGeom prst="rect">
-            <a:avLst/>
-          </a:prstGeom>
-          <a:noFill/>
-        </p:spPr>
-        <p:txBody>
-          <a:bodyPr wrap="none" lIns="0" rIns="0">
-            <a:noAutofit/>
-          </a:bodyPr>
-          <a:lstStyle/>
-          <a:p>
-            <a:pPr algn="l"/>
-            <a:r>
-              <a:rPr sz="3400" b="1" i="0">
-                <a:solidFill>
-                  <a:srgbClr val="5B6B82"/>
-                </a:solidFill>
-                <a:latin typeface="Arial"/>
-              </a:rPr>
-              <a:t>Threats</a:t>
-            </a:r>
-          </a:p>
-        </p:txBody>
-      </p:sp>
-      <p:sp>
-        <p:nvSpPr>
-          <p:cNvPr id="16" name="Rectangle 15"/>
-          <p:cNvSpPr/>
-          <p:nvPr>
-            <p:ph type="body" idx="14"/>
-          </p:nvPr>
-        </p:nvSpPr>
-        <p:spPr>
-          <a:xfrm>
-            <a:off x="6233160" y="4443983"/>
-            <a:ext cx="1650492" cy="54864"/>
-          </a:xfrm>
-          <a:prstGeom prst="rect">
-            <a:avLst/>
-          </a:prstGeom>
-          <a:solidFill>
-            <a:srgbClr val="5B6B82"/>
-          </a:solidFill>
-          <a:ln>
-            <a:noFill/>
-          </a:ln>
-          <a:effectLst/>
-        </p:spPr>
-        <p:txBody>
-          <a:bodyPr rtlCol="0" anchor="ctr"/>
-          <a:lstStyle/>
-          <a:p>
-            <a:pPr algn="ctr"/>
-          </a:p>
-        </p:txBody>
-      </p:sp>
-      <p:sp>
-        <p:nvSpPr>
-          <p:cNvPr id="17" name="TextBox 16"/>
-          <p:cNvSpPr/>
-          <p:nvPr>
-            <p:ph type="body" idx="15"/>
-          </p:nvPr>
-        </p:nvSpPr>
-        <p:spPr>
-          <a:xfrm>
-            <a:off x="6233160" y="4663439"/>
-            <a:ext cx="5501640" cy="1097281"/>
-          </a:xfrm>
-          <a:prstGeom prst="rect">
-            <a:avLst/>
-          </a:prstGeom>
-          <a:noFill/>
-        </p:spPr>
-        <p:txBody>
-          <a:bodyPr wrap="square" lIns="0" rIns="0">
-            <a:noAutofit/>
-          </a:bodyPr>
-          <a:lstStyle/>
-          <a:p>
-            <a:pPr algn="l"/>
-            <a:r>
-              <a:rPr sz="3400" b="0" i="0">
-                <a:solidFill>
-                  <a:srgbClr val="0A2240"/>
-                </a:solidFill>
-                <a:latin typeface="Arial"/>
-              </a:rPr>
-              <a:t>New entrants driving price pressure</a:t>
-            </a:r>
-          </a:p>
-        </p:txBody>
-      </p:sp>
-    </p:spTree>
-    <p:extLst>
-      <p:ext uri="{BB962C8B-B14F-4D97-AF65-F5344CB8AC3E}">
-        <p14:creationId xmlns:p14="http://schemas.microsoft.com/office/powerpoint/2010/main" val="1212999818"/>
-      </p:ext>
-    </p:extLst>
-  </p:cSld>
-  <p:clrMapOvr>
-    <a:masterClrMapping/>
-  </p:clrMapOvr>
-</p:sldLayout>
-</file>
-
-<file path=ppt/slideLayouts/slideLayout41.xml><?xml version="1.0" encoding="utf-8"?>
 <p:sldLayout xmlns:a="http://schemas.openxmlformats.org/drawingml/2006/main" xmlns:r="http://schemas.openxmlformats.org/officeDocument/2006/relationships" xmlns:p="http://schemas.openxmlformats.org/presentationml/2006/main" type="blank" preserve="1">
   <p:cSld name="slidekit · Comparison Matrix">
     <p:bg>
@@ -19639,7 +18981,6 @@
     <p:sldLayoutId id="2147483738" r:id="rId39"/>
     <p:sldLayoutId id="2147483739" r:id="rId40"/>
     <p:sldLayoutId id="2147483740" r:id="rId41"/>
-    <p:sldLayoutId id="2147483741" r:id="rId42"/>
   </p:sldLayoutIdLst>
   <p:txStyles>
     <p:titleStyle>
@@ -20150,7 +19491,7 @@
             <a:fld id="{4B0E1F8A-6C1D-4E2A-9F3B-7A5C8D2E1F60}" type="slidenum">
               <a:rPr sz="1600" b="0" i="0">
                 <a:solidFill>
-                  <a:srgbClr val="5B6B82"/>
+                  <a:srgbClr val="0A2240"/>
                 </a:solidFill>
                 <a:latin typeface="Arial"/>
               </a:rPr>
@@ -20388,7 +19729,7 @@
             <a:fld id="{4B0E1F8A-6C1D-4E2A-9F3B-7A5C8D2E1F60}" type="slidenum">
               <a:rPr sz="1600" b="0" i="0">
                 <a:solidFill>
-                  <a:srgbClr val="5B6B82"/>
+                  <a:srgbClr val="0A2240"/>
                 </a:solidFill>
                 <a:latin typeface="Arial"/>
               </a:rPr>
@@ -20484,7 +19825,7 @@
             <a:r>
               <a:rPr sz="4200" b="1" i="0">
                 <a:solidFill>
-                  <a:srgbClr val="123A6B"/>
+                  <a:srgbClr val="0072CE"/>
                 </a:solidFill>
                 <a:latin typeface="Arial"/>
               </a:rPr>
@@ -20519,7 +19860,7 @@
             <a:r>
               <a:rPr sz="4200" b="1" i="0">
                 <a:solidFill>
-                  <a:srgbClr val="123A6B"/>
+                  <a:srgbClr val="0072CE"/>
                 </a:solidFill>
                 <a:latin typeface="Arial"/>
               </a:rPr>
@@ -20589,7 +19930,7 @@
             <a:r>
               <a:rPr sz="4200" b="1" i="0">
                 <a:solidFill>
-                  <a:srgbClr val="123A6B"/>
+                  <a:srgbClr val="0072CE"/>
                 </a:solidFill>
                 <a:latin typeface="Arial"/>
               </a:rPr>
@@ -20624,7 +19965,7 @@
             <a:r>
               <a:rPr sz="4200" b="1" i="0">
                 <a:solidFill>
-                  <a:srgbClr val="123A6B"/>
+                  <a:srgbClr val="0072CE"/>
                 </a:solidFill>
                 <a:latin typeface="Arial"/>
               </a:rPr>
@@ -20694,7 +20035,7 @@
             <a:r>
               <a:rPr sz="4200" b="1" i="0">
                 <a:solidFill>
-                  <a:srgbClr val="123A6B"/>
+                  <a:srgbClr val="0072CE"/>
                 </a:solidFill>
                 <a:latin typeface="Arial"/>
               </a:rPr>
@@ -20729,7 +20070,7 @@
             <a:r>
               <a:rPr sz="4200" b="1" i="0">
                 <a:solidFill>
-                  <a:srgbClr val="123A6B"/>
+                  <a:srgbClr val="0072CE"/>
                 </a:solidFill>
                 <a:latin typeface="Arial"/>
               </a:rPr>
@@ -20801,7 +20142,7 @@
             <a:fld id="{4B0E1F8A-6C1D-4E2A-9F3B-7A5C8D2E1F60}" type="slidenum">
               <a:rPr sz="1600" b="0" i="0">
                 <a:solidFill>
-                  <a:srgbClr val="5B6B82"/>
+                  <a:srgbClr val="0A2240"/>
                 </a:solidFill>
                 <a:latin typeface="Arial"/>
               </a:rPr>
@@ -21039,7 +20380,7 @@
             <a:fld id="{4B0E1F8A-6C1D-4E2A-9F3B-7A5C8D2E1F60}" type="slidenum">
               <a:rPr sz="1600" b="0" i="0">
                 <a:solidFill>
-                  <a:srgbClr val="5B6B82"/>
+                  <a:srgbClr val="0A2240"/>
                 </a:solidFill>
                 <a:latin typeface="Arial"/>
               </a:rPr>
@@ -21089,7 +20430,7 @@
             <a:avLst/>
           </a:prstGeom>
           <a:solidFill>
-            <a:srgbClr val="FF5F56"/>
+            <a:srgbClr val="FFFFFF"/>
           </a:solidFill>
           <a:ln>
             <a:noFill/>
@@ -21133,7 +20474,7 @@
             <a:avLst/>
           </a:prstGeom>
           <a:solidFill>
-            <a:srgbClr val="FFBD2E"/>
+            <a:srgbClr val="FFFFFF"/>
           </a:solidFill>
           <a:ln>
             <a:noFill/>
@@ -21177,7 +20518,7 @@
             <a:avLst/>
           </a:prstGeom>
           <a:solidFill>
-            <a:srgbClr val="27C93F"/>
+            <a:srgbClr val="FFFFFF"/>
           </a:solidFill>
           <a:ln>
             <a:noFill/>
@@ -21232,7 +20573,7 @@
             <a:r>
               <a:rPr sz="4200" b="0" i="0">
                 <a:solidFill>
-                  <a:srgbClr val="D4D4D4"/>
+                  <a:srgbClr val="FFFFFF"/>
                 </a:solidFill>
                 <a:latin typeface="Arial"/>
               </a:rPr>
@@ -21267,7 +20608,7 @@
             <a:r>
               <a:rPr sz="3400" b="0" i="0">
                 <a:solidFill>
-                  <a:srgbClr val="4EC9B0"/>
+                  <a:srgbClr val="569CD6"/>
                 </a:solidFill>
                 <a:latin typeface="Arial"/>
               </a:rPr>
@@ -21302,7 +20643,7 @@
             <a:r>
               <a:rPr sz="3400" b="0" i="0">
                 <a:solidFill>
-                  <a:srgbClr val="D4D4D4"/>
+                  <a:srgbClr val="FFFFFF"/>
                 </a:solidFill>
                 <a:latin typeface="Arial"/>
               </a:rPr>
@@ -21337,7 +20678,7 @@
             <a:r>
               <a:rPr sz="3400" b="0" i="0">
                 <a:solidFill>
-                  <a:srgbClr val="4EC9B0"/>
+                  <a:srgbClr val="569CD6"/>
                 </a:solidFill>
                 <a:latin typeface="Arial"/>
               </a:rPr>
@@ -21372,7 +20713,7 @@
             <a:r>
               <a:rPr sz="3400" b="0" i="0">
                 <a:solidFill>
-                  <a:srgbClr val="D4D4D4"/>
+                  <a:srgbClr val="FFFFFF"/>
                 </a:solidFill>
                 <a:latin typeface="Arial"/>
               </a:rPr>
@@ -21407,7 +20748,7 @@
             <a:r>
               <a:rPr sz="3400" b="0" i="0">
                 <a:solidFill>
-                  <a:srgbClr val="4EC9B0"/>
+                  <a:srgbClr val="569CD6"/>
                 </a:solidFill>
                 <a:latin typeface="Arial"/>
               </a:rPr>
@@ -21442,7 +20783,7 @@
             <a:r>
               <a:rPr sz="3400" b="0" i="0">
                 <a:solidFill>
-                  <a:srgbClr val="D4D4D4"/>
+                  <a:srgbClr val="FFFFFF"/>
                 </a:solidFill>
                 <a:latin typeface="Arial"/>
               </a:rPr>
@@ -21477,7 +20818,7 @@
             <a:r>
               <a:rPr sz="3400" b="0" i="0">
                 <a:solidFill>
-                  <a:srgbClr val="4EC9B0"/>
+                  <a:srgbClr val="569CD6"/>
                 </a:solidFill>
                 <a:latin typeface="Arial"/>
               </a:rPr>
@@ -21512,7 +20853,7 @@
             <a:r>
               <a:rPr sz="3400" b="0" i="0">
                 <a:solidFill>
-                  <a:srgbClr val="D4D4D4"/>
+                  <a:srgbClr val="FFFFFF"/>
                 </a:solidFill>
                 <a:latin typeface="Arial"/>
               </a:rPr>
@@ -21549,7 +20890,7 @@
             <a:fld id="{4B0E1F8A-6C1D-4E2A-9F3B-7A5C8D2E1F60}" type="slidenum">
               <a:rPr sz="1600" b="0" i="0">
                 <a:solidFill>
-                  <a:srgbClr val="5B6B82"/>
+                  <a:srgbClr val="0A2240"/>
                 </a:solidFill>
                 <a:latin typeface="Arial"/>
               </a:rPr>
@@ -21662,8 +21003,8 @@
         </p:nvSpPr>
         <p:spPr>
           <a:xfrm>
-            <a:off x="548640" y="2176271"/>
-            <a:ext cx="1650492" cy="54864"/>
+            <a:off x="457200" y="2176271"/>
+            <a:ext cx="1239527" cy="54864"/>
           </a:xfrm>
           <a:prstGeom prst="rect">
             <a:avLst/>
@@ -21724,7 +21065,7 @@
             <a:r>
               <a:rPr sz="3400" b="1" i="0">
                 <a:solidFill>
-                  <a:srgbClr val="5B6B82"/>
+                  <a:srgbClr val="0A2240"/>
                 </a:solidFill>
                 <a:latin typeface="Arial"/>
               </a:rPr>
@@ -21741,14 +21082,14 @@
         </p:nvSpPr>
         <p:spPr>
           <a:xfrm>
-            <a:off x="6324600" y="2176271"/>
-            <a:ext cx="1650492" cy="54864"/>
+            <a:off x="6233160" y="2176271"/>
+            <a:ext cx="1990961" cy="54864"/>
           </a:xfrm>
           <a:prstGeom prst="rect">
             <a:avLst/>
           </a:prstGeom>
           <a:solidFill>
-            <a:srgbClr val="5B6B82"/>
+            <a:srgbClr val="0A2240"/>
           </a:solidFill>
           <a:ln>
             <a:noFill/>
@@ -22015,7 +21356,7 @@
             <a:fld id="{4B0E1F8A-6C1D-4E2A-9F3B-7A5C8D2E1F60}" type="slidenum">
               <a:rPr sz="1600" b="0" i="0">
                 <a:solidFill>
-                  <a:srgbClr val="5B6B82"/>
+                  <a:srgbClr val="0A2240"/>
                 </a:solidFill>
                 <a:latin typeface="Arial"/>
               </a:rPr>
@@ -22253,7 +21594,7 @@
             <a:fld id="{4B0E1F8A-6C1D-4E2A-9F3B-7A5C8D2E1F60}" type="slidenum">
               <a:rPr sz="1600" b="0" i="0">
                 <a:solidFill>
-                  <a:srgbClr val="5B6B82"/>
+                  <a:srgbClr val="0A2240"/>
                 </a:solidFill>
                 <a:latin typeface="Arial"/>
               </a:rPr>
@@ -22430,7 +21771,7 @@
             <a:fld id="{4B0E1F8A-6C1D-4E2A-9F3B-7A5C8D2E1F60}" type="slidenum">
               <a:rPr sz="1600" b="0" i="0">
                 <a:solidFill>
-                  <a:srgbClr val="5B6B82"/>
+                  <a:srgbClr val="0A2240"/>
                 </a:solidFill>
                 <a:latin typeface="Arial"/>
               </a:rPr>
@@ -22526,7 +21867,7 @@
             <a:r>
               <a:rPr sz="4200" b="1" i="0">
                 <a:solidFill>
-                  <a:srgbClr val="123A6B"/>
+                  <a:srgbClr val="0072CE"/>
                 </a:solidFill>
                 <a:latin typeface="Arial"/>
               </a:rPr>
@@ -22561,7 +21902,7 @@
             <a:r>
               <a:rPr sz="4200" b="1" i="0">
                 <a:solidFill>
-                  <a:srgbClr val="123A6B"/>
+                  <a:srgbClr val="0072CE"/>
                 </a:solidFill>
                 <a:latin typeface="Arial"/>
               </a:rPr>
@@ -22631,7 +21972,7 @@
             <a:r>
               <a:rPr sz="4200" b="1" i="0">
                 <a:solidFill>
-                  <a:srgbClr val="123A6B"/>
+                  <a:srgbClr val="0072CE"/>
                 </a:solidFill>
                 <a:latin typeface="Arial"/>
               </a:rPr>
@@ -22666,7 +22007,7 @@
             <a:r>
               <a:rPr sz="4200" b="1" i="0">
                 <a:solidFill>
-                  <a:srgbClr val="123A6B"/>
+                  <a:srgbClr val="0072CE"/>
                 </a:solidFill>
                 <a:latin typeface="Arial"/>
               </a:rPr>
@@ -22736,7 +22077,7 @@
             <a:r>
               <a:rPr sz="4200" b="1" i="0">
                 <a:solidFill>
-                  <a:srgbClr val="123A6B"/>
+                  <a:srgbClr val="0072CE"/>
                 </a:solidFill>
                 <a:latin typeface="Arial"/>
               </a:rPr>
@@ -22771,7 +22112,7 @@
             <a:r>
               <a:rPr sz="4200" b="1" i="0">
                 <a:solidFill>
-                  <a:srgbClr val="123A6B"/>
+                  <a:srgbClr val="0072CE"/>
                 </a:solidFill>
                 <a:latin typeface="Arial"/>
               </a:rPr>
@@ -22843,7 +22184,7 @@
             <a:fld id="{4B0E1F8A-6C1D-4E2A-9F3B-7A5C8D2E1F60}" type="slidenum">
               <a:rPr sz="1600" b="0" i="0">
                 <a:solidFill>
-                  <a:srgbClr val="5B6B82"/>
+                  <a:srgbClr val="0A2240"/>
                 </a:solidFill>
                 <a:latin typeface="Arial"/>
               </a:rPr>
@@ -23081,7 +22422,7 @@
             <a:fld id="{4B0E1F8A-6C1D-4E2A-9F3B-7A5C8D2E1F60}" type="slidenum">
               <a:rPr sz="1600" b="0" i="0">
                 <a:solidFill>
-                  <a:srgbClr val="5B6B82"/>
+                  <a:srgbClr val="0A2240"/>
                 </a:solidFill>
                 <a:latin typeface="Arial"/>
               </a:rPr>
@@ -23256,7 +22597,7 @@
             <a:r>
               <a:rPr sz="3400" b="0" i="0">
                 <a:solidFill>
-                  <a:srgbClr val="5B6B82"/>
+                  <a:srgbClr val="0A2240"/>
                 </a:solidFill>
                 <a:latin typeface="Arial"/>
               </a:rPr>
@@ -23293,7 +22634,7 @@
             <a:fld id="{4B0E1F8A-6C1D-4E2A-9F3B-7A5C8D2E1F60}" type="slidenum">
               <a:rPr sz="1600" b="0" i="0">
                 <a:solidFill>
-                  <a:srgbClr val="5B6B82"/>
+                  <a:srgbClr val="0A2240"/>
                 </a:solidFill>
                 <a:latin typeface="Arial"/>
               </a:rPr>
@@ -23389,7 +22730,7 @@
             <a:r>
               <a:rPr sz="3400" b="1" i="0">
                 <a:solidFill>
-                  <a:srgbClr val="123A6B"/>
+                  <a:srgbClr val="0072CE"/>
                 </a:solidFill>
                 <a:latin typeface="Arial"/>
               </a:rPr>
@@ -23424,7 +22765,7 @@
             <a:r>
               <a:rPr sz="3400" b="1" i="0">
                 <a:solidFill>
-                  <a:srgbClr val="123A6B"/>
+                  <a:srgbClr val="0072CE"/>
                 </a:solidFill>
                 <a:latin typeface="Arial"/>
               </a:rPr>
@@ -23671,7 +23012,7 @@
             <a:fld id="{4B0E1F8A-6C1D-4E2A-9F3B-7A5C8D2E1F60}" type="slidenum">
               <a:rPr sz="1600" b="0" i="0">
                 <a:solidFill>
-                  <a:srgbClr val="5B6B82"/>
+                  <a:srgbClr val="0A2240"/>
                 </a:solidFill>
                 <a:latin typeface="Arial"/>
               </a:rPr>
@@ -23721,7 +23062,7 @@
             <a:avLst/>
           </a:prstGeom>
           <a:solidFill>
-            <a:srgbClr val="FF5F56"/>
+            <a:srgbClr val="FFFFFF"/>
           </a:solidFill>
           <a:ln>
             <a:noFill/>
@@ -23765,7 +23106,7 @@
             <a:avLst/>
           </a:prstGeom>
           <a:solidFill>
-            <a:srgbClr val="FFBD2E"/>
+            <a:srgbClr val="FFFFFF"/>
           </a:solidFill>
           <a:ln>
             <a:noFill/>
@@ -23809,7 +23150,7 @@
             <a:avLst/>
           </a:prstGeom>
           <a:solidFill>
-            <a:srgbClr val="27C93F"/>
+            <a:srgbClr val="FFFFFF"/>
           </a:solidFill>
           <a:ln>
             <a:noFill/>
@@ -23864,7 +23205,7 @@
             <a:r>
               <a:rPr sz="4200" b="0" i="0">
                 <a:solidFill>
-                  <a:srgbClr val="D4D4D4"/>
+                  <a:srgbClr val="FFFFFF"/>
                 </a:solidFill>
                 <a:latin typeface="Arial"/>
               </a:rPr>
@@ -23899,7 +23240,7 @@
             <a:r>
               <a:rPr sz="3400" b="0" i="0">
                 <a:solidFill>
-                  <a:srgbClr val="D4D4D4"/>
+                  <a:srgbClr val="FFFFFF"/>
                 </a:solidFill>
                 <a:latin typeface="Arial"/>
               </a:rPr>
@@ -23934,7 +23275,7 @@
             <a:r>
               <a:rPr sz="3400" b="0" i="0">
                 <a:solidFill>
-                  <a:srgbClr val="D4D4D4"/>
+                  <a:srgbClr val="FFFFFF"/>
                 </a:solidFill>
                 <a:latin typeface="Arial"/>
               </a:rPr>
@@ -23969,7 +23310,7 @@
             <a:r>
               <a:rPr sz="3400" b="0" i="0">
                 <a:solidFill>
-                  <a:srgbClr val="D4D4D4"/>
+                  <a:srgbClr val="FFFFFF"/>
                 </a:solidFill>
                 <a:latin typeface="Arial"/>
               </a:rPr>
@@ -24004,7 +23345,7 @@
             <a:r>
               <a:rPr sz="3400" b="0" i="0">
                 <a:solidFill>
-                  <a:srgbClr val="D4D4D4"/>
+                  <a:srgbClr val="FFFFFF"/>
                 </a:solidFill>
                 <a:latin typeface="Arial"/>
               </a:rPr>
@@ -24074,7 +23415,7 @@
             <a:r>
               <a:rPr sz="3400" b="0" i="0">
                 <a:solidFill>
-                  <a:srgbClr val="D4D4D4"/>
+                  <a:srgbClr val="FFFFFF"/>
                 </a:solidFill>
                 <a:latin typeface="Arial"/>
               </a:rPr>
@@ -24111,7 +23452,7 @@
             <a:fld id="{4B0E1F8A-6C1D-4E2A-9F3B-7A5C8D2E1F60}" type="slidenum">
               <a:rPr sz="1600" b="0" i="0">
                 <a:solidFill>
-                  <a:srgbClr val="5B6B82"/>
+                  <a:srgbClr val="0A2240"/>
                 </a:solidFill>
                 <a:latin typeface="Arial"/>
               </a:rPr>
@@ -24419,7 +23760,7 @@
             <a:fld id="{4B0E1F8A-6C1D-4E2A-9F3B-7A5C8D2E1F60}" type="slidenum">
               <a:rPr sz="1600" b="0" i="0">
                 <a:solidFill>
-                  <a:srgbClr val="5B6B82"/>
+                  <a:srgbClr val="0A2240"/>
                 </a:solidFill>
                 <a:latin typeface="Arial"/>
               </a:rPr>
@@ -24657,7 +23998,7 @@
             <a:fld id="{4B0E1F8A-6C1D-4E2A-9F3B-7A5C8D2E1F60}" type="slidenum">
               <a:rPr sz="1600" b="0" i="0">
                 <a:solidFill>
-                  <a:srgbClr val="5B6B82"/>
+                  <a:srgbClr val="0A2240"/>
                 </a:solidFill>
                 <a:latin typeface="Arial"/>
               </a:rPr>
@@ -24895,7 +24236,7 @@
             <a:fld id="{4B0E1F8A-6C1D-4E2A-9F3B-7A5C8D2E1F60}" type="slidenum">
               <a:rPr sz="1600" b="0" i="0">
                 <a:solidFill>
-                  <a:srgbClr val="5B6B82"/>
+                  <a:srgbClr val="0A2240"/>
                 </a:solidFill>
                 <a:latin typeface="Arial"/>
               </a:rPr>
@@ -25072,7 +24413,7 @@
             <a:fld id="{4B0E1F8A-6C1D-4E2A-9F3B-7A5C8D2E1F60}" type="slidenum">
               <a:rPr sz="1600" b="0" i="0">
                 <a:solidFill>
-                  <a:srgbClr val="5B6B82"/>
+                  <a:srgbClr val="0A2240"/>
                 </a:solidFill>
                 <a:latin typeface="Arial"/>
               </a:rPr>
@@ -25214,7 +24555,7 @@
             <a:fld id="{4B0E1F8A-6C1D-4E2A-9F3B-7A5C8D2E1F60}" type="slidenum">
               <a:rPr sz="1600" b="0" i="0">
                 <a:solidFill>
-                  <a:srgbClr val="5B6B82"/>
+                  <a:srgbClr val="0A2240"/>
                 </a:solidFill>
                 <a:latin typeface="Arial"/>
               </a:rPr>
@@ -25391,7 +24732,7 @@
             <a:fld id="{4B0E1F8A-6C1D-4E2A-9F3B-7A5C8D2E1F60}" type="slidenum">
               <a:rPr sz="1600" b="0" i="0">
                 <a:solidFill>
-                  <a:srgbClr val="5B6B82"/>
+                  <a:srgbClr val="0A2240"/>
                 </a:solidFill>
                 <a:latin typeface="Arial"/>
               </a:rPr>
@@ -25629,7 +24970,7 @@
             <a:fld id="{4B0E1F8A-6C1D-4E2A-9F3B-7A5C8D2E1F60}" type="slidenum">
               <a:rPr sz="1600" b="0" i="0">
                 <a:solidFill>
-                  <a:srgbClr val="5B6B82"/>
+                  <a:srgbClr val="0A2240"/>
                 </a:solidFill>
                 <a:latin typeface="Arial"/>
               </a:rPr>
@@ -25865,7 +25206,7 @@
             <a:r>
               <a:rPr sz="4200" b="1" i="0">
                 <a:solidFill>
-                  <a:srgbClr val="5B6B82"/>
+                  <a:srgbClr val="0A2240"/>
                 </a:solidFill>
                 <a:latin typeface="Arial"/>
               </a:rPr>
@@ -25902,7 +25243,7 @@
             <a:fld id="{4B0E1F8A-6C1D-4E2A-9F3B-7A5C8D2E1F60}" type="slidenum">
               <a:rPr sz="1600" b="0" i="0">
                 <a:solidFill>
-                  <a:srgbClr val="5B6B82"/>
+                  <a:srgbClr val="0A2240"/>
                 </a:solidFill>
                 <a:latin typeface="Arial"/>
               </a:rPr>
@@ -26324,7 +25665,7 @@
             <a:fld id="{4B0E1F8A-6C1D-4E2A-9F3B-7A5C8D2E1F60}" type="slidenum">
               <a:rPr sz="1600" b="0" i="0">
                 <a:solidFill>
-                  <a:srgbClr val="5B6B82"/>
+                  <a:srgbClr val="0A2240"/>
                 </a:solidFill>
                 <a:latin typeface="Arial"/>
               </a:rPr>
@@ -26420,7 +25761,7 @@
             <a:r>
               <a:rPr sz="4200" b="1" i="0">
                 <a:solidFill>
-                  <a:srgbClr val="123A6B"/>
+                  <a:srgbClr val="0072CE"/>
                 </a:solidFill>
                 <a:latin typeface="Arial"/>
               </a:rPr>
@@ -26455,7 +25796,7 @@
             <a:r>
               <a:rPr sz="4200" b="1" i="0">
                 <a:solidFill>
-                  <a:srgbClr val="123A6B"/>
+                  <a:srgbClr val="0072CE"/>
                 </a:solidFill>
                 <a:latin typeface="Arial"/>
               </a:rPr>
@@ -26525,7 +25866,7 @@
             <a:r>
               <a:rPr sz="4200" b="1" i="0">
                 <a:solidFill>
-                  <a:srgbClr val="123A6B"/>
+                  <a:srgbClr val="0072CE"/>
                 </a:solidFill>
                 <a:latin typeface="Arial"/>
               </a:rPr>
@@ -26560,7 +25901,7 @@
             <a:r>
               <a:rPr sz="4200" b="1" i="0">
                 <a:solidFill>
-                  <a:srgbClr val="123A6B"/>
+                  <a:srgbClr val="0072CE"/>
                 </a:solidFill>
                 <a:latin typeface="Arial"/>
               </a:rPr>
@@ -26630,7 +25971,7 @@
             <a:r>
               <a:rPr sz="4200" b="1" i="0">
                 <a:solidFill>
-                  <a:srgbClr val="123A6B"/>
+                  <a:srgbClr val="0072CE"/>
                 </a:solidFill>
                 <a:latin typeface="Arial"/>
               </a:rPr>
@@ -26665,7 +26006,7 @@
             <a:r>
               <a:rPr sz="4200" b="1" i="0">
                 <a:solidFill>
-                  <a:srgbClr val="123A6B"/>
+                  <a:srgbClr val="0072CE"/>
                 </a:solidFill>
                 <a:latin typeface="Arial"/>
               </a:rPr>
@@ -26737,7 +26078,7 @@
             <a:fld id="{4B0E1F8A-6C1D-4E2A-9F3B-7A5C8D2E1F60}" type="slidenum">
               <a:rPr sz="1600" b="0" i="0">
                 <a:solidFill>
-                  <a:srgbClr val="5B6B82"/>
+                  <a:srgbClr val="0A2240"/>
                 </a:solidFill>
                 <a:latin typeface="Arial"/>
               </a:rPr>
@@ -26833,7 +26174,7 @@
             <a:r>
               <a:rPr sz="3400" b="1" i="0">
                 <a:solidFill>
-                  <a:srgbClr val="123A6B"/>
+                  <a:srgbClr val="0072CE"/>
                 </a:solidFill>
                 <a:latin typeface="Arial"/>
               </a:rPr>
@@ -26868,7 +26209,7 @@
             <a:r>
               <a:rPr sz="3400" b="1" i="0">
                 <a:solidFill>
-                  <a:srgbClr val="123A6B"/>
+                  <a:srgbClr val="0072CE"/>
                 </a:solidFill>
                 <a:latin typeface="Arial"/>
               </a:rPr>
@@ -27229,7 +26570,7 @@
             <a:fld id="{4B0E1F8A-6C1D-4E2A-9F3B-7A5C8D2E1F60}" type="slidenum">
               <a:rPr sz="1600" b="0" i="0">
                 <a:solidFill>
-                  <a:srgbClr val="5B6B82"/>
+                  <a:srgbClr val="0A2240"/>
                 </a:solidFill>
                 <a:latin typeface="Arial"/>
               </a:rPr>
@@ -27279,7 +26620,7 @@
             <a:avLst/>
           </a:prstGeom>
           <a:solidFill>
-            <a:srgbClr val="FF5F56"/>
+            <a:srgbClr val="FFFFFF"/>
           </a:solidFill>
           <a:ln>
             <a:noFill/>
@@ -27323,7 +26664,7 @@
             <a:avLst/>
           </a:prstGeom>
           <a:solidFill>
-            <a:srgbClr val="FFBD2E"/>
+            <a:srgbClr val="FFFFFF"/>
           </a:solidFill>
           <a:ln>
             <a:noFill/>
@@ -27367,7 +26708,7 @@
             <a:avLst/>
           </a:prstGeom>
           <a:solidFill>
-            <a:srgbClr val="27C93F"/>
+            <a:srgbClr val="FFFFFF"/>
           </a:solidFill>
           <a:ln>
             <a:noFill/>
@@ -27422,7 +26763,7 @@
             <a:r>
               <a:rPr sz="4200" b="0" i="0">
                 <a:solidFill>
-                  <a:srgbClr val="D4D4D4"/>
+                  <a:srgbClr val="FFFFFF"/>
                 </a:solidFill>
                 <a:latin typeface="Arial"/>
               </a:rPr>
@@ -27457,7 +26798,7 @@
             <a:r>
               <a:rPr sz="3400" b="0" i="0">
                 <a:solidFill>
-                  <a:srgbClr val="4EC9B0"/>
+                  <a:srgbClr val="569CD6"/>
                 </a:solidFill>
                 <a:latin typeface="Arial"/>
               </a:rPr>
@@ -27492,7 +26833,7 @@
             <a:r>
               <a:rPr sz="3400" b="0" i="0">
                 <a:solidFill>
-                  <a:srgbClr val="D4D4D4"/>
+                  <a:srgbClr val="FFFFFF"/>
                 </a:solidFill>
                 <a:latin typeface="Arial"/>
               </a:rPr>
@@ -27527,7 +26868,7 @@
             <a:r>
               <a:rPr sz="3400" b="0" i="0">
                 <a:solidFill>
-                  <a:srgbClr val="4EC9B0"/>
+                  <a:srgbClr val="569CD6"/>
                 </a:solidFill>
                 <a:latin typeface="Arial"/>
               </a:rPr>
@@ -27562,7 +26903,7 @@
             <a:r>
               <a:rPr sz="3400" b="0" i="0">
                 <a:solidFill>
-                  <a:srgbClr val="D4D4D4"/>
+                  <a:srgbClr val="FFFFFF"/>
                 </a:solidFill>
                 <a:latin typeface="Arial"/>
               </a:rPr>
@@ -27580,7 +26921,7 @@
         <p:spPr>
           <a:xfrm>
             <a:off x="457200" y="2874262"/>
-            <a:ext cx="950673" cy="518159"/>
+            <a:ext cx="4099777" cy="518159"/>
           </a:xfrm>
           <a:prstGeom prst="rect">
             <a:avLst/>
@@ -27597,11 +26938,11 @@
             <a:r>
               <a:rPr sz="3400" b="0" i="0">
                 <a:solidFill>
-                  <a:srgbClr val="D4D4D4"/>
-                </a:solidFill>
-                <a:latin typeface="Arial"/>
-              </a:rPr>
-              <a:t>... </a:t>
+                  <a:srgbClr val="FFFFFF"/>
+                </a:solidFill>
+                <a:latin typeface="Arial"/>
+              </a:rPr>
+              <a:t>... 4 steps ok</a:t>
             </a:r>
           </a:p>
         </p:txBody>
@@ -27614,7 +26955,7 @@
         </p:nvSpPr>
         <p:spPr>
           <a:xfrm>
-            <a:off x="937071" y="2874262"/>
+            <a:off x="457200" y="3392421"/>
             <a:ext cx="567115" cy="518159"/>
           </a:xfrm>
           <a:prstGeom prst="rect">
@@ -27632,11 +26973,11 @@
             <a:r>
               <a:rPr sz="3400" b="0" i="0">
                 <a:solidFill>
-                  <a:srgbClr val="B5CEA8"/>
-                </a:solidFill>
-                <a:latin typeface="Arial"/>
-              </a:rPr>
-              <a:t>4</a:t>
+                  <a:srgbClr val="569CD6"/>
+                </a:solidFill>
+                <a:latin typeface="Arial"/>
+              </a:rPr>
+              <a:t>$</a:t>
             </a:r>
           </a:p>
         </p:txBody>
@@ -27649,76 +26990,6 @@
         </p:nvSpPr>
         <p:spPr>
           <a:xfrm>
-            <a:off x="1177218" y="2874262"/>
-            <a:ext cx="2947748" cy="518159"/>
-          </a:xfrm>
-          <a:prstGeom prst="rect">
-            <a:avLst/>
-          </a:prstGeom>
-          <a:noFill/>
-        </p:spPr>
-        <p:txBody>
-          <a:bodyPr wrap="none" lIns="0" rIns="0">
-            <a:noAutofit/>
-          </a:bodyPr>
-          <a:lstStyle/>
-          <a:p>
-            <a:pPr algn="l"/>
-            <a:r>
-              <a:rPr sz="3400" b="0" i="0">
-                <a:solidFill>
-                  <a:srgbClr val="D4D4D4"/>
-                </a:solidFill>
-                <a:latin typeface="Arial"/>
-              </a:rPr>
-              <a:t> steps ok</a:t>
-            </a:r>
-          </a:p>
-        </p:txBody>
-      </p:sp>
-      <p:sp>
-        <p:nvSpPr>
-          <p:cNvPr id="13" name="TextBox 12"/>
-          <p:cNvSpPr txBox="1"/>
-          <p:nvPr/>
-        </p:nvSpPr>
-        <p:spPr>
-          <a:xfrm>
-            <a:off x="457200" y="3392421"/>
-            <a:ext cx="567115" cy="518159"/>
-          </a:xfrm>
-          <a:prstGeom prst="rect">
-            <a:avLst/>
-          </a:prstGeom>
-          <a:noFill/>
-        </p:spPr>
-        <p:txBody>
-          <a:bodyPr wrap="none" lIns="0" rIns="0">
-            <a:noAutofit/>
-          </a:bodyPr>
-          <a:lstStyle/>
-          <a:p>
-            <a:pPr algn="l"/>
-            <a:r>
-              <a:rPr sz="3400" b="0" i="0">
-                <a:solidFill>
-                  <a:srgbClr val="4EC9B0"/>
-                </a:solidFill>
-                <a:latin typeface="Arial"/>
-              </a:rPr>
-              <a:t>$</a:t>
-            </a:r>
-          </a:p>
-        </p:txBody>
-      </p:sp>
-      <p:sp>
-        <p:nvSpPr>
-          <p:cNvPr id="14" name="TextBox 13"/>
-          <p:cNvSpPr txBox="1"/>
-          <p:nvPr/>
-        </p:nvSpPr>
-        <p:spPr>
-          <a:xfrm>
             <a:off x="697347" y="3392421"/>
             <a:ext cx="6404848" cy="518159"/>
           </a:xfrm>
@@ -27737,7 +27008,7 @@
             <a:r>
               <a:rPr sz="3400" b="0" i="0">
                 <a:solidFill>
-                  <a:srgbClr val="D4D4D4"/>
+                  <a:srgbClr val="FFFFFF"/>
                 </a:solidFill>
                 <a:latin typeface="Arial"/>
               </a:rPr>
@@ -27748,7 +27019,7 @@
       </p:sp>
       <p:sp>
         <p:nvSpPr>
-          <p:cNvPr id="15" name="TextBox 14"/>
+          <p:cNvPr id="13" name="TextBox 12"/>
           <p:cNvSpPr/>
           <p:nvPr>
             <p:ph type="sldNum" idx="12"/>
@@ -27774,7 +27045,7 @@
             <a:fld id="{4B0E1F8A-6C1D-4E2A-9F3B-7A5C8D2E1F60}" type="slidenum">
               <a:rPr sz="1600" b="0" i="0">
                 <a:solidFill>
-                  <a:srgbClr val="5B6B82"/>
+                  <a:srgbClr val="0A2240"/>
                 </a:solidFill>
                 <a:latin typeface="Arial"/>
               </a:rPr>
@@ -28012,7 +27283,7 @@
             <a:fld id="{4B0E1F8A-6C1D-4E2A-9F3B-7A5C8D2E1F60}" type="slidenum">
               <a:rPr sz="1600" b="0" i="0">
                 <a:solidFill>
-                  <a:srgbClr val="5B6B82"/>
+                  <a:srgbClr val="0A2240"/>
                 </a:solidFill>
                 <a:latin typeface="Arial"/>
               </a:rPr>
@@ -28108,7 +27379,7 @@
             <a:r>
               <a:rPr sz="4200" b="1" i="0">
                 <a:solidFill>
-                  <a:srgbClr val="123A6B"/>
+                  <a:srgbClr val="0072CE"/>
                 </a:solidFill>
                 <a:latin typeface="Arial"/>
               </a:rPr>
@@ -28143,7 +27414,7 @@
             <a:r>
               <a:rPr sz="4200" b="1" i="0">
                 <a:solidFill>
-                  <a:srgbClr val="123A6B"/>
+                  <a:srgbClr val="0072CE"/>
                 </a:solidFill>
                 <a:latin typeface="Arial"/>
               </a:rPr>
@@ -28213,7 +27484,7 @@
             <a:r>
               <a:rPr sz="4200" b="1" i="0">
                 <a:solidFill>
-                  <a:srgbClr val="123A6B"/>
+                  <a:srgbClr val="0072CE"/>
                 </a:solidFill>
                 <a:latin typeface="Arial"/>
               </a:rPr>
@@ -28248,7 +27519,7 @@
             <a:r>
               <a:rPr sz="4200" b="1" i="0">
                 <a:solidFill>
-                  <a:srgbClr val="123A6B"/>
+                  <a:srgbClr val="0072CE"/>
                 </a:solidFill>
                 <a:latin typeface="Arial"/>
               </a:rPr>
@@ -28318,7 +27589,7 @@
             <a:r>
               <a:rPr sz="4200" b="1" i="0">
                 <a:solidFill>
-                  <a:srgbClr val="123A6B"/>
+                  <a:srgbClr val="0072CE"/>
                 </a:solidFill>
                 <a:latin typeface="Arial"/>
               </a:rPr>
@@ -28353,7 +27624,7 @@
             <a:r>
               <a:rPr sz="4200" b="1" i="0">
                 <a:solidFill>
-                  <a:srgbClr val="123A6B"/>
+                  <a:srgbClr val="0072CE"/>
                 </a:solidFill>
                 <a:latin typeface="Arial"/>
               </a:rPr>
@@ -28425,7 +27696,7 @@
             <a:fld id="{4B0E1F8A-6C1D-4E2A-9F3B-7A5C8D2E1F60}" type="slidenum">
               <a:rPr sz="1600" b="0" i="0">
                 <a:solidFill>
-                  <a:srgbClr val="5B6B82"/>
+                  <a:srgbClr val="0A2240"/>
                 </a:solidFill>
                 <a:latin typeface="Arial"/>
               </a:rPr>
@@ -29040,7 +28311,7 @@
             <a:fld id="{4B0E1F8A-6C1D-4E2A-9F3B-7A5C8D2E1F60}" type="slidenum">
               <a:rPr sz="1600" b="0" i="0">
                 <a:solidFill>
-                  <a:srgbClr val="5B6B82"/>
+                  <a:srgbClr val="0A2240"/>
                 </a:solidFill>
                 <a:latin typeface="Arial"/>
               </a:rPr>
@@ -29119,7 +28390,7 @@
         <p:spPr>
           <a:xfrm>
             <a:off x="457200" y="1499616"/>
-            <a:ext cx="3189961" cy="518159"/>
+            <a:ext cx="2413015" cy="518159"/>
           </a:xfrm>
           <a:prstGeom prst="rect">
             <a:avLst/>
@@ -29136,11 +28407,11 @@
             <a:r>
               <a:rPr sz="3400" b="1" i="0">
                 <a:solidFill>
-                  <a:srgbClr val="0A2240"/>
-                </a:solidFill>
-                <a:latin typeface="Arial"/>
-              </a:rPr>
-              <a:t>Only Ana</a:t>
+                  <a:srgbClr val="0072CE"/>
+                </a:solidFill>
+                <a:latin typeface="Arial"/>
+              </a:rPr>
+              <a:t>Smell</a:t>
             </a:r>
           </a:p>
         </p:txBody>
@@ -29153,43 +28424,8 @@
         </p:nvSpPr>
         <p:spPr>
           <a:xfrm>
-            <a:off x="457200" y="2154935"/>
-            <a:ext cx="2613660" cy="3605785"/>
-          </a:xfrm>
-          <a:prstGeom prst="rect">
-            <a:avLst/>
-          </a:prstGeom>
-          <a:noFill/>
-        </p:spPr>
-        <p:txBody>
-          <a:bodyPr wrap="square" lIns="0" rIns="0">
-            <a:noAutofit/>
-          </a:bodyPr>
-          <a:lstStyle/>
-          <a:p>
-            <a:pPr algn="l"/>
-            <a:r>
-              <a:rPr sz="3400" b="0" i="0">
-                <a:solidFill>
-                  <a:srgbClr val="0A2240"/>
-                </a:solidFill>
-                <a:latin typeface="Arial"/>
-              </a:rPr>
-              <a:t>One person can run it</a:t>
-            </a:r>
-          </a:p>
-        </p:txBody>
-      </p:sp>
-      <p:sp>
-        <p:nvSpPr>
-          <p:cNvPr id="5" name="TextBox 4"/>
-          <p:cNvSpPr txBox="1"/>
-          <p:nvPr/>
-        </p:nvSpPr>
-        <p:spPr>
-          <a:xfrm>
-            <a:off x="3345180" y="1499616"/>
-            <a:ext cx="3688892" cy="518159"/>
+            <a:off x="3418855" y="1499616"/>
+            <a:ext cx="5990967" cy="518159"/>
           </a:xfrm>
           <a:prstGeom prst="rect">
             <a:avLst/>
@@ -29206,12 +28442,56 @@
             <a:r>
               <a:rPr sz="3400" b="1" i="0">
                 <a:solidFill>
-                  <a:srgbClr val="0A2240"/>
-                </a:solidFill>
-                <a:latin typeface="Arial"/>
-              </a:rPr>
-              <a:t>Warm only</a:t>
-            </a:r>
+                  <a:srgbClr val="0072CE"/>
+                </a:solidFill>
+                <a:latin typeface="Arial"/>
+              </a:rPr>
+              <a:t>What it means</a:t>
+            </a:r>
+          </a:p>
+        </p:txBody>
+      </p:sp>
+      <p:sp>
+        <p:nvSpPr>
+          <p:cNvPr id="5" name="Rectangle 4"/>
+          <p:cNvSpPr/>
+          <p:nvPr/>
+        </p:nvSpPr>
+        <p:spPr>
+          <a:xfrm>
+            <a:off x="457200" y="2072639"/>
+            <a:ext cx="8952622" cy="54864"/>
+          </a:xfrm>
+          <a:prstGeom prst="rect">
+            <a:avLst/>
+          </a:prstGeom>
+          <a:solidFill>
+            <a:srgbClr val="0072CE"/>
+          </a:solidFill>
+          <a:ln>
+            <a:noFill/>
+          </a:ln>
+          <a:effectLst/>
+        </p:spPr>
+        <p:style>
+          <a:lnRef idx="1">
+            <a:schemeClr val="accent1"/>
+          </a:lnRef>
+          <a:fillRef idx="3">
+            <a:schemeClr val="accent1"/>
+          </a:fillRef>
+          <a:effectRef idx="2">
+            <a:schemeClr val="accent1"/>
+          </a:effectRef>
+          <a:fontRef idx="minor">
+            <a:schemeClr val="lt1"/>
+          </a:fontRef>
+        </p:style>
+        <p:txBody>
+          <a:bodyPr rtlCol="0" anchor="ctr"/>
+          <a:lstStyle/>
+          <a:p>
+            <a:pPr algn="ctr"/>
           </a:p>
         </p:txBody>
       </p:sp>
@@ -29223,16 +28503,16 @@
         </p:nvSpPr>
         <p:spPr>
           <a:xfrm>
-            <a:off x="3345180" y="2154935"/>
-            <a:ext cx="2613660" cy="3605785"/>
-          </a:xfrm>
-          <a:prstGeom prst="rect">
-            <a:avLst/>
-          </a:prstGeom>
-          <a:noFill/>
-        </p:spPr>
-        <p:txBody>
-          <a:bodyPr wrap="square" lIns="0" rIns="0">
+            <a:off x="457200" y="2401823"/>
+            <a:ext cx="2986544" cy="633984"/>
+          </a:xfrm>
+          <a:prstGeom prst="rect">
+            <a:avLst/>
+          </a:prstGeom>
+          <a:noFill/>
+        </p:spPr>
+        <p:txBody>
+          <a:bodyPr wrap="none" lIns="0" rIns="0">
             <a:noAutofit/>
           </a:bodyPr>
           <a:lstStyle/>
@@ -29245,7 +28525,7 @@
                 </a:solidFill>
                 <a:latin typeface="Arial"/>
               </a:rPr>
-              <a:t>Fails from a clean start</a:t>
+              <a:t>Only Ana</a:t>
             </a:r>
           </a:p>
         </p:txBody>
@@ -29258,29 +28538,29 @@
         </p:nvSpPr>
         <p:spPr>
           <a:xfrm>
-            <a:off x="6233160" y="1499616"/>
-            <a:ext cx="2754788" cy="518159"/>
-          </a:xfrm>
-          <a:prstGeom prst="rect">
-            <a:avLst/>
-          </a:prstGeom>
-          <a:noFill/>
-        </p:spPr>
-        <p:txBody>
-          <a:bodyPr wrap="none" lIns="0" rIns="0">
-            <a:noAutofit/>
-          </a:bodyPr>
-          <a:lstStyle/>
-          <a:p>
-            <a:pPr algn="l"/>
-            <a:r>
-              <a:rPr sz="3400" b="1" i="0">
+            <a:off x="3418855" y="2401823"/>
+            <a:ext cx="6826865" cy="633984"/>
+          </a:xfrm>
+          <a:prstGeom prst="rect">
+            <a:avLst/>
+          </a:prstGeom>
+          <a:noFill/>
+        </p:spPr>
+        <p:txBody>
+          <a:bodyPr wrap="none" lIns="0" rIns="0">
+            <a:noAutofit/>
+          </a:bodyPr>
+          <a:lstStyle/>
+          <a:p>
+            <a:pPr algn="l"/>
+            <a:r>
+              <a:rPr sz="3400" b="0" i="0">
                 <a:solidFill>
                   <a:srgbClr val="0A2240"/>
                 </a:solidFill>
                 <a:latin typeface="Arial"/>
               </a:rPr>
-              <a:t>In order</a:t>
+              <a:t>One person can run it</a:t>
             </a:r>
           </a:p>
         </p:txBody>
@@ -29293,16 +28573,16 @@
         </p:nvSpPr>
         <p:spPr>
           <a:xfrm>
-            <a:off x="6233160" y="2154935"/>
-            <a:ext cx="2613660" cy="3605785"/>
-          </a:xfrm>
-          <a:prstGeom prst="rect">
-            <a:avLst/>
-          </a:prstGeom>
-          <a:noFill/>
-        </p:spPr>
-        <p:txBody>
-          <a:bodyPr wrap="square" lIns="0" rIns="0">
+            <a:off x="457200" y="3310127"/>
+            <a:ext cx="3458488" cy="633984"/>
+          </a:xfrm>
+          <a:prstGeom prst="rect">
+            <a:avLst/>
+          </a:prstGeom>
+          <a:noFill/>
+        </p:spPr>
+        <p:txBody>
+          <a:bodyPr wrap="none" lIns="0" rIns="0">
             <a:noAutofit/>
           </a:bodyPr>
           <a:lstStyle/>
@@ -29315,7 +28595,7 @@
                 </a:solidFill>
                 <a:latin typeface="Arial"/>
               </a:rPr>
-              <a:t>You must know the sequence</a:t>
+              <a:t>Warm only</a:t>
             </a:r>
           </a:p>
         </p:txBody>
@@ -29328,29 +28608,29 @@
         </p:nvSpPr>
         <p:spPr>
           <a:xfrm>
-            <a:off x="9121140" y="1499616"/>
-            <a:ext cx="2946737" cy="518159"/>
-          </a:xfrm>
-          <a:prstGeom prst="rect">
-            <a:avLst/>
-          </a:prstGeom>
-          <a:noFill/>
-        </p:spPr>
-        <p:txBody>
-          <a:bodyPr wrap="none" lIns="0" rIns="0">
-            <a:noAutofit/>
-          </a:bodyPr>
-          <a:lstStyle/>
-          <a:p>
-            <a:pPr algn="l"/>
-            <a:r>
-              <a:rPr sz="3400" b="1" i="0">
+            <a:off x="3418855" y="3310127"/>
+            <a:ext cx="7170619" cy="633984"/>
+          </a:xfrm>
+          <a:prstGeom prst="rect">
+            <a:avLst/>
+          </a:prstGeom>
+          <a:noFill/>
+        </p:spPr>
+        <p:txBody>
+          <a:bodyPr wrap="none" lIns="0" rIns="0">
+            <a:noAutofit/>
+          </a:bodyPr>
+          <a:lstStyle/>
+          <a:p>
+            <a:pPr algn="l"/>
+            <a:r>
+              <a:rPr sz="3400" b="0" i="0">
                 <a:solidFill>
                   <a:srgbClr val="0A2240"/>
                 </a:solidFill>
                 <a:latin typeface="Arial"/>
               </a:rPr>
-              <a:t>One box</a:t>
+              <a:t>Fails from a clean start</a:t>
             </a:r>
           </a:p>
         </p:txBody>
@@ -29363,16 +28643,16 @@
         </p:nvSpPr>
         <p:spPr>
           <a:xfrm>
-            <a:off x="9121140" y="2154935"/>
-            <a:ext cx="2613660" cy="3605785"/>
-          </a:xfrm>
-          <a:prstGeom prst="rect">
-            <a:avLst/>
-          </a:prstGeom>
-          <a:noFill/>
-        </p:spPr>
-        <p:txBody>
-          <a:bodyPr wrap="square" lIns="0" rIns="0">
+            <a:off x="457200" y="4218431"/>
+            <a:ext cx="2563852" cy="633984"/>
+          </a:xfrm>
+          <a:prstGeom prst="rect">
+            <a:avLst/>
+          </a:prstGeom>
+          <a:noFill/>
+        </p:spPr>
+        <p:txBody>
+          <a:bodyPr wrap="none" lIns="0" rIns="0">
             <a:noAutofit/>
           </a:bodyPr>
           <a:lstStyle/>
@@ -29385,6 +28665,111 @@
                 </a:solidFill>
                 <a:latin typeface="Arial"/>
               </a:rPr>
+              <a:t>In order</a:t>
+            </a:r>
+          </a:p>
+        </p:txBody>
+      </p:sp>
+      <p:sp>
+        <p:nvSpPr>
+          <p:cNvPr id="11" name="TextBox 10"/>
+          <p:cNvSpPr txBox="1"/>
+          <p:nvPr/>
+        </p:nvSpPr>
+        <p:spPr>
+          <a:xfrm>
+            <a:off x="3418855" y="4218431"/>
+            <a:ext cx="8773145" cy="633984"/>
+          </a:xfrm>
+          <a:prstGeom prst="rect">
+            <a:avLst/>
+          </a:prstGeom>
+          <a:noFill/>
+        </p:spPr>
+        <p:txBody>
+          <a:bodyPr wrap="none" lIns="0" rIns="0">
+            <a:noAutofit/>
+          </a:bodyPr>
+          <a:lstStyle/>
+          <a:p>
+            <a:pPr algn="l"/>
+            <a:r>
+              <a:rPr sz="3400" b="0" i="0">
+                <a:solidFill>
+                  <a:srgbClr val="0A2240"/>
+                </a:solidFill>
+                <a:latin typeface="Arial"/>
+              </a:rPr>
+              <a:t>You must know the sequence</a:t>
+            </a:r>
+          </a:p>
+        </p:txBody>
+      </p:sp>
+      <p:sp>
+        <p:nvSpPr>
+          <p:cNvPr id="12" name="TextBox 11"/>
+          <p:cNvSpPr txBox="1"/>
+          <p:nvPr/>
+        </p:nvSpPr>
+        <p:spPr>
+          <a:xfrm>
+            <a:off x="457200" y="5126735"/>
+            <a:ext cx="2794595" cy="633984"/>
+          </a:xfrm>
+          <a:prstGeom prst="rect">
+            <a:avLst/>
+          </a:prstGeom>
+          <a:noFill/>
+        </p:spPr>
+        <p:txBody>
+          <a:bodyPr wrap="none" lIns="0" rIns="0">
+            <a:noAutofit/>
+          </a:bodyPr>
+          <a:lstStyle/>
+          <a:p>
+            <a:pPr algn="l"/>
+            <a:r>
+              <a:rPr sz="3400" b="0" i="0">
+                <a:solidFill>
+                  <a:srgbClr val="0A2240"/>
+                </a:solidFill>
+                <a:latin typeface="Arial"/>
+              </a:rPr>
+              <a:t>One box</a:t>
+            </a:r>
+          </a:p>
+        </p:txBody>
+      </p:sp>
+      <p:sp>
+        <p:nvSpPr>
+          <p:cNvPr id="13" name="TextBox 12"/>
+          <p:cNvSpPr txBox="1"/>
+          <p:nvPr/>
+        </p:nvSpPr>
+        <p:spPr>
+          <a:xfrm>
+            <a:off x="3418855" y="5126735"/>
+            <a:ext cx="7672585" cy="633984"/>
+          </a:xfrm>
+          <a:prstGeom prst="rect">
+            <a:avLst/>
+          </a:prstGeom>
+          <a:noFill/>
+        </p:spPr>
+        <p:txBody>
+          <a:bodyPr wrap="none" lIns="0" rIns="0">
+            <a:noAutofit/>
+          </a:bodyPr>
+          <a:lstStyle/>
+          <a:p>
+            <a:pPr algn="l"/>
+            <a:r>
+              <a:rPr sz="3400" b="0" i="0">
+                <a:solidFill>
+                  <a:srgbClr val="0A2240"/>
+                </a:solidFill>
+                <a:latin typeface="Arial"/>
+              </a:rPr>
               <a:t>A step still done by hand</a:t>
             </a:r>
           </a:p>
@@ -29392,7 +28777,7 @@
       </p:sp>
       <p:sp>
         <p:nvSpPr>
-          <p:cNvPr id="11" name="TextBox 10"/>
+          <p:cNvPr id="14" name="TextBox 13"/>
           <p:cNvSpPr/>
           <p:nvPr>
             <p:ph type="sldNum" idx="12"/>
@@ -29418,7 +28803,7 @@
             <a:fld id="{4B0E1F8A-6C1D-4E2A-9F3B-7A5C8D2E1F60}" type="slidenum">
               <a:rPr sz="1600" b="0" i="0">
                 <a:solidFill>
-                  <a:srgbClr val="5B6B82"/>
+                  <a:srgbClr val="0A2240"/>
                 </a:solidFill>
                 <a:latin typeface="Arial"/>
               </a:rPr>
@@ -29514,7 +28899,7 @@
             <a:r>
               <a:rPr sz="4200" b="1" i="0">
                 <a:solidFill>
-                  <a:srgbClr val="123A6B"/>
+                  <a:srgbClr val="0072CE"/>
                 </a:solidFill>
                 <a:latin typeface="Arial"/>
               </a:rPr>
@@ -29549,7 +28934,7 @@
             <a:r>
               <a:rPr sz="4200" b="1" i="0">
                 <a:solidFill>
-                  <a:srgbClr val="123A6B"/>
+                  <a:srgbClr val="0072CE"/>
                 </a:solidFill>
                 <a:latin typeface="Arial"/>
               </a:rPr>
@@ -29619,7 +29004,7 @@
             <a:r>
               <a:rPr sz="4200" b="1" i="0">
                 <a:solidFill>
-                  <a:srgbClr val="123A6B"/>
+                  <a:srgbClr val="0072CE"/>
                 </a:solidFill>
                 <a:latin typeface="Arial"/>
               </a:rPr>
@@ -29654,7 +29039,7 @@
             <a:r>
               <a:rPr sz="4200" b="1" i="0">
                 <a:solidFill>
-                  <a:srgbClr val="123A6B"/>
+                  <a:srgbClr val="0072CE"/>
                 </a:solidFill>
                 <a:latin typeface="Arial"/>
               </a:rPr>
@@ -29724,7 +29109,7 @@
             <a:r>
               <a:rPr sz="4200" b="1" i="0">
                 <a:solidFill>
-                  <a:srgbClr val="123A6B"/>
+                  <a:srgbClr val="0072CE"/>
                 </a:solidFill>
                 <a:latin typeface="Arial"/>
               </a:rPr>
@@ -29759,7 +29144,7 @@
             <a:r>
               <a:rPr sz="4200" b="1" i="0">
                 <a:solidFill>
-                  <a:srgbClr val="123A6B"/>
+                  <a:srgbClr val="0072CE"/>
                 </a:solidFill>
                 <a:latin typeface="Arial"/>
               </a:rPr>
@@ -29831,7 +29216,7 @@
             <a:fld id="{4B0E1F8A-6C1D-4E2A-9F3B-7A5C8D2E1F60}" type="slidenum">
               <a:rPr sz="1600" b="0" i="0">
                 <a:solidFill>
-                  <a:srgbClr val="5B6B82"/>
+                  <a:srgbClr val="0A2240"/>
                 </a:solidFill>
                 <a:latin typeface="Arial"/>
               </a:rPr>
@@ -30069,7 +29454,7 @@
             <a:fld id="{4B0E1F8A-6C1D-4E2A-9F3B-7A5C8D2E1F60}" type="slidenum">
               <a:rPr sz="1600" b="0" i="0">
                 <a:solidFill>
-                  <a:srgbClr val="5B6B82"/>
+                  <a:srgbClr val="0A2240"/>
                 </a:solidFill>
                 <a:latin typeface="Arial"/>
               </a:rPr>
@@ -30209,7 +29594,7 @@
             <a:r>
               <a:rPr sz="3400" b="0" i="0">
                 <a:solidFill>
-                  <a:srgbClr val="5B6B82"/>
+                  <a:srgbClr val="0A2240"/>
                 </a:solidFill>
                 <a:latin typeface="Arial"/>
               </a:rPr>
@@ -30246,7 +29631,7 @@
             <a:fld id="{4B0E1F8A-6C1D-4E2A-9F3B-7A5C8D2E1F60}" type="slidenum">
               <a:rPr sz="1600" b="0" i="0">
                 <a:solidFill>
-                  <a:srgbClr val="5B6B82"/>
+                  <a:srgbClr val="0A2240"/>
                 </a:solidFill>
                 <a:latin typeface="Arial"/>
               </a:rPr>
@@ -30388,7 +29773,7 @@
             <a:fld id="{4B0E1F8A-6C1D-4E2A-9F3B-7A5C8D2E1F60}" type="slidenum">
               <a:rPr sz="1600" b="0" i="0">
                 <a:solidFill>
-                  <a:srgbClr val="5B6B82"/>
+                  <a:srgbClr val="0A2240"/>
                 </a:solidFill>
                 <a:latin typeface="Arial"/>
               </a:rPr>
@@ -30565,7 +29950,7 @@
             <a:fld id="{4B0E1F8A-6C1D-4E2A-9F3B-7A5C8D2E1F60}" type="slidenum">
               <a:rPr sz="1600" b="0" i="0">
                 <a:solidFill>
-                  <a:srgbClr val="5B6B82"/>
+                  <a:srgbClr val="0A2240"/>
                 </a:solidFill>
                 <a:latin typeface="Arial"/>
               </a:rPr>
@@ -30742,7 +30127,7 @@
             <a:fld id="{4B0E1F8A-6C1D-4E2A-9F3B-7A5C8D2E1F60}" type="slidenum">
               <a:rPr sz="1600" b="0" i="0">
                 <a:solidFill>
-                  <a:srgbClr val="5B6B82"/>
+                  <a:srgbClr val="0A2240"/>
                 </a:solidFill>
                 <a:latin typeface="Arial"/>
               </a:rPr>
@@ -30980,7 +30365,7 @@
             <a:fld id="{4B0E1F8A-6C1D-4E2A-9F3B-7A5C8D2E1F60}" type="slidenum">
               <a:rPr sz="1600" b="0" i="0">
                 <a:solidFill>
-                  <a:srgbClr val="5B6B82"/>
+                  <a:srgbClr val="0A2240"/>
                 </a:solidFill>
                 <a:latin typeface="Arial"/>
               </a:rPr>
@@ -31076,7 +30461,7 @@
             <a:r>
               <a:rPr sz="4200" b="1" i="0">
                 <a:solidFill>
-                  <a:srgbClr val="123A6B"/>
+                  <a:srgbClr val="0072CE"/>
                 </a:solidFill>
                 <a:latin typeface="Arial"/>
               </a:rPr>
@@ -31111,7 +30496,7 @@
             <a:r>
               <a:rPr sz="4200" b="1" i="0">
                 <a:solidFill>
-                  <a:srgbClr val="123A6B"/>
+                  <a:srgbClr val="0072CE"/>
                 </a:solidFill>
                 <a:latin typeface="Arial"/>
               </a:rPr>
@@ -31181,7 +30566,7 @@
             <a:r>
               <a:rPr sz="4200" b="1" i="0">
                 <a:solidFill>
-                  <a:srgbClr val="123A6B"/>
+                  <a:srgbClr val="0072CE"/>
                 </a:solidFill>
                 <a:latin typeface="Arial"/>
               </a:rPr>
@@ -31216,7 +30601,7 @@
             <a:r>
               <a:rPr sz="4200" b="1" i="0">
                 <a:solidFill>
-                  <a:srgbClr val="123A6B"/>
+                  <a:srgbClr val="0072CE"/>
                 </a:solidFill>
                 <a:latin typeface="Arial"/>
               </a:rPr>
@@ -31286,7 +30671,7 @@
             <a:r>
               <a:rPr sz="4200" b="1" i="0">
                 <a:solidFill>
-                  <a:srgbClr val="123A6B"/>
+                  <a:srgbClr val="0072CE"/>
                 </a:solidFill>
                 <a:latin typeface="Arial"/>
               </a:rPr>
@@ -31321,7 +30706,7 @@
             <a:r>
               <a:rPr sz="4200" b="1" i="0">
                 <a:solidFill>
-                  <a:srgbClr val="123A6B"/>
+                  <a:srgbClr val="0072CE"/>
                 </a:solidFill>
                 <a:latin typeface="Arial"/>
               </a:rPr>
@@ -31393,7 +30778,7 @@
             <a:fld id="{4B0E1F8A-6C1D-4E2A-9F3B-7A5C8D2E1F60}" type="slidenum">
               <a:rPr sz="1600" b="0" i="0">
                 <a:solidFill>
-                  <a:srgbClr val="5B6B82"/>
+                  <a:srgbClr val="0A2240"/>
                 </a:solidFill>
                 <a:latin typeface="Arial"/>
               </a:rPr>
@@ -31443,7 +30828,7 @@
             <a:avLst/>
           </a:prstGeom>
           <a:solidFill>
-            <a:srgbClr val="FF5F56"/>
+            <a:srgbClr val="FFFFFF"/>
           </a:solidFill>
           <a:ln>
             <a:noFill/>
@@ -31487,7 +30872,7 @@
             <a:avLst/>
           </a:prstGeom>
           <a:solidFill>
-            <a:srgbClr val="FFBD2E"/>
+            <a:srgbClr val="FFFFFF"/>
           </a:solidFill>
           <a:ln>
             <a:noFill/>
@@ -31531,7 +30916,7 @@
             <a:avLst/>
           </a:prstGeom>
           <a:solidFill>
-            <a:srgbClr val="27C93F"/>
+            <a:srgbClr val="FFFFFF"/>
           </a:solidFill>
           <a:ln>
             <a:noFill/>
@@ -31586,7 +30971,7 @@
             <a:r>
               <a:rPr sz="4200" b="0" i="0">
                 <a:solidFill>
-                  <a:srgbClr val="D4D4D4"/>
+                  <a:srgbClr val="FFFFFF"/>
                 </a:solidFill>
                 <a:latin typeface="Arial"/>
               </a:rPr>
@@ -31621,7 +31006,7 @@
             <a:r>
               <a:rPr sz="3400" b="0" i="0">
                 <a:solidFill>
-                  <a:srgbClr val="4EC9B0"/>
+                  <a:srgbClr val="569CD6"/>
                 </a:solidFill>
                 <a:latin typeface="Arial"/>
               </a:rPr>
@@ -31656,7 +31041,7 @@
             <a:r>
               <a:rPr sz="3400" b="0" i="0">
                 <a:solidFill>
-                  <a:srgbClr val="D4D4D4"/>
+                  <a:srgbClr val="FFFFFF"/>
                 </a:solidFill>
                 <a:latin typeface="Arial"/>
               </a:rPr>
@@ -31691,7 +31076,7 @@
             <a:r>
               <a:rPr sz="3400" b="0" i="0">
                 <a:solidFill>
-                  <a:srgbClr val="4EC9B0"/>
+                  <a:srgbClr val="569CD6"/>
                 </a:solidFill>
                 <a:latin typeface="Arial"/>
               </a:rPr>
@@ -31726,7 +31111,7 @@
             <a:r>
               <a:rPr sz="3400" b="0" i="0">
                 <a:solidFill>
-                  <a:srgbClr val="D4D4D4"/>
+                  <a:srgbClr val="FFFFFF"/>
                 </a:solidFill>
                 <a:latin typeface="Arial"/>
               </a:rPr>
@@ -31761,7 +31146,7 @@
             <a:r>
               <a:rPr sz="3400" b="0" i="0">
                 <a:solidFill>
-                  <a:srgbClr val="4EC9B0"/>
+                  <a:srgbClr val="569CD6"/>
                 </a:solidFill>
                 <a:latin typeface="Arial"/>
               </a:rPr>
@@ -31796,7 +31181,7 @@
             <a:r>
               <a:rPr sz="3400" b="0" i="0">
                 <a:solidFill>
-                  <a:srgbClr val="D4D4D4"/>
+                  <a:srgbClr val="FFFFFF"/>
                 </a:solidFill>
                 <a:latin typeface="Arial"/>
               </a:rPr>
@@ -31831,7 +31216,7 @@
             <a:r>
               <a:rPr sz="3400" b="0" i="0">
                 <a:solidFill>
-                  <a:srgbClr val="4EC9B0"/>
+                  <a:srgbClr val="569CD6"/>
                 </a:solidFill>
                 <a:latin typeface="Arial"/>
               </a:rPr>
@@ -31866,7 +31251,7 @@
             <a:r>
               <a:rPr sz="3400" b="0" i="0">
                 <a:solidFill>
-                  <a:srgbClr val="D4D4D4"/>
+                  <a:srgbClr val="FFFFFF"/>
                 </a:solidFill>
                 <a:latin typeface="Arial"/>
               </a:rPr>
@@ -31903,7 +31288,7 @@
             <a:fld id="{4B0E1F8A-6C1D-4E2A-9F3B-7A5C8D2E1F60}" type="slidenum">
               <a:rPr sz="1600" b="0" i="0">
                 <a:solidFill>
-                  <a:srgbClr val="5B6B82"/>
+                  <a:srgbClr val="0A2240"/>
                 </a:solidFill>
                 <a:latin typeface="Arial"/>
               </a:rPr>
@@ -31990,7 +31375,7 @@
             </a:avLst>
           </a:prstGeom>
           <a:solidFill>
-            <a:srgbClr val="0C1A1C"/>
+            <a:srgbClr val="0A2240"/>
           </a:solidFill>
           <a:ln>
             <a:noFill/>
@@ -32045,7 +31430,7 @@
             <a:r>
               <a:rPr sz="2600" b="1" i="0">
                 <a:solidFill>
-                  <a:srgbClr val="569CD6"/>
+                  <a:srgbClr val="0072CE"/>
                 </a:solidFill>
                 <a:latin typeface="Courier New"/>
               </a:rPr>
@@ -32080,7 +31465,7 @@
             <a:r>
               <a:rPr sz="2600" b="0" i="0">
                 <a:solidFill>
-                  <a:srgbClr val="55707A"/>
+                  <a:srgbClr val="0072CE"/>
                 </a:solidFill>
                 <a:latin typeface="Courier New"/>
               </a:rPr>
@@ -32115,7 +31500,7 @@
             <a:r>
               <a:rPr sz="2600" b="1" i="0">
                 <a:solidFill>
-                  <a:srgbClr val="569CD6"/>
+                  <a:srgbClr val="0072CE"/>
                 </a:solidFill>
                 <a:latin typeface="Courier New"/>
               </a:rPr>
@@ -32150,7 +31535,7 @@
             <a:r>
               <a:rPr sz="2600" b="0" i="0">
                 <a:solidFill>
-                  <a:srgbClr val="55707A"/>
+                  <a:srgbClr val="0072CE"/>
                 </a:solidFill>
                 <a:latin typeface="Courier New"/>
               </a:rPr>
@@ -32185,7 +31570,7 @@
             <a:r>
               <a:rPr sz="2600" b="0" i="0">
                 <a:solidFill>
-                  <a:srgbClr val="D4D4D4"/>
+                  <a:srgbClr val="FFFFFF"/>
                 </a:solidFill>
                 <a:latin typeface="Courier New"/>
               </a:rPr>
@@ -32220,7 +31605,7 @@
             <a:r>
               <a:rPr sz="2600" b="0" i="0">
                 <a:solidFill>
-                  <a:srgbClr val="55707A"/>
+                  <a:srgbClr val="0072CE"/>
                 </a:solidFill>
                 <a:latin typeface="Courier New"/>
               </a:rPr>
@@ -32255,7 +31640,7 @@
             <a:r>
               <a:rPr sz="2600" b="1" i="0">
                 <a:solidFill>
-                  <a:srgbClr val="569CD6"/>
+                  <a:srgbClr val="0072CE"/>
                 </a:solidFill>
                 <a:latin typeface="Courier New"/>
               </a:rPr>
@@ -32290,7 +31675,7 @@
             <a:r>
               <a:rPr sz="2600" b="0" i="0">
                 <a:solidFill>
-                  <a:srgbClr val="55707A"/>
+                  <a:srgbClr val="0072CE"/>
                 </a:solidFill>
                 <a:latin typeface="Courier New"/>
               </a:rPr>
@@ -32325,7 +31710,7 @@
             <a:r>
               <a:rPr sz="2600" b="0" i="0">
                 <a:solidFill>
-                  <a:srgbClr val="D4D4D4"/>
+                  <a:srgbClr val="FFFFFF"/>
                 </a:solidFill>
                 <a:latin typeface="Courier New"/>
               </a:rPr>
@@ -32360,7 +31745,7 @@
             <a:r>
               <a:rPr sz="2600" b="0" i="0">
                 <a:solidFill>
-                  <a:srgbClr val="55707A"/>
+                  <a:srgbClr val="0072CE"/>
                 </a:solidFill>
                 <a:latin typeface="Courier New"/>
               </a:rPr>
@@ -32395,7 +31780,7 @@
             <a:r>
               <a:rPr sz="2600" b="0" i="0">
                 <a:solidFill>
-                  <a:srgbClr val="D4D4D4"/>
+                  <a:srgbClr val="FFFFFF"/>
                 </a:solidFill>
                 <a:latin typeface="Courier New"/>
               </a:rPr>
@@ -32430,7 +31815,7 @@
             <a:r>
               <a:rPr sz="2600" b="0" i="0">
                 <a:solidFill>
-                  <a:srgbClr val="55707A"/>
+                  <a:srgbClr val="0072CE"/>
                 </a:solidFill>
                 <a:latin typeface="Courier New"/>
               </a:rPr>
@@ -32465,7 +31850,7 @@
             <a:r>
               <a:rPr sz="2600" b="0" i="0">
                 <a:solidFill>
-                  <a:srgbClr val="D4D4D4"/>
+                  <a:srgbClr val="FFFFFF"/>
                 </a:solidFill>
                 <a:latin typeface="Courier New"/>
               </a:rPr>
@@ -32500,7 +31885,7 @@
             <a:r>
               <a:rPr sz="2600" b="0" i="0">
                 <a:solidFill>
-                  <a:srgbClr val="55707A"/>
+                  <a:srgbClr val="0072CE"/>
                 </a:solidFill>
                 <a:latin typeface="Courier New"/>
               </a:rPr>
@@ -32535,7 +31920,7 @@
             <a:r>
               <a:rPr sz="2600" b="0" i="0">
                 <a:solidFill>
-                  <a:srgbClr val="D4D4D4"/>
+                  <a:srgbClr val="FFFFFF"/>
                 </a:solidFill>
                 <a:latin typeface="Courier New"/>
               </a:rPr>
@@ -32572,7 +31957,7 @@
             <a:fld id="{4B0E1F8A-6C1D-4E2A-9F3B-7A5C8D2E1F60}" type="slidenum">
               <a:rPr sz="1600" b="0" i="0">
                 <a:solidFill>
-                  <a:srgbClr val="5B6B82"/>
+                  <a:srgbClr val="0A2240"/>
                 </a:solidFill>
                 <a:latin typeface="Arial"/>
               </a:rPr>
@@ -32810,7 +32195,7 @@
             <a:fld id="{4B0E1F8A-6C1D-4E2A-9F3B-7A5C8D2E1F60}" type="slidenum">
               <a:rPr sz="1600" b="0" i="0">
                 <a:solidFill>
-                  <a:srgbClr val="5B6B82"/>
+                  <a:srgbClr val="0A2240"/>
                 </a:solidFill>
                 <a:latin typeface="Arial"/>
               </a:rPr>
@@ -32906,7 +32291,7 @@
             <a:r>
               <a:rPr sz="3400" b="1" i="0">
                 <a:solidFill>
-                  <a:srgbClr val="5B6B82"/>
+                  <a:srgbClr val="0A2240"/>
                 </a:solidFill>
                 <a:latin typeface="Arial"/>
               </a:rPr>
@@ -32923,14 +32308,14 @@
         </p:nvSpPr>
         <p:spPr>
           <a:xfrm>
-            <a:off x="548640" y="2176271"/>
-            <a:ext cx="1650492" cy="54864"/>
+            <a:off x="457200" y="2176271"/>
+            <a:ext cx="3814514" cy="54864"/>
           </a:xfrm>
           <a:prstGeom prst="rect">
             <a:avLst/>
           </a:prstGeom>
           <a:solidFill>
-            <a:srgbClr val="5B6B82"/>
+            <a:srgbClr val="0A2240"/>
           </a:solidFill>
           <a:ln>
             <a:noFill/>
@@ -33002,8 +32387,8 @@
         </p:nvSpPr>
         <p:spPr>
           <a:xfrm>
-            <a:off x="6324600" y="2176271"/>
-            <a:ext cx="1650492" cy="54864"/>
+            <a:off x="6233160" y="2176271"/>
+            <a:ext cx="3454400" cy="54864"/>
           </a:xfrm>
           <a:prstGeom prst="rect">
             <a:avLst/>
@@ -33276,7 +32661,7 @@
             <a:fld id="{4B0E1F8A-6C1D-4E2A-9F3B-7A5C8D2E1F60}" type="slidenum">
               <a:rPr sz="1600" b="0" i="0">
                 <a:solidFill>
-                  <a:srgbClr val="5B6B82"/>
+                  <a:srgbClr val="0A2240"/>
                 </a:solidFill>
                 <a:latin typeface="Arial"/>
               </a:rPr>
@@ -33584,7 +32969,7 @@
             <a:fld id="{4B0E1F8A-6C1D-4E2A-9F3B-7A5C8D2E1F60}" type="slidenum">
               <a:rPr sz="1600" b="0" i="0">
                 <a:solidFill>
-                  <a:srgbClr val="5B6B82"/>
+                  <a:srgbClr val="0A2240"/>
                 </a:solidFill>
                 <a:latin typeface="Arial"/>
               </a:rPr>
@@ -33822,7 +33207,7 @@
             <a:fld id="{4B0E1F8A-6C1D-4E2A-9F3B-7A5C8D2E1F60}" type="slidenum">
               <a:rPr sz="1600" b="0" i="0">
                 <a:solidFill>
-                  <a:srgbClr val="5B6B82"/>
+                  <a:srgbClr val="0A2240"/>
                 </a:solidFill>
                 <a:latin typeface="Arial"/>
               </a:rPr>
@@ -34058,7 +33443,7 @@
             <a:r>
               <a:rPr sz="4200" b="1" i="0">
                 <a:solidFill>
-                  <a:srgbClr val="5B6B82"/>
+                  <a:srgbClr val="0A2240"/>
                 </a:solidFill>
                 <a:latin typeface="Arial"/>
               </a:rPr>
@@ -34095,7 +33480,7 @@
             <a:fld id="{4B0E1F8A-6C1D-4E2A-9F3B-7A5C8D2E1F60}" type="slidenum">
               <a:rPr sz="1600" b="0" i="0">
                 <a:solidFill>
-                  <a:srgbClr val="5B6B82"/>
+                  <a:srgbClr val="0A2240"/>
                 </a:solidFill>
                 <a:latin typeface="Arial"/>
               </a:rPr>
@@ -34191,7 +33576,7 @@
             <a:r>
               <a:rPr sz="3400" b="1" i="0">
                 <a:solidFill>
-                  <a:srgbClr val="123A6B"/>
+                  <a:srgbClr val="0072CE"/>
                 </a:solidFill>
                 <a:latin typeface="Arial"/>
               </a:rPr>
@@ -34226,7 +33611,7 @@
             <a:r>
               <a:rPr sz="3400" b="1" i="0">
                 <a:solidFill>
-                  <a:srgbClr val="123A6B"/>
+                  <a:srgbClr val="0072CE"/>
                 </a:solidFill>
                 <a:latin typeface="Arial"/>
               </a:rPr>
@@ -34587,7 +33972,7 @@
             <a:fld id="{4B0E1F8A-6C1D-4E2A-9F3B-7A5C8D2E1F60}" type="slidenum">
               <a:rPr sz="1600" b="0" i="0">
                 <a:solidFill>
-                  <a:srgbClr val="5B6B82"/>
+                  <a:srgbClr val="0A2240"/>
                 </a:solidFill>
                 <a:latin typeface="Arial"/>
               </a:rPr>
@@ -34825,7 +34210,7 @@
             <a:fld id="{4B0E1F8A-6C1D-4E2A-9F3B-7A5C8D2E1F60}" type="slidenum">
               <a:rPr sz="1600" b="0" i="0">
                 <a:solidFill>
-                  <a:srgbClr val="5B6B82"/>
+                  <a:srgbClr val="0A2240"/>
                 </a:solidFill>
                 <a:latin typeface="Arial"/>
               </a:rPr>
@@ -34967,7 +34352,7 @@
             <a:fld id="{4B0E1F8A-6C1D-4E2A-9F3B-7A5C8D2E1F60}" type="slidenum">
               <a:rPr sz="1600" b="0" i="0">
                 <a:solidFill>
-                  <a:srgbClr val="5B6B82"/>
+                  <a:srgbClr val="0A2240"/>
                 </a:solidFill>
                 <a:latin typeface="Arial"/>
               </a:rPr>
@@ -35205,7 +34590,7 @@
             <a:fld id="{4B0E1F8A-6C1D-4E2A-9F3B-7A5C8D2E1F60}" type="slidenum">
               <a:rPr sz="1600" b="0" i="0">
                 <a:solidFill>
-                  <a:srgbClr val="5B6B82"/>
+                  <a:srgbClr val="0A2240"/>
                 </a:solidFill>
                 <a:latin typeface="Arial"/>
               </a:rPr>
@@ -35301,7 +34686,7 @@
             <a:r>
               <a:rPr sz="4200" b="1" i="0">
                 <a:solidFill>
-                  <a:srgbClr val="123A6B"/>
+                  <a:srgbClr val="0072CE"/>
                 </a:solidFill>
                 <a:latin typeface="Arial"/>
               </a:rPr>
@@ -35319,13 +34704,13 @@
         <p:spPr>
           <a:xfrm>
             <a:off x="457200" y="2194560"/>
-            <a:ext cx="784098" cy="54864"/>
+            <a:ext cx="593303" cy="54864"/>
           </a:xfrm>
           <a:prstGeom prst="rect">
             <a:avLst/>
           </a:prstGeom>
           <a:solidFill>
-            <a:srgbClr val="123A6B"/>
+            <a:srgbClr val="0072CE"/>
           </a:solidFill>
           <a:ln>
             <a:noFill/>
@@ -35380,7 +34765,7 @@
             <a:r>
               <a:rPr sz="3400" b="1" i="0">
                 <a:solidFill>
-                  <a:srgbClr val="123A6B"/>
+                  <a:srgbClr val="0072CE"/>
                 </a:solidFill>
                 <a:latin typeface="Arial"/>
               </a:rPr>
@@ -35450,7 +34835,7 @@
             <a:r>
               <a:rPr sz="4200" b="1" i="0">
                 <a:solidFill>
-                  <a:srgbClr val="123A6B"/>
+                  <a:srgbClr val="0072CE"/>
                 </a:solidFill>
                 <a:latin typeface="Arial"/>
               </a:rPr>
@@ -35468,13 +34853,13 @@
         <p:spPr>
           <a:xfrm>
             <a:off x="3345180" y="2194560"/>
-            <a:ext cx="784098" cy="54864"/>
+            <a:ext cx="593303" cy="54864"/>
           </a:xfrm>
           <a:prstGeom prst="rect">
             <a:avLst/>
           </a:prstGeom>
           <a:solidFill>
-            <a:srgbClr val="123A6B"/>
+            <a:srgbClr val="0072CE"/>
           </a:solidFill>
           <a:ln>
             <a:noFill/>
@@ -35529,7 +34914,7 @@
             <a:r>
               <a:rPr sz="3400" b="1" i="0">
                 <a:solidFill>
-                  <a:srgbClr val="123A6B"/>
+                  <a:srgbClr val="0072CE"/>
                 </a:solidFill>
                 <a:latin typeface="Arial"/>
               </a:rPr>
@@ -35599,7 +34984,7 @@
             <a:r>
               <a:rPr sz="4200" b="1" i="0">
                 <a:solidFill>
-                  <a:srgbClr val="123A6B"/>
+                  <a:srgbClr val="0072CE"/>
                 </a:solidFill>
                 <a:latin typeface="Arial"/>
               </a:rPr>
@@ -35617,13 +35002,13 @@
         <p:spPr>
           <a:xfrm>
             <a:off x="6233160" y="2194560"/>
-            <a:ext cx="784098" cy="54864"/>
+            <a:ext cx="593303" cy="54864"/>
           </a:xfrm>
           <a:prstGeom prst="rect">
             <a:avLst/>
           </a:prstGeom>
           <a:solidFill>
-            <a:srgbClr val="123A6B"/>
+            <a:srgbClr val="0072CE"/>
           </a:solidFill>
           <a:ln>
             <a:noFill/>
@@ -35678,7 +35063,7 @@
             <a:r>
               <a:rPr sz="3400" b="1" i="0">
                 <a:solidFill>
-                  <a:srgbClr val="123A6B"/>
+                  <a:srgbClr val="0072CE"/>
                 </a:solidFill>
                 <a:latin typeface="Arial"/>
               </a:rPr>
@@ -35748,7 +35133,7 @@
             <a:r>
               <a:rPr sz="4200" b="1" i="0">
                 <a:solidFill>
-                  <a:srgbClr val="123A6B"/>
+                  <a:srgbClr val="0072CE"/>
                 </a:solidFill>
                 <a:latin typeface="Arial"/>
               </a:rPr>
@@ -35766,13 +35151,13 @@
         <p:spPr>
           <a:xfrm>
             <a:off x="9121140" y="2194560"/>
-            <a:ext cx="784098" cy="54864"/>
+            <a:ext cx="593303" cy="54864"/>
           </a:xfrm>
           <a:prstGeom prst="rect">
             <a:avLst/>
           </a:prstGeom>
           <a:solidFill>
-            <a:srgbClr val="123A6B"/>
+            <a:srgbClr val="0072CE"/>
           </a:solidFill>
           <a:ln>
             <a:noFill/>
@@ -35827,7 +35212,7 @@
             <a:r>
               <a:rPr sz="3400" b="1" i="0">
                 <a:solidFill>
-                  <a:srgbClr val="123A6B"/>
+                  <a:srgbClr val="0072CE"/>
                 </a:solidFill>
                 <a:latin typeface="Arial"/>
               </a:rPr>
@@ -35899,7 +35284,7 @@
             <a:fld id="{4B0E1F8A-6C1D-4E2A-9F3B-7A5C8D2E1F60}" type="slidenum">
               <a:rPr sz="1600" b="0" i="0">
                 <a:solidFill>
-                  <a:srgbClr val="5B6B82"/>
+                  <a:srgbClr val="0A2240"/>
                 </a:solidFill>
                 <a:latin typeface="Arial"/>
               </a:rPr>
@@ -36417,7 +35802,7 @@
             <a:fld id="{4B0E1F8A-6C1D-4E2A-9F3B-7A5C8D2E1F60}" type="slidenum">
               <a:rPr sz="1600" b="0" i="0">
                 <a:solidFill>
-                  <a:srgbClr val="5B6B82"/>
+                  <a:srgbClr val="0A2240"/>
                 </a:solidFill>
                 <a:latin typeface="Arial"/>
               </a:rPr>
@@ -36557,7 +35942,7 @@
             <a:r>
               <a:rPr sz="3400" b="0" i="0">
                 <a:solidFill>
-                  <a:srgbClr val="5B6B82"/>
+                  <a:srgbClr val="0A2240"/>
                 </a:solidFill>
                 <a:latin typeface="Arial"/>
               </a:rPr>
@@ -36594,7 +35979,7 @@
             <a:fld id="{4B0E1F8A-6C1D-4E2A-9F3B-7A5C8D2E1F60}" type="slidenum">
               <a:rPr sz="1600" b="0" i="0">
                 <a:solidFill>
-                  <a:srgbClr val="5B6B82"/>
+                  <a:srgbClr val="0A2240"/>
                 </a:solidFill>
                 <a:latin typeface="Arial"/>
               </a:rPr>
@@ -36771,7 +36156,7 @@
             <a:fld id="{4B0E1F8A-6C1D-4E2A-9F3B-7A5C8D2E1F60}" type="slidenum">
               <a:rPr sz="1600" b="0" i="0">
                 <a:solidFill>
-                  <a:srgbClr val="5B6B82"/>
+                  <a:srgbClr val="0A2240"/>
                 </a:solidFill>
                 <a:latin typeface="Arial"/>
               </a:rPr>
